--- a/manaberu/slides/manaberu-05-form-view-dashboard.pptx
+++ b/manaberu/slides/manaberu-05-form-view-dashboard.pptx
@@ -114,13 +114,13 @@
   <p:extLst>
     <p:ext uri="{521415D9-36F7-43E2-AB2F-B90AF26B5E84}">
       <p14:sectionLst xmlns:p14="http://schemas.microsoft.com/office/powerpoint/2010/main">
-        <p14:section name="導入" id="{f8512730-0369-06c3-89bf-3a69783e4a8d}">
+        <p14:section name="導入" id="{4070469d-d145-484d-56e8-baa1d4780204}">
           <p14:sldIdLst>
             <p14:sldId id="256"/>
             <p14:sldId id="257"/>
           </p14:sldIdLst>
         </p14:section>
-        <p14:section name="本編" id="{6c02968e-ab26-7004-dc9d-d6962ba546f8}">
+        <p14:section name="本編" id="{c4882da8-bc2f-f103-bb4a-ad8a80752c17}">
           <p14:sldIdLst>
             <p14:sldId id="258"/>
             <p14:sldId id="259"/>
@@ -128,7 +128,7 @@
             <p14:sldId id="261"/>
           </p14:sldIdLst>
         </p14:section>
-        <p14:section name="まとめ" id="{446480ec-8d79-efc2-31da-3900fb714ebc}">
+        <p14:section name="まとめ" id="{e0150556-c593-e17d-a383-ecfdcc86bb32}">
           <p14:sldIdLst>
             <p14:sldId id="262"/>
             <p14:sldId id="263"/>
@@ -1228,12 +1228,19 @@
 
 <file path=ppt/slideLayouts/slideLayout2.xml><?xml version="1.0" encoding="utf-8"?>
 <p:sldLayout xmlns:a="http://schemas.openxmlformats.org/drawingml/2006/main" xmlns:r="http://schemas.openxmlformats.org/officeDocument/2006/relationships" xmlns:p="http://schemas.openxmlformats.org/presentationml/2006/main" preserve="1">
-  <p:cSld name="MANA_TITLE">
+  <p:cSld name="MANA_COVER">
     <p:bg>
       <p:bgPr>
-        <a:solidFill>
-          <a:srgbClr val="FFD600"/>
-        </a:solidFill>
+        <a:blipFill dpi="0" rotWithShape="1">
+          <a:blip r:embed="rId1">
+            <a:lum/>
+          </a:blip>
+          <a:srcRect/>
+          <a:stretch>
+            <a:fillRect/>
+          </a:stretch>
+        </a:blipFill>
+        <a:effectLst/>
       </p:bgPr>
     </p:bg>
     <p:spTree>
@@ -1250,156 +1257,6 @@
           <a:chExt cx="0" cy="0"/>
         </a:xfrm>
       </p:grpSpPr>
-      <p:sp>
-        <p:nvSpPr>
-          <p:cNvPr id="2" name="Text 0"/>
-          <p:cNvSpPr/>
-          <p:nvPr>
-            <p:ph idx="100" type="title" hasCustomPrompt="1"/>
-          </p:nvPr>
-        </p:nvSpPr>
-        <p:spPr>
-          <a:xfrm>
-            <a:off x="548640" y="1691640"/>
-            <a:ext cx="5852160" cy="1371600"/>
-          </a:xfrm>
-          <a:prstGeom prst="rect">
-            <a:avLst/>
-          </a:prstGeom>
-          <a:noFill/>
-          <a:ln/>
-        </p:spPr>
-        <p:txBody>
-          <a:bodyPr wrap="square" rtlCol="0"/>
-          <a:lstStyle>
-            <a:lvl1pPr algn="l" indent="0" marL="0">
-              <a:buNone/>
-              <a:defRPr lang="en-US" sz="3200" b="1" dirty="0">
-                <a:solidFill>
-                  <a:schemeClr val="tx1"/>
-                </a:solidFill>
-              </a:defRPr>
-            </a:lvl1pPr>
-          </a:lstStyle>
-          <a:p>
-            <a:pPr algn="l" indent="0" marL="0">
-              <a:buNone/>
-            </a:pPr>
-            <a:endParaRPr lang="en-US" sz="3200" dirty="0"/>
-          </a:p>
-        </p:txBody>
-      </p:sp>
-      <p:sp>
-        <p:nvSpPr>
-          <p:cNvPr id="3" name="Text 0"/>
-          <p:cNvSpPr/>
-          <p:nvPr>
-            <p:ph idx="101" type="body" hasCustomPrompt="1"/>
-          </p:nvPr>
-        </p:nvSpPr>
-        <p:spPr>
-          <a:xfrm>
-            <a:off x="548640" y="3246120"/>
-            <a:ext cx="5852160" cy="457200"/>
-          </a:xfrm>
-          <a:prstGeom prst="rect">
-            <a:avLst/>
-          </a:prstGeom>
-          <a:noFill/>
-          <a:ln/>
-        </p:spPr>
-        <p:txBody>
-          <a:bodyPr wrap="square" rtlCol="0"/>
-          <a:lstStyle>
-            <a:lvl1pPr indent="0" marL="0">
-              <a:buNone/>
-              <a:defRPr lang="en-US" sz="1400" dirty="0">
-                <a:solidFill>
-                  <a:schemeClr val="tx1"/>
-                </a:solidFill>
-              </a:defRPr>
-            </a:lvl1pPr>
-          </a:lstStyle>
-          <a:p>
-            <a:pPr indent="0" marL="0">
-              <a:buNone/>
-            </a:pPr>
-            <a:endParaRPr lang="en-US" sz="1400" dirty="0"/>
-          </a:p>
-        </p:txBody>
-      </p:sp>
-      <p:sp>
-        <p:nvSpPr>
-          <p:cNvPr id="4" name="Text 0"/>
-          <p:cNvSpPr/>
-          <p:nvPr/>
-        </p:nvSpPr>
-        <p:spPr>
-          <a:xfrm>
-            <a:off x="548640" y="4526280"/>
-            <a:ext cx="5486400" cy="274320"/>
-          </a:xfrm>
-          <a:prstGeom prst="rect">
-            <a:avLst/>
-          </a:prstGeom>
-          <a:noFill/>
-          <a:ln/>
-        </p:spPr>
-        <p:txBody>
-          <a:bodyPr wrap="square" lIns="0" tIns="0" rIns="0" bIns="0" rtlCol="0" anchor="ctr"/>
-          <a:lstStyle/>
-          <a:p>
-            <a:pPr indent="0" marL="0">
-              <a:buNone/>
-            </a:pPr>
-            <a:r>
-              <a:rPr lang="en-US" sz="1000" dirty="0">
-                <a:solidFill>
-                  <a:schemeClr val="tx1"/>
-                </a:solidFill>
-              </a:rPr>
-              <a:t>マナベル｜AI×Lark 構築者育成講座</a:t>
-            </a:r>
-            <a:endParaRPr lang="en-US" sz="1000" dirty="0"/>
-          </a:p>
-        </p:txBody>
-      </p:sp>
-      <p:sp>
-        <p:nvSpPr>
-          <p:cNvPr id="5" name="Text 1"/>
-          <p:cNvSpPr/>
-          <p:nvPr/>
-        </p:nvSpPr>
-        <p:spPr>
-          <a:xfrm>
-            <a:off x="6766560" y="4526280"/>
-            <a:ext cx="1828800" cy="274320"/>
-          </a:xfrm>
-          <a:prstGeom prst="rect">
-            <a:avLst/>
-          </a:prstGeom>
-          <a:noFill/>
-          <a:ln/>
-        </p:spPr>
-        <p:txBody>
-          <a:bodyPr wrap="square" lIns="0" tIns="0" rIns="0" bIns="0" rtlCol="0" anchor="ctr"/>
-          <a:lstStyle/>
-          <a:p>
-            <a:pPr algn="r" indent="0" marL="0">
-              <a:buNone/>
-            </a:pPr>
-            <a:r>
-              <a:rPr lang="en-US" sz="1000" b="1" dirty="0">
-                <a:solidFill>
-                  <a:schemeClr val="tx1"/>
-                </a:solidFill>
-              </a:rPr>
-              <a:t>ささエール</a:t>
-            </a:r>
-            <a:endParaRPr lang="en-US" sz="1000" dirty="0"/>
-          </a:p>
-        </p:txBody>
-      </p:sp>
     </p:spTree>
   </p:cSld>
   <p:clrMapOvr>
@@ -1413,9 +1270,16 @@
   <p:cSld name="MANA_CONTENT">
     <p:bg>
       <p:bgPr>
-        <a:solidFill>
-          <a:srgbClr val="FFFFFF"/>
-        </a:solidFill>
+        <a:blipFill dpi="0" rotWithShape="1">
+          <a:blip r:embed="rId1">
+            <a:lum/>
+          </a:blip>
+          <a:srcRect/>
+          <a:stretch>
+            <a:fillRect/>
+          </a:stretch>
+        </a:blipFill>
+        <a:effectLst/>
       </p:bgPr>
     </p:bg>
     <p:spTree>
@@ -1434,16 +1298,36 @@
       </p:grpSpPr>
       <p:sp>
         <p:nvSpPr>
-          <p:cNvPr id="2" name="Text 0"/>
+          <p:cNvPr id="2" name="Shape 0"/>
           <p:cNvSpPr/>
-          <p:nvPr>
-            <p:ph idx="100" type="title" hasCustomPrompt="1"/>
-          </p:nvPr>
-        </p:nvSpPr>
-        <p:spPr>
-          <a:xfrm>
-            <a:off x="548640" y="658368"/>
-            <a:ext cx="8046720" cy="566928"/>
+          <p:nvPr/>
+        </p:nvSpPr>
+        <p:spPr>
+          <a:xfrm>
+            <a:off x="6400800" y="4754880"/>
+            <a:ext cx="2423160" cy="274320"/>
+          </a:xfrm>
+          <a:prstGeom prst="rect">
+            <a:avLst>
+              <a:gd name="adj" fmla="val 50000"/>
+            </a:avLst>
+          </a:prstGeom>
+          <a:solidFill>
+            <a:srgbClr val="1A1A1A"/>
+          </a:solidFill>
+          <a:ln/>
+        </p:spPr>
+      </p:sp>
+      <p:sp>
+        <p:nvSpPr>
+          <p:cNvPr id="3" name="Text 1"/>
+          <p:cNvSpPr/>
+          <p:nvPr/>
+        </p:nvSpPr>
+        <p:spPr>
+          <a:xfrm>
+            <a:off x="6510528" y="4754880"/>
+            <a:ext cx="1828800" cy="274320"/>
           </a:xfrm>
           <a:prstGeom prst="rect">
             <a:avLst/>
@@ -1452,35 +1336,37 @@
           <a:ln/>
         </p:spPr>
         <p:txBody>
-          <a:bodyPr wrap="square" rtlCol="0"/>
-          <a:lstStyle>
-            <a:lvl1pPr algn="l" indent="0" marL="0">
-              <a:buNone/>
-              <a:defRPr lang="en-US" sz="2400" b="1" dirty="0">
-                <a:solidFill>
-                  <a:schemeClr val="tx1"/>
-                </a:solidFill>
-              </a:defRPr>
-            </a:lvl1pPr>
-          </a:lstStyle>
-          <a:p>
-            <a:pPr algn="l" indent="0" marL="0">
-              <a:buNone/>
-            </a:pPr>
-            <a:endParaRPr lang="en-US" sz="2400" dirty="0"/>
-          </a:p>
-        </p:txBody>
-      </p:sp>
-      <p:sp>
-        <p:nvSpPr>
-          <p:cNvPr id="3" name="Text 0"/>
+          <a:bodyPr wrap="square" lIns="0" tIns="0" rIns="0" bIns="0" rtlCol="0" anchor="ctr"/>
+          <a:lstStyle/>
+          <a:p>
+            <a:pPr indent="0" marL="0">
+              <a:buNone/>
+            </a:pPr>
+            <a:r>
+              <a:rPr lang="ja-JP" altLang="en-US" sz="850" b="1" dirty="0">
+                <a:solidFill>
+                  <a:srgbClr val="FFFFFF"/>
+                </a:solidFill>
+                <a:latin typeface="Noto Sans JP" pitchFamily="34" charset="0"/>
+                <a:ea typeface="Noto Sans JP" pitchFamily="34" charset="-122"/>
+                <a:cs typeface="Noto Sans JP" pitchFamily="34" charset="-120"/>
+              </a:rPr>
+              <a:t>ささエール｜OFFICE PLATA</a:t>
+            </a:r>
+            <a:endParaRPr lang="ja-JP" sz="850" dirty="0"/>
+          </a:p>
+        </p:txBody>
+      </p:sp>
+      <p:sp>
+        <p:nvSpPr>
+          <p:cNvPr id="4" name="Text 2"/>
           <p:cNvSpPr/>
           <p:nvPr/>
         </p:nvSpPr>
         <p:spPr>
           <a:xfrm>
-            <a:off x="548640" y="4773168"/>
-            <a:ext cx="6400800" cy="228600"/>
+            <a:off x="365760" y="4754880"/>
+            <a:ext cx="5852160" cy="274320"/>
           </a:xfrm>
           <a:prstGeom prst="rect">
             <a:avLst/>
@@ -1496,14 +1382,17 @@
               <a:buNone/>
             </a:pPr>
             <a:r>
-              <a:rPr lang="en-US" sz="900" dirty="0">
-                <a:solidFill>
-                  <a:schemeClr val="tx2"/>
-                </a:solidFill>
+              <a:rPr lang="ja-JP" altLang="en-US" sz="850" dirty="0">
+                <a:solidFill>
+                  <a:srgbClr val="1A1A1A"/>
+                </a:solidFill>
+                <a:latin typeface="Noto Sans JP Medium" pitchFamily="34" charset="0"/>
+                <a:ea typeface="Noto Sans JP Medium" pitchFamily="34" charset="-122"/>
+                <a:cs typeface="Noto Sans JP Medium" pitchFamily="34" charset="-120"/>
               </a:rPr>
               <a:t>マナベル　第5回　フォーム・ビュー・ダッシュボード</a:t>
             </a:r>
-            <a:endParaRPr lang="en-US" sz="900" dirty="0"/>
+            <a:endParaRPr lang="ja-JP" sz="850" dirty="0"/>
           </a:p>
         </p:txBody>
       </p:sp>
@@ -1519,8 +1408,8 @@
         </p:nvSpPr>
         <p:spPr>
           <a:xfrm>
-            <a:off x="8229600" y="4773168"/>
-            <a:ext cx="365760" cy="228600"/>
+            <a:off x="8366760" y="4754880"/>
+            <a:ext cx="365760" cy="274320"/>
           </a:xfrm>
           <a:prstGeom prst="rect">
             <a:avLst/>
@@ -1532,169 +1421,26 @@
           </a:extLst>
         </p:spPr>
         <p:txBody>
-          <a:bodyPr/>
+          <a:bodyPr anchor="ctr"/>
           <a:lstStyle>
             <a:lvl1pPr>
-              <a:defRPr sz="900">
-                <a:solidFill>
-                  <a:srgbClr val="5A6872"/>
-                </a:solidFill>
+              <a:defRPr sz="850">
+                <a:solidFill>
+                  <a:srgbClr val="FFFFFF"/>
+                </a:solidFill>
+                <a:latin typeface="Noto Sans JP"/>
+                <a:ea typeface="Noto Sans JP"/>
+                <a:cs typeface="Noto Sans JP"/>
               </a:defRPr>
             </a:lvl1pPr>
           </a:lstStyle>
           <a:p>
             <a:pPr algn="r"/>
             <a:fld id="{F7021451-1387-4CA6-816F-3879F97B5CBC}" type="slidenum">
-              <a:rPr b="0" lang="en-US"/>
+              <a:rPr b="1" lang="en-US"/>
               <a:t>1003</a:t>
             </a:fld>
             <a:endParaRPr lang="en-US"/>
-          </a:p>
-        </p:txBody>
-      </p:sp>
-    </p:spTree>
-  </p:cSld>
-  <p:clrMapOvr>
-    <a:masterClrMapping/>
-  </p:clrMapOvr>
-</p:sldLayout>
-</file>
-
-<file path=ppt/slideLayouts/slideLayout4.xml><?xml version="1.0" encoding="utf-8"?>
-<p:sldLayout xmlns:a="http://schemas.openxmlformats.org/drawingml/2006/main" xmlns:r="http://schemas.openxmlformats.org/officeDocument/2006/relationships" xmlns:p="http://schemas.openxmlformats.org/presentationml/2006/main" preserve="1">
-  <p:cSld name="MANA_DARK">
-    <p:bg>
-      <p:bgPr>
-        <a:solidFill>
-          <a:srgbClr val="1A1A1A"/>
-        </a:solidFill>
-      </p:bgPr>
-    </p:bg>
-    <p:spTree>
-      <p:nvGrpSpPr>
-        <p:cNvPr id="1" name=""/>
-        <p:cNvGrpSpPr/>
-        <p:nvPr/>
-      </p:nvGrpSpPr>
-      <p:grpSpPr>
-        <a:xfrm>
-          <a:off x="0" y="0"/>
-          <a:ext cx="0" cy="0"/>
-          <a:chOff x="0" y="0"/>
-          <a:chExt cx="0" cy="0"/>
-        </a:xfrm>
-      </p:grpSpPr>
-      <p:sp>
-        <p:nvSpPr>
-          <p:cNvPr id="2" name="Text 0"/>
-          <p:cNvSpPr/>
-          <p:nvPr>
-            <p:ph idx="100" type="title" hasCustomPrompt="1"/>
-          </p:nvPr>
-        </p:nvSpPr>
-        <p:spPr>
-          <a:xfrm>
-            <a:off x="548640" y="1463040"/>
-            <a:ext cx="8046720" cy="1005840"/>
-          </a:xfrm>
-          <a:prstGeom prst="rect">
-            <a:avLst/>
-          </a:prstGeom>
-          <a:noFill/>
-          <a:ln/>
-        </p:spPr>
-        <p:txBody>
-          <a:bodyPr wrap="square" rtlCol="0"/>
-          <a:lstStyle>
-            <a:lvl1pPr algn="l" indent="0" marL="0">
-              <a:buNone/>
-              <a:defRPr lang="en-US" sz="3000" b="1" dirty="0">
-                <a:solidFill>
-                  <a:schemeClr val="accent1"/>
-                </a:solidFill>
-              </a:defRPr>
-            </a:lvl1pPr>
-          </a:lstStyle>
-          <a:p>
-            <a:pPr algn="l" indent="0" marL="0">
-              <a:buNone/>
-            </a:pPr>
-            <a:endParaRPr lang="en-US" sz="3000" dirty="0"/>
-          </a:p>
-        </p:txBody>
-      </p:sp>
-      <p:sp>
-        <p:nvSpPr>
-          <p:cNvPr id="3" name="Text 0"/>
-          <p:cNvSpPr/>
-          <p:nvPr>
-            <p:ph idx="101" type="body" hasCustomPrompt="1"/>
-          </p:nvPr>
-        </p:nvSpPr>
-        <p:spPr>
-          <a:xfrm>
-            <a:off x="548640" y="2606040"/>
-            <a:ext cx="8046720" cy="1097280"/>
-          </a:xfrm>
-          <a:prstGeom prst="rect">
-            <a:avLst/>
-          </a:prstGeom>
-          <a:noFill/>
-          <a:ln/>
-        </p:spPr>
-        <p:txBody>
-          <a:bodyPr wrap="square" rtlCol="0"/>
-          <a:lstStyle>
-            <a:lvl1pPr indent="0" marL="0">
-              <a:buNone/>
-              <a:defRPr lang="en-US" sz="1500" dirty="0">
-                <a:solidFill>
-                  <a:schemeClr val="bg1"/>
-                </a:solidFill>
-              </a:defRPr>
-            </a:lvl1pPr>
-          </a:lstStyle>
-          <a:p>
-            <a:pPr indent="0" marL="0">
-              <a:buNone/>
-            </a:pPr>
-            <a:endParaRPr lang="en-US" sz="1500" dirty="0"/>
-          </a:p>
-        </p:txBody>
-      </p:sp>
-      <p:sp>
-        <p:nvSpPr>
-          <p:cNvPr id="4" name="Text 0"/>
-          <p:cNvSpPr/>
-          <p:nvPr/>
-        </p:nvSpPr>
-        <p:spPr>
-          <a:xfrm>
-            <a:off x="548640" y="4526280"/>
-            <a:ext cx="5486400" cy="274320"/>
-          </a:xfrm>
-          <a:prstGeom prst="rect">
-            <a:avLst/>
-          </a:prstGeom>
-          <a:noFill/>
-          <a:ln/>
-        </p:spPr>
-        <p:txBody>
-          <a:bodyPr wrap="square" lIns="0" tIns="0" rIns="0" bIns="0" rtlCol="0" anchor="ctr"/>
-          <a:lstStyle/>
-          <a:p>
-            <a:pPr indent="0" marL="0">
-              <a:buNone/>
-            </a:pPr>
-            <a:r>
-              <a:rPr lang="en-US" sz="1000" dirty="0">
-                <a:solidFill>
-                  <a:schemeClr val="bg1"/>
-                </a:solidFill>
-              </a:rPr>
-              <a:t>マナベル｜AI×Lark 構築者育成講座</a:t>
-            </a:r>
-            <a:endParaRPr lang="en-US" sz="1000" dirty="0"/>
           </a:p>
         </p:txBody>
       </p:sp>
@@ -1735,8 +1481,8 @@
         </p:nvSpPr>
         <p:spPr>
           <a:xfrm>
-            <a:off x="8229600" y="4773168"/>
-            <a:ext cx="365760" cy="228600"/>
+            <a:off x="8366760" y="4754880"/>
+            <a:ext cx="365760" cy="274320"/>
           </a:xfrm>
           <a:prstGeom prst="rect">
             <a:avLst/>
@@ -1748,20 +1494,23 @@
           </a:extLst>
         </p:spPr>
         <p:txBody>
-          <a:bodyPr/>
+          <a:bodyPr anchor="ctr"/>
           <a:lstStyle>
             <a:lvl1pPr>
-              <a:defRPr sz="900">
-                <a:solidFill>
-                  <a:srgbClr val="5A6872"/>
-                </a:solidFill>
+              <a:defRPr sz="850">
+                <a:solidFill>
+                  <a:srgbClr val="FFFFFF"/>
+                </a:solidFill>
+                <a:latin typeface="Noto Sans JP"/>
+                <a:ea typeface="Noto Sans JP"/>
+                <a:cs typeface="Noto Sans JP"/>
               </a:defRPr>
             </a:lvl1pPr>
           </a:lstStyle>
           <a:p>
             <a:pPr algn="r"/>
             <a:fld id="{F7021451-1387-4CA6-816F-3879F97B5CBC}" type="slidenum">
-              <a:rPr b="0" lang="en-US"/>
+              <a:rPr b="1" lang="en-US"/>
               <a:t>null</a:t>
             </a:fld>
             <a:endParaRPr lang="en-US"/>
@@ -1775,7 +1524,6 @@
     <p:sldLayoutId id="2147483649" r:id="rId1"/>
     <p:sldLayoutId id="2147483650" r:id="rId2"/>
     <p:sldLayoutId id="2147483651" r:id="rId3"/>
-    <p:sldLayoutId id="2147483652" r:id="rId4"/>
   </p:sldLayoutIdLst>
   <p:hf sldNum="0" hdr="0" ftr="0" dt="0"/>
   <p:txStyles>
@@ -2048,50 +1796,92 @@
           <a:chExt cx="0" cy="0"/>
         </a:xfrm>
       </p:grpSpPr>
-      <p:sp>
-        <p:nvSpPr>
-          <p:cNvPr id="2" name="lesson-badge"/>
-          <p:cNvSpPr/>
-          <p:nvPr/>
-        </p:nvSpPr>
-        <p:spPr>
-          <a:xfrm>
-            <a:off x="548640" y="822960"/>
-            <a:ext cx="1828800" cy="566928"/>
-          </a:xfrm>
-          <a:prstGeom prst="roundRect">
-            <a:avLst>
-              <a:gd name="adj" fmla="val 50000"/>
-            </a:avLst>
+      <p:pic>
+        <p:nvPicPr>
+          <p:cNvPr id="2" name="portrait" descr="講師 笹原彰朗">    </p:cNvPr>
+          <p:cNvPicPr>
+            <a:picLocks noChangeAspect="1"/>
+          </p:cNvPicPr>
+          <p:nvPr/>
+        </p:nvPicPr>
+        <p:blipFill>
+          <a:blip r:embed="rId1"/>
+          <a:stretch>
+            <a:fillRect/>
+          </a:stretch>
+        </p:blipFill>
+        <p:spPr>
+          <a:xfrm>
+            <a:off x="6003588" y="1211580"/>
+            <a:ext cx="2866092" cy="3931920"/>
+          </a:xfrm>
+          <a:prstGeom prst="rect">
+            <a:avLst/>
+          </a:prstGeom>
+        </p:spPr>
+      </p:pic>
+      <p:sp>
+        <p:nvSpPr>
+          <p:cNvPr id="3" name="Text 0"/>
+          <p:cNvSpPr txBox="1"/>
+          <p:nvPr/>
+        </p:nvSpPr>
+        <p:spPr>
+          <a:xfrm rot="-240000">
+            <a:off x="457200" y="411480"/>
+            <a:ext cx="1600200" cy="603504"/>
+          </a:xfrm>
+          <a:prstGeom prst="rect">
+            <a:avLst/>
           </a:prstGeom>
           <a:solidFill>
             <a:srgbClr val="1A1A1A"/>
           </a:solidFill>
-          <a:ln w="12700">
+          <a:ln>
             <a:solidFill>
               <a:srgbClr val="1A1A1A"/>
             </a:solidFill>
-            <a:prstDash val="solid"/>
           </a:ln>
           <a:effectLst>
             <a:outerShdw sx="100000" sy="100000" kx="0" ky="0" algn="bl" rotWithShape="0" blurRad="101600" dist="38100" dir="2700000">
-              <a:srgbClr val="000000">
-                <a:alpha val="18000"/>
+              <a:srgbClr val="1A1A1A">
+                <a:alpha val="100000"/>
               </a:srgbClr>
             </a:outerShdw>
           </a:effectLst>
         </p:spPr>
-      </p:sp>
-      <p:sp>
-        <p:nvSpPr>
-          <p:cNvPr id="3" name="Text 1"/>
+        <p:txBody>
+          <a:bodyPr wrap="square" lIns="0" tIns="0" rIns="0" bIns="0" rtlCol="0" anchor="ctr"/>
+          <a:lstStyle/>
+          <a:p>
+            <a:pPr algn="ctr" indent="0" marL="0">
+              <a:buNone/>
+            </a:pPr>
+            <a:r>
+              <a:rPr lang="ja-JP" altLang="en-US" sz="2200" dirty="0">
+                <a:solidFill>
+                  <a:srgbClr val="FFD600"/>
+                </a:solidFill>
+                <a:latin typeface="Dela Gothic One" pitchFamily="34" charset="0"/>
+                <a:ea typeface="けいふぉんと" pitchFamily="34" charset="-122"/>
+                <a:cs typeface="Dela Gothic One" pitchFamily="34" charset="-120"/>
+              </a:rPr>
+              <a:t>第5回</a:t>
+            </a:r>
+            <a:endParaRPr lang="ja-JP" sz="2200" dirty="0"/>
+          </a:p>
+        </p:txBody>
+      </p:sp>
+      <p:sp>
+        <p:nvSpPr>
+          <p:cNvPr id="4" name="Text 1"/>
           <p:cNvSpPr txBox="1"/>
           <p:nvPr/>
         </p:nvSpPr>
         <p:spPr>
           <a:xfrm>
-            <a:off x="548640" y="822960"/>
-            <a:ext cx="1828800" cy="566928"/>
+            <a:off x="457200" y="1188720"/>
+            <a:ext cx="6035040" cy="1600200"/>
           </a:xfrm>
           <a:prstGeom prst="rect">
             <a:avLst/>
@@ -2100,6 +1890,63 @@
           <a:ln/>
         </p:spPr>
         <p:txBody>
+          <a:bodyPr wrap="square" lIns="0" tIns="0" rIns="0" bIns="0" rtlCol="0" anchor="ctr">
+            <a:normAutofit/>
+          </a:bodyPr>
+          <a:lstStyle/>
+          <a:p>
+            <a:pPr indent="0" marL="0">
+              <a:lnSpc>
+                <a:spcPct val="105000"/>
+              </a:lnSpc>
+              <a:buNone/>
+            </a:pPr>
+            <a:r>
+              <a:rPr lang="ja-JP" altLang="en-US" sz="2700" dirty="0">
+                <a:solidFill>
+                  <a:srgbClr val="1A1A1A"/>
+                </a:solidFill>
+                <a:latin typeface="Dela Gothic One" pitchFamily="34" charset="0"/>
+                <a:ea typeface="けいふぉんと" pitchFamily="34" charset="-122"/>
+                <a:cs typeface="Dela Gothic One" pitchFamily="34" charset="-120"/>
+              </a:rPr>
+              <a:t>フォーム・ビュー・ダッシュボード</a:t>
+            </a:r>
+            <a:endParaRPr lang="ja-JP" sz="2700" dirty="0"/>
+          </a:p>
+        </p:txBody>
+      </p:sp>
+      <p:sp>
+        <p:nvSpPr>
+          <p:cNvPr id="5" name="Text 2"/>
+          <p:cNvSpPr txBox="1"/>
+          <p:nvPr/>
+        </p:nvSpPr>
+        <p:spPr>
+          <a:xfrm rot="-120000">
+            <a:off x="457200" y="2971800"/>
+            <a:ext cx="4937760" cy="502920"/>
+          </a:xfrm>
+          <a:prstGeom prst="rect">
+            <a:avLst/>
+          </a:prstGeom>
+          <a:solidFill>
+            <a:srgbClr val="DD6420"/>
+          </a:solidFill>
+          <a:ln w="19050">
+            <a:solidFill>
+              <a:srgbClr val="1A1A1A"/>
+            </a:solidFill>
+          </a:ln>
+          <a:effectLst>
+            <a:outerShdw sx="100000" sy="100000" kx="0" ky="0" algn="bl" rotWithShape="0" blurRad="101600" dist="38100" dir="2700000">
+              <a:srgbClr val="1A1A1A">
+                <a:alpha val="100000"/>
+              </a:srgbClr>
+            </a:outerShdw>
+          </a:effectLst>
+        </p:spPr>
+        <p:txBody>
           <a:bodyPr wrap="square" lIns="0" tIns="0" rIns="0" bIns="0" rtlCol="0" anchor="ctr"/>
           <a:lstStyle/>
           <a:p>
@@ -2107,109 +1954,38 @@
               <a:buNone/>
             </a:pPr>
             <a:r>
-              <a:rPr lang="en-US" sz="2200" b="1" dirty="0">
-                <a:solidFill>
-                  <a:schemeClr val="accent1"/>
-                </a:solidFill>
-              </a:rPr>
-              <a:t>第5回</a:t>
-            </a:r>
-            <a:endParaRPr lang="en-US" sz="2200" dirty="0"/>
-          </a:p>
-        </p:txBody>
-      </p:sp>
-      <p:sp>
-        <p:nvSpPr>
-          <p:cNvPr id="4" name="Text 0"/>
+              <a:rPr lang="ja-JP" altLang="en-US" sz="1600" b="1" dirty="0">
+                <a:solidFill>
+                  <a:srgbClr val="FFFFFF"/>
+                </a:solidFill>
+                <a:latin typeface="Noto Sans JP" pitchFamily="34" charset="0"/>
+                <a:ea typeface="Noto Sans JP" pitchFamily="34" charset="-122"/>
+                <a:cs typeface="Noto Sans JP" pitchFamily="34" charset="-120"/>
+              </a:rPr>
+              <a:t>フェーズ2 Larkで組む｜第3週</a:t>
+            </a:r>
+            <a:endParaRPr lang="ja-JP" sz="1600" dirty="0"/>
+          </a:p>
+        </p:txBody>
+      </p:sp>
+      <p:sp>
+        <p:nvSpPr>
+          <p:cNvPr id="6" name="card"/>
           <p:cNvSpPr/>
-          <p:nvPr>
-            <p:ph idx="100" type="title" hasCustomPrompt="1"/>
-          </p:nvPr>
-        </p:nvSpPr>
-        <p:spPr>
-          <a:xfrm>
-            <a:off x="548640" y="1691640"/>
-            <a:ext cx="5852160" cy="1371600"/>
-          </a:xfrm>
-          <a:prstGeom prst="rect">
-            <a:avLst/>
-          </a:prstGeom>
-          <a:noFill/>
-          <a:ln/>
-        </p:spPr>
-        <p:txBody>
-          <a:bodyPr wrap="square" lIns="0" tIns="0" rIns="0" bIns="0" rtlCol="0" anchor="t"/>
-          <a:lstStyle/>
-          <a:p>
-            <a:pPr algn="l" indent="0" marL="0">
-              <a:buNone/>
-            </a:pPr>
-            <a:r>
-              <a:rPr lang="en-US" sz="3200" b="1" dirty="0">
-                <a:solidFill>
-                  <a:schemeClr val="tx1"/>
-                </a:solidFill>
-              </a:rPr>
-              <a:t>フォーム・ビュー・ダッシュボード</a:t>
-            </a:r>
-            <a:endParaRPr lang="en-US" sz="3200" dirty="0"/>
-          </a:p>
-        </p:txBody>
-      </p:sp>
-      <p:sp>
-        <p:nvSpPr>
-          <p:cNvPr id="5" name="Text 0"/>
-          <p:cNvSpPr/>
-          <p:nvPr>
-            <p:ph idx="101" type="body" hasCustomPrompt="1"/>
-          </p:nvPr>
-        </p:nvSpPr>
-        <p:spPr>
-          <a:xfrm>
-            <a:off x="548640" y="3246120"/>
-            <a:ext cx="5852160" cy="457200"/>
-          </a:xfrm>
-          <a:prstGeom prst="rect">
-            <a:avLst/>
-          </a:prstGeom>
-          <a:noFill/>
-          <a:ln/>
-        </p:spPr>
-        <p:txBody>
-          <a:bodyPr wrap="square" lIns="0" tIns="0" rIns="0" bIns="0" rtlCol="0"/>
-          <a:lstStyle/>
-          <a:p>
-            <a:pPr indent="0" marL="0">
-              <a:buNone/>
-            </a:pPr>
-            <a:r>
-              <a:rPr lang="en-US" sz="1400" dirty="0">
-                <a:solidFill>
-                  <a:schemeClr val="tx1"/>
-                </a:solidFill>
-              </a:rPr>
-              <a:t>フェーズ2 Larkで組む　｜　第3週</a:t>
-            </a:r>
-            <a:endParaRPr lang="en-US" sz="1400" dirty="0"/>
-          </a:p>
-        </p:txBody>
-      </p:sp>
-      <p:sp>
-        <p:nvSpPr>
-          <p:cNvPr id="6" name="title-circle"/>
-          <p:cNvSpPr/>
-          <p:nvPr/>
-        </p:nvSpPr>
-        <p:spPr>
-          <a:xfrm>
-            <a:off x="6537960" y="1188720"/>
-            <a:ext cx="2103120" cy="2103120"/>
-          </a:xfrm>
-          <a:prstGeom prst="ellipse">
-            <a:avLst/>
-          </a:prstGeom>
-          <a:solidFill>
-            <a:schemeClr val="bg1"/>
+          <p:nvPr/>
+        </p:nvSpPr>
+        <p:spPr>
+          <a:xfrm>
+            <a:off x="457200" y="3730752"/>
+            <a:ext cx="4937760" cy="896112"/>
+          </a:xfrm>
+          <a:prstGeom prst="roundRect">
+            <a:avLst>
+              <a:gd name="adj" fmla="val 10204"/>
+            </a:avLst>
+          </a:prstGeom>
+          <a:solidFill>
+            <a:srgbClr val="FFFFFF"/>
           </a:solidFill>
           <a:ln w="25400">
             <a:solidFill>
@@ -2218,38 +1994,76 @@
             <a:prstDash val="solid"/>
           </a:ln>
           <a:effectLst>
-            <a:outerShdw sx="100000" sy="100000" kx="0" ky="0" algn="bl" rotWithShape="0" blurRad="101600" dist="38100" dir="2700000">
-              <a:srgbClr val="000000">
-                <a:alpha val="18000"/>
+            <a:outerShdw sx="100000" sy="100000" kx="0" ky="0" algn="bl" rotWithShape="0" blurRad="101600" dist="50800" dir="2700000">
+              <a:srgbClr val="1A1A1A">
+                <a:alpha val="100000"/>
               </a:srgbClr>
             </a:outerShdw>
           </a:effectLst>
         </p:spPr>
       </p:sp>
-      <p:pic>
-        <p:nvPicPr>
-          <p:cNvPr id="7" name="title-icon" descr="preencoded.png">    </p:cNvPr>
-          <p:cNvPicPr>
-            <a:picLocks noChangeAspect="1"/>
-          </p:cNvPicPr>
-          <p:nvPr/>
-        </p:nvPicPr>
-        <p:blipFill>
-          <a:blip r:embed="rId1"/>
-          <a:stretch>
-            <a:fillRect/>
-          </a:stretch>
-        </p:blipFill>
-        <p:spPr>
-          <a:xfrm>
-            <a:off x="7086600" y="1737360"/>
-            <a:ext cx="1005840" cy="1005840"/>
-          </a:xfrm>
-          <a:prstGeom prst="rect">
-            <a:avLst/>
-          </a:prstGeom>
-        </p:spPr>
-      </p:pic>
+      <p:sp>
+        <p:nvSpPr>
+          <p:cNvPr id="7" name="Text 4"/>
+          <p:cNvSpPr txBox="1"/>
+          <p:nvPr/>
+        </p:nvSpPr>
+        <p:spPr>
+          <a:xfrm>
+            <a:off x="658368" y="3767328"/>
+            <a:ext cx="4572000" cy="822960"/>
+          </a:xfrm>
+          <a:prstGeom prst="rect">
+            <a:avLst/>
+          </a:prstGeom>
+          <a:noFill/>
+          <a:ln/>
+        </p:spPr>
+        <p:txBody>
+          <a:bodyPr wrap="square" lIns="0" tIns="0" rIns="0" bIns="0" rtlCol="0" anchor="ctr"/>
+          <a:lstStyle/>
+          <a:p>
+            <a:pPr indent="0" marL="0">
+              <a:spcAft>
+                <a:spcPts val="200"/>
+              </a:spcAft>
+              <a:buNone/>
+            </a:pPr>
+            <a:r>
+              <a:rPr lang="ja-JP" altLang="en-US" sz="1500" b="1" dirty="0">
+                <a:solidFill>
+                  <a:srgbClr val="1A1A1A"/>
+                </a:solidFill>
+                <a:latin typeface="Noto Sans JP" pitchFamily="34" charset="0"/>
+                <a:ea typeface="Noto Sans JP" pitchFamily="34" charset="-122"/>
+                <a:cs typeface="Noto Sans JP" pitchFamily="34" charset="-120"/>
+              </a:rPr>
+              <a:t>マナベル｜AI×Lark 構築者育成講座</a:t>
+            </a:r>
+            <a:endParaRPr lang="ja-JP" sz="1500" dirty="0"/>
+          </a:p>
+          <a:p>
+            <a:pPr indent="0" marL="0">
+              <a:spcAft>
+                <a:spcPts val="200"/>
+              </a:spcAft>
+              <a:buNone/>
+            </a:pPr>
+            <a:r>
+              <a:rPr lang="ja-JP" altLang="en-US" sz="1150" b="1" dirty="0">
+                <a:solidFill>
+                  <a:srgbClr val="DD6420"/>
+                </a:solidFill>
+                <a:latin typeface="Noto Sans JP" pitchFamily="34" charset="0"/>
+                <a:ea typeface="Noto Sans JP" pitchFamily="34" charset="-122"/>
+                <a:cs typeface="Noto Sans JP" pitchFamily="34" charset="-120"/>
+              </a:rPr>
+              <a:t>ささエール ／ OFFICE PLATA　笹原 彰朗</a:t>
+            </a:r>
+            <a:endParaRPr lang="ja-JP" sz="1500" dirty="0"/>
+          </a:p>
+        </p:txBody>
+      </p:sp>
     </p:spTree>
   </p:cSld>
   <p:clrMapOvr>
@@ -2278,15 +2092,58 @@
       <p:sp>
         <p:nvSpPr>
           <p:cNvPr id="2" name="Text 0"/>
-          <p:cNvSpPr/>
-          <p:nvPr>
-            <p:ph idx="100" type="title" hasCustomPrompt="1"/>
-          </p:nvPr>
-        </p:nvSpPr>
-        <p:spPr>
-          <a:xfrm>
-            <a:off x="548640" y="658368"/>
-            <a:ext cx="8046720" cy="566928"/>
+          <p:cNvSpPr txBox="1"/>
+          <p:nvPr/>
+        </p:nvSpPr>
+        <p:spPr>
+          <a:xfrm rot="-180000">
+            <a:off x="411480" y="201168"/>
+            <a:ext cx="1040587" cy="352044"/>
+          </a:xfrm>
+          <a:prstGeom prst="rect">
+            <a:avLst/>
+          </a:prstGeom>
+          <a:solidFill>
+            <a:srgbClr val="1A1A1A"/>
+          </a:solidFill>
+          <a:ln>
+            <a:solidFill>
+              <a:srgbClr val="1A1A1A"/>
+            </a:solidFill>
+          </a:ln>
+        </p:spPr>
+        <p:txBody>
+          <a:bodyPr wrap="square" lIns="0" tIns="0" rIns="0" bIns="0" rtlCol="0" anchor="ctr"/>
+          <a:lstStyle/>
+          <a:p>
+            <a:pPr algn="ctr" indent="0" marL="0">
+              <a:buNone/>
+            </a:pPr>
+            <a:r>
+              <a:rPr lang="ja-JP" altLang="en-US" sz="1100" dirty="0">
+                <a:solidFill>
+                  <a:srgbClr val="FFFFFF"/>
+                </a:solidFill>
+                <a:latin typeface="Dela Gothic One" pitchFamily="34" charset="0"/>
+                <a:ea typeface="けいふぉんと" pitchFamily="34" charset="-122"/>
+                <a:cs typeface="Dela Gothic One" pitchFamily="34" charset="-120"/>
+              </a:rPr>
+              <a:t>はじめに</a:t>
+            </a:r>
+            <a:endParaRPr lang="ja-JP" sz="1100" dirty="0"/>
+          </a:p>
+        </p:txBody>
+      </p:sp>
+      <p:sp>
+        <p:nvSpPr>
+          <p:cNvPr id="3" name="Text 1"/>
+          <p:cNvSpPr txBox="1"/>
+          <p:nvPr/>
+        </p:nvSpPr>
+        <p:spPr>
+          <a:xfrm>
+            <a:off x="411480" y="502920"/>
+            <a:ext cx="8321040" cy="685800"/>
           </a:xfrm>
           <a:prstGeom prst="rect">
             <a:avLst/>
@@ -2295,105 +2152,79 @@
           <a:ln/>
         </p:spPr>
         <p:txBody>
-          <a:bodyPr wrap="square" lIns="0" tIns="0" rIns="0" bIns="0" rtlCol="0" anchor="ctr"/>
-          <a:lstStyle/>
-          <a:p>
-            <a:pPr algn="l" indent="0" marL="0">
-              <a:buNone/>
-            </a:pPr>
-            <a:r>
-              <a:rPr lang="en-US" sz="2400" b="1" dirty="0">
-                <a:solidFill>
-                  <a:schemeClr val="tx1"/>
-                </a:solidFill>
+          <a:bodyPr wrap="square" lIns="0" tIns="0" rIns="0" bIns="0" rtlCol="0" anchor="ctr">
+            <a:normAutofit/>
+          </a:bodyPr>
+          <a:lstStyle/>
+          <a:p>
+            <a:pPr indent="0" marL="0">
+              <a:buNone/>
+            </a:pPr>
+            <a:r>
+              <a:rPr lang="ja-JP" altLang="en-US" sz="2600" dirty="0">
+                <a:solidFill>
+                  <a:srgbClr val="1A1A1A"/>
+                </a:solidFill>
+                <a:latin typeface="Dela Gothic One" pitchFamily="34" charset="0"/>
+                <a:ea typeface="けいふぉんと" pitchFamily="34" charset="-122"/>
+                <a:cs typeface="Dela Gothic One" pitchFamily="34" charset="-120"/>
               </a:rPr>
               <a:t>今日のゴールと流れ</a:t>
             </a:r>
-            <a:endParaRPr lang="en-US" sz="2400" dirty="0"/>
-          </a:p>
-        </p:txBody>
-      </p:sp>
-      <p:sp>
-        <p:nvSpPr>
-          <p:cNvPr id="3" name="chip"/>
+            <a:endParaRPr lang="ja-JP" sz="2600" dirty="0"/>
+          </a:p>
+        </p:txBody>
+      </p:sp>
+      <p:sp>
+        <p:nvSpPr>
+          <p:cNvPr id="4" name="card"/>
           <p:cNvSpPr/>
           <p:nvPr/>
         </p:nvSpPr>
         <p:spPr>
           <a:xfrm>
-            <a:off x="548640" y="292608"/>
-            <a:ext cx="932688" cy="292608"/>
+            <a:off x="502920" y="1371600"/>
+            <a:ext cx="8138160" cy="1280160"/>
           </a:xfrm>
           <a:prstGeom prst="roundRect">
             <a:avLst>
-              <a:gd name="adj" fmla="val 50000"/>
+              <a:gd name="adj" fmla="val 7143"/>
             </a:avLst>
           </a:prstGeom>
           <a:solidFill>
-            <a:schemeClr val="tx1"/>
-          </a:solidFill>
-          <a:ln w="12700">
+            <a:srgbClr val="FFFFFF"/>
+          </a:solidFill>
+          <a:ln w="25400">
             <a:solidFill>
-              <a:schemeClr val="tx1"/>
+              <a:srgbClr val="1A1A1A"/>
             </a:solidFill>
             <a:prstDash val="solid"/>
           </a:ln>
-        </p:spPr>
-      </p:sp>
-      <p:sp>
-        <p:nvSpPr>
-          <p:cNvPr id="4" name="chip-text"/>
-          <p:cNvSpPr txBox="1"/>
-          <p:nvPr/>
-        </p:nvSpPr>
-        <p:spPr>
-          <a:xfrm>
-            <a:off x="548640" y="292608"/>
-            <a:ext cx="932688" cy="292608"/>
-          </a:xfrm>
-          <a:prstGeom prst="rect">
-            <a:avLst/>
-          </a:prstGeom>
-          <a:noFill/>
-          <a:ln/>
-        </p:spPr>
-        <p:txBody>
-          <a:bodyPr wrap="square" lIns="0" tIns="0" rIns="0" bIns="0" rtlCol="0" anchor="ctr"/>
-          <a:lstStyle/>
-          <a:p>
-            <a:pPr algn="ctr" indent="0" marL="0">
-              <a:buNone/>
-            </a:pPr>
-            <a:r>
-              <a:rPr lang="en-US" sz="1100" b="1" dirty="0">
-                <a:solidFill>
-                  <a:schemeClr val="accent1"/>
-                </a:solidFill>
-              </a:rPr>
-              <a:t>はじめに</a:t>
-            </a:r>
-            <a:endParaRPr lang="en-US" sz="1100" dirty="0"/>
-          </a:p>
-        </p:txBody>
-      </p:sp>
-      <p:sp>
-        <p:nvSpPr>
-          <p:cNvPr id="5" name="card"/>
+          <a:effectLst>
+            <a:outerShdw sx="100000" sy="100000" kx="0" ky="0" algn="bl" rotWithShape="0" blurRad="101600" dist="50800" dir="2700000">
+              <a:srgbClr val="1A1A1A">
+                <a:alpha val="100000"/>
+              </a:srgbClr>
+            </a:outerShdw>
+          </a:effectLst>
+        </p:spPr>
+      </p:sp>
+      <p:sp>
+        <p:nvSpPr>
+          <p:cNvPr id="5" name="icon-circle"/>
           <p:cNvSpPr/>
           <p:nvPr/>
         </p:nvSpPr>
         <p:spPr>
           <a:xfrm>
-            <a:off x="548640" y="1417320"/>
-            <a:ext cx="8046720" cy="1280160"/>
-          </a:xfrm>
-          <a:prstGeom prst="roundRect">
-            <a:avLst>
-              <a:gd name="adj" fmla="val 8571"/>
-            </a:avLst>
-          </a:prstGeom>
-          <a:solidFill>
-            <a:schemeClr val="bg2"/>
+            <a:off x="685800" y="1572768"/>
+            <a:ext cx="438912" cy="438912"/>
+          </a:xfrm>
+          <a:prstGeom prst="ellipse">
+            <a:avLst/>
+          </a:prstGeom>
+          <a:solidFill>
+            <a:srgbClr val="DD6420"/>
           </a:solidFill>
           <a:ln w="19050">
             <a:solidFill>
@@ -2401,43 +2232,11 @@
             </a:solidFill>
             <a:prstDash val="solid"/>
           </a:ln>
-          <a:effectLst>
-            <a:outerShdw sx="100000" sy="100000" kx="0" ky="0" algn="bl" rotWithShape="0" blurRad="101600" dist="38100" dir="2700000">
-              <a:srgbClr val="000000">
-                <a:alpha val="18000"/>
-              </a:srgbClr>
-            </a:outerShdw>
-          </a:effectLst>
-        </p:spPr>
-      </p:sp>
-      <p:sp>
-        <p:nvSpPr>
-          <p:cNvPr id="6" name="icon-circle"/>
-          <p:cNvSpPr/>
-          <p:nvPr/>
-        </p:nvSpPr>
-        <p:spPr>
-          <a:xfrm>
-            <a:off x="731520" y="1600200"/>
-            <a:ext cx="411480" cy="411480"/>
-          </a:xfrm>
-          <a:prstGeom prst="ellipse">
-            <a:avLst/>
-          </a:prstGeom>
-          <a:solidFill>
-            <a:schemeClr val="accent1"/>
-          </a:solidFill>
-          <a:ln w="15875">
-            <a:solidFill>
-              <a:srgbClr val="1A1A1A"/>
-            </a:solidFill>
-            <a:prstDash val="solid"/>
-          </a:ln>
         </p:spPr>
       </p:sp>
       <p:pic>
         <p:nvPicPr>
-          <p:cNvPr id="7" name="icon" descr="preencoded.png">    </p:cNvPr>
+          <p:cNvPr id="6" name="icon" descr="preencoded.png">    </p:cNvPr>
           <p:cNvPicPr>
             <a:picLocks noChangeAspect="1"/>
           </p:cNvPicPr>
@@ -2451,8 +2250,8 @@
         </p:blipFill>
         <p:spPr>
           <a:xfrm>
-            <a:off x="838505" y="1707185"/>
-            <a:ext cx="197510" cy="197510"/>
+            <a:off x="795528" y="1682496"/>
+            <a:ext cx="219456" cy="219456"/>
           </a:xfrm>
           <a:prstGeom prst="rect">
             <a:avLst/>
@@ -2461,14 +2260,14 @@
       </p:pic>
       <p:sp>
         <p:nvSpPr>
-          <p:cNvPr id="8" name="goal"/>
+          <p:cNvPr id="7" name="goal"/>
           <p:cNvSpPr txBox="1"/>
           <p:nvPr/>
         </p:nvSpPr>
         <p:spPr>
           <a:xfrm>
-            <a:off x="1280160" y="1508760"/>
-            <a:ext cx="7132320" cy="1097280"/>
+            <a:off x="1252728" y="1463040"/>
+            <a:ext cx="7223760" cy="1097280"/>
           </a:xfrm>
           <a:prstGeom prst="rect">
             <a:avLst/>
@@ -2477,59 +2276,105 @@
           <a:ln/>
         </p:spPr>
         <p:txBody>
+          <a:bodyPr wrap="square" lIns="0" tIns="0" rIns="0" bIns="0" rtlCol="0" anchor="ctr">
+            <a:normAutofit/>
+          </a:bodyPr>
+          <a:lstStyle/>
+          <a:p>
+            <a:pPr indent="0" marL="0">
+              <a:buNone/>
+            </a:pPr>
+            <a:r>
+              <a:rPr lang="ja-JP" altLang="en-US" sz="1400" b="1" dirty="0">
+                <a:solidFill>
+                  <a:srgbClr val="1A1A1A"/>
+                </a:solidFill>
+                <a:latin typeface="Noto Sans JP" pitchFamily="34" charset="0"/>
+                <a:ea typeface="Noto Sans JP" pitchFamily="34" charset="-122"/>
+                <a:cs typeface="Noto Sans JP" pitchFamily="34" charset="-120"/>
+              </a:rPr>
+              <a:t>「入力 → 一覧 → 集計」が一通りそろっている</a:t>
+            </a:r>
+            <a:endParaRPr lang="ja-JP" sz="1400" dirty="0"/>
+          </a:p>
+        </p:txBody>
+      </p:sp>
+      <p:sp>
+        <p:nvSpPr>
+          <p:cNvPr id="8" name="Text 5"/>
+          <p:cNvSpPr txBox="1"/>
+          <p:nvPr/>
+        </p:nvSpPr>
+        <p:spPr>
+          <a:xfrm rot="-120000">
+            <a:off x="457200" y="2907792"/>
+            <a:ext cx="1915668" cy="352044"/>
+          </a:xfrm>
+          <a:prstGeom prst="rect">
+            <a:avLst/>
+          </a:prstGeom>
+          <a:solidFill>
+            <a:srgbClr val="1A1A1A"/>
+          </a:solidFill>
+          <a:ln>
+            <a:solidFill>
+              <a:srgbClr val="1A1A1A"/>
+            </a:solidFill>
+          </a:ln>
+        </p:spPr>
+        <p:txBody>
           <a:bodyPr wrap="square" lIns="0" tIns="0" rIns="0" bIns="0" rtlCol="0" anchor="ctr"/>
           <a:lstStyle/>
           <a:p>
-            <a:pPr indent="0" marL="0">
-              <a:buNone/>
-            </a:pPr>
-            <a:r>
-              <a:rPr lang="en-US" sz="1400" b="1" dirty="0">
-                <a:solidFill>
-                  <a:schemeClr val="tx1"/>
-                </a:solidFill>
-              </a:rPr>
-              <a:t>「入力 → 一覧 → 集計」が一通りそろっている</a:t>
-            </a:r>
-            <a:endParaRPr lang="en-US" sz="1400" dirty="0"/>
-          </a:p>
-        </p:txBody>
-      </p:sp>
-      <p:sp>
-        <p:nvSpPr>
-          <p:cNvPr id="9" name="Text 6"/>
-          <p:cNvSpPr txBox="1"/>
-          <p:nvPr/>
-        </p:nvSpPr>
-        <p:spPr>
-          <a:xfrm>
-            <a:off x="548640" y="2971800"/>
-            <a:ext cx="3657600" cy="320040"/>
-          </a:xfrm>
-          <a:prstGeom prst="rect">
-            <a:avLst/>
-          </a:prstGeom>
-          <a:noFill/>
-          <a:ln/>
-        </p:spPr>
-        <p:txBody>
-          <a:bodyPr wrap="square" lIns="0" tIns="0" rIns="0" bIns="0" rtlCol="0" anchor="ctr"/>
-          <a:lstStyle/>
-          <a:p>
-            <a:pPr indent="0" marL="0">
-              <a:buNone/>
-            </a:pPr>
-            <a:r>
-              <a:rPr lang="en-US" sz="1300" b="1" dirty="0">
-                <a:solidFill>
-                  <a:schemeClr val="tx1"/>
-                </a:solidFill>
+            <a:pPr algn="ctr" indent="0" marL="0">
+              <a:buNone/>
+            </a:pPr>
+            <a:r>
+              <a:rPr lang="ja-JP" altLang="en-US" sz="1100" dirty="0">
+                <a:solidFill>
+                  <a:srgbClr val="FFFFFF"/>
+                </a:solidFill>
+                <a:latin typeface="Dela Gothic One" pitchFamily="34" charset="0"/>
+                <a:ea typeface="けいふぉんと" pitchFamily="34" charset="-122"/>
+                <a:cs typeface="Dela Gothic One" pitchFamily="34" charset="-120"/>
               </a:rPr>
               <a:t>今日の流れ（90分）</a:t>
             </a:r>
-            <a:endParaRPr lang="en-US" sz="1300" dirty="0"/>
-          </a:p>
-        </p:txBody>
+            <a:endParaRPr lang="ja-JP" sz="1100" dirty="0"/>
+          </a:p>
+        </p:txBody>
+      </p:sp>
+      <p:sp>
+        <p:nvSpPr>
+          <p:cNvPr id="9" name="Shape 6"/>
+          <p:cNvSpPr/>
+          <p:nvPr/>
+        </p:nvSpPr>
+        <p:spPr>
+          <a:xfrm>
+            <a:off x="502920" y="3364992"/>
+            <a:ext cx="8138160" cy="685800"/>
+          </a:xfrm>
+          <a:prstGeom prst="rect">
+            <a:avLst/>
+          </a:prstGeom>
+          <a:solidFill>
+            <a:srgbClr val="FFFFFF"/>
+          </a:solidFill>
+          <a:ln w="25400">
+            <a:solidFill>
+              <a:srgbClr val="1A1A1A"/>
+            </a:solidFill>
+            <a:prstDash val="solid"/>
+          </a:ln>
+          <a:effectLst>
+            <a:outerShdw sx="100000" sy="100000" kx="0" ky="0" algn="bl" rotWithShape="0" blurRad="101600" dist="50800" dir="2700000">
+              <a:srgbClr val="1A1A1A">
+                <a:alpha val="100000"/>
+              </a:srgbClr>
+            </a:outerShdw>
+          </a:effectLst>
+        </p:spPr>
       </p:sp>
       <p:sp>
         <p:nvSpPr>
@@ -2539,8 +2384,8 @@
         </p:nvSpPr>
         <p:spPr>
           <a:xfrm>
-            <a:off x="548640" y="3383280"/>
-            <a:ext cx="894080" cy="685800"/>
+            <a:off x="502920" y="3364992"/>
+            <a:ext cx="904240" cy="685800"/>
           </a:xfrm>
           <a:prstGeom prst="rect">
             <a:avLst/>
@@ -2564,8 +2409,8 @@
         </p:nvSpPr>
         <p:spPr>
           <a:xfrm>
-            <a:off x="548640" y="3383280"/>
-            <a:ext cx="894080" cy="685800"/>
+            <a:off x="502920" y="3364992"/>
+            <a:ext cx="904240" cy="685800"/>
           </a:xfrm>
           <a:prstGeom prst="rect">
             <a:avLst/>
@@ -2581,28 +2426,34 @@
               <a:buNone/>
             </a:pPr>
             <a:r>
-              <a:rPr lang="en-US" sz="1050" b="1" dirty="0">
+              <a:rPr lang="ja-JP" altLang="en-US" sz="1050" b="1" dirty="0">
                 <a:solidFill>
                   <a:srgbClr val="FFD600"/>
                 </a:solidFill>
+                <a:latin typeface="Noto Sans JP" pitchFamily="34" charset="0"/>
+                <a:ea typeface="Noto Sans JP" pitchFamily="34" charset="-122"/>
+                <a:cs typeface="Noto Sans JP" pitchFamily="34" charset="-120"/>
               </a:rPr>
               <a:t>ふりかえり</a:t>
             </a:r>
-            <a:endParaRPr lang="en-US" sz="1050" dirty="0"/>
+            <a:endParaRPr lang="ja-JP" sz="1050" dirty="0"/>
           </a:p>
           <a:p>
             <a:pPr algn="ctr" indent="0" marL="0">
               <a:buNone/>
             </a:pPr>
             <a:r>
-              <a:rPr lang="en-US" sz="900" b="1" dirty="0">
+              <a:rPr lang="ja-JP" altLang="en-US" sz="900" b="1" dirty="0">
                 <a:solidFill>
                   <a:srgbClr val="FFD600"/>
                 </a:solidFill>
+                <a:latin typeface="Noto Sans JP" pitchFamily="34" charset="0"/>
+                <a:ea typeface="Noto Sans JP" pitchFamily="34" charset="-122"/>
+                <a:cs typeface="Noto Sans JP" pitchFamily="34" charset="-120"/>
               </a:rPr>
               <a:t>10分</a:t>
             </a:r>
-            <a:endParaRPr lang="en-US" sz="1050" dirty="0"/>
+            <a:endParaRPr lang="ja-JP" sz="1050" dirty="0"/>
           </a:p>
         </p:txBody>
       </p:sp>
@@ -2614,8 +2465,8 @@
         </p:nvSpPr>
         <p:spPr>
           <a:xfrm>
-            <a:off x="1442720" y="3383280"/>
-            <a:ext cx="894080" cy="685800"/>
+            <a:off x="1407160" y="3364992"/>
+            <a:ext cx="904240" cy="685800"/>
           </a:xfrm>
           <a:prstGeom prst="rect">
             <a:avLst/>
@@ -2639,8 +2490,8 @@
         </p:nvSpPr>
         <p:spPr>
           <a:xfrm>
-            <a:off x="1442720" y="3383280"/>
-            <a:ext cx="894080" cy="685800"/>
+            <a:off x="1407160" y="3364992"/>
+            <a:ext cx="904240" cy="685800"/>
           </a:xfrm>
           <a:prstGeom prst="rect">
             <a:avLst/>
@@ -2656,28 +2507,34 @@
               <a:buNone/>
             </a:pPr>
             <a:r>
-              <a:rPr lang="en-US" sz="1050" b="1" dirty="0">
+              <a:rPr lang="ja-JP" altLang="en-US" sz="1050" b="1" dirty="0">
                 <a:solidFill>
                   <a:srgbClr val="FFD600"/>
                 </a:solidFill>
+                <a:latin typeface="Noto Sans JP" pitchFamily="34" charset="0"/>
+                <a:ea typeface="Noto Sans JP" pitchFamily="34" charset="-122"/>
+                <a:cs typeface="Noto Sans JP" pitchFamily="34" charset="-120"/>
               </a:rPr>
               <a:t>説明①</a:t>
             </a:r>
-            <a:endParaRPr lang="en-US" sz="1050" dirty="0"/>
+            <a:endParaRPr lang="ja-JP" sz="1050" dirty="0"/>
           </a:p>
           <a:p>
             <a:pPr algn="ctr" indent="0" marL="0">
               <a:buNone/>
             </a:pPr>
             <a:r>
-              <a:rPr lang="en-US" sz="900" b="1" dirty="0">
+              <a:rPr lang="ja-JP" altLang="en-US" sz="900" b="1" dirty="0">
                 <a:solidFill>
                   <a:srgbClr val="FFD600"/>
                 </a:solidFill>
+                <a:latin typeface="Noto Sans JP" pitchFamily="34" charset="0"/>
+                <a:ea typeface="Noto Sans JP" pitchFamily="34" charset="-122"/>
+                <a:cs typeface="Noto Sans JP" pitchFamily="34" charset="-120"/>
               </a:rPr>
               <a:t>10分</a:t>
             </a:r>
-            <a:endParaRPr lang="en-US" sz="1050" dirty="0"/>
+            <a:endParaRPr lang="ja-JP" sz="1050" dirty="0"/>
           </a:p>
         </p:txBody>
       </p:sp>
@@ -2689,8 +2546,8 @@
         </p:nvSpPr>
         <p:spPr>
           <a:xfrm>
-            <a:off x="2336800" y="3383280"/>
-            <a:ext cx="1788160" cy="685800"/>
+            <a:off x="2311400" y="3364992"/>
+            <a:ext cx="1808480" cy="685800"/>
           </a:xfrm>
           <a:prstGeom prst="rect">
             <a:avLst/>
@@ -2714,8 +2571,8 @@
         </p:nvSpPr>
         <p:spPr>
           <a:xfrm>
-            <a:off x="2336800" y="3383280"/>
-            <a:ext cx="1788160" cy="685800"/>
+            <a:off x="2311400" y="3364992"/>
+            <a:ext cx="1808480" cy="685800"/>
           </a:xfrm>
           <a:prstGeom prst="rect">
             <a:avLst/>
@@ -2731,28 +2588,34 @@
               <a:buNone/>
             </a:pPr>
             <a:r>
-              <a:rPr lang="en-US" sz="1050" b="1" dirty="0">
+              <a:rPr lang="ja-JP" altLang="en-US" sz="1050" b="1" dirty="0">
                 <a:solidFill>
                   <a:srgbClr val="FFFFFF"/>
                 </a:solidFill>
+                <a:latin typeface="Noto Sans JP" pitchFamily="34" charset="0"/>
+                <a:ea typeface="Noto Sans JP" pitchFamily="34" charset="-122"/>
+                <a:cs typeface="Noto Sans JP" pitchFamily="34" charset="-120"/>
               </a:rPr>
               <a:t>ハンズオン①</a:t>
             </a:r>
-            <a:endParaRPr lang="en-US" sz="1050" dirty="0"/>
+            <a:endParaRPr lang="ja-JP" sz="1050" dirty="0"/>
           </a:p>
           <a:p>
             <a:pPr algn="ctr" indent="0" marL="0">
               <a:buNone/>
             </a:pPr>
             <a:r>
-              <a:rPr lang="en-US" sz="900" b="1" dirty="0">
+              <a:rPr lang="ja-JP" altLang="en-US" sz="900" b="1" dirty="0">
                 <a:solidFill>
                   <a:srgbClr val="FFFFFF"/>
                 </a:solidFill>
+                <a:latin typeface="Noto Sans JP" pitchFamily="34" charset="0"/>
+                <a:ea typeface="Noto Sans JP" pitchFamily="34" charset="-122"/>
+                <a:cs typeface="Noto Sans JP" pitchFamily="34" charset="-120"/>
               </a:rPr>
               <a:t>20分</a:t>
             </a:r>
-            <a:endParaRPr lang="en-US" sz="1050" dirty="0"/>
+            <a:endParaRPr lang="ja-JP" sz="1050" dirty="0"/>
           </a:p>
         </p:txBody>
       </p:sp>
@@ -2764,8 +2627,8 @@
         </p:nvSpPr>
         <p:spPr>
           <a:xfrm>
-            <a:off x="4124960" y="3383280"/>
-            <a:ext cx="894080" cy="685800"/>
+            <a:off x="4119880" y="3364992"/>
+            <a:ext cx="904240" cy="685800"/>
           </a:xfrm>
           <a:prstGeom prst="rect">
             <a:avLst/>
@@ -2789,8 +2652,8 @@
         </p:nvSpPr>
         <p:spPr>
           <a:xfrm>
-            <a:off x="4124960" y="3383280"/>
-            <a:ext cx="894080" cy="685800"/>
+            <a:off x="4119880" y="3364992"/>
+            <a:ext cx="904240" cy="685800"/>
           </a:xfrm>
           <a:prstGeom prst="rect">
             <a:avLst/>
@@ -2806,28 +2669,34 @@
               <a:buNone/>
             </a:pPr>
             <a:r>
-              <a:rPr lang="en-US" sz="1050" b="1" dirty="0">
+              <a:rPr lang="ja-JP" altLang="en-US" sz="1050" b="1" dirty="0">
                 <a:solidFill>
                   <a:srgbClr val="FFD600"/>
                 </a:solidFill>
+                <a:latin typeface="Noto Sans JP" pitchFamily="34" charset="0"/>
+                <a:ea typeface="Noto Sans JP" pitchFamily="34" charset="-122"/>
+                <a:cs typeface="Noto Sans JP" pitchFamily="34" charset="-120"/>
               </a:rPr>
               <a:t>説明②</a:t>
             </a:r>
-            <a:endParaRPr lang="en-US" sz="1050" dirty="0"/>
+            <a:endParaRPr lang="ja-JP" sz="1050" dirty="0"/>
           </a:p>
           <a:p>
             <a:pPr algn="ctr" indent="0" marL="0">
               <a:buNone/>
             </a:pPr>
             <a:r>
-              <a:rPr lang="en-US" sz="900" b="1" dirty="0">
+              <a:rPr lang="ja-JP" altLang="en-US" sz="900" b="1" dirty="0">
                 <a:solidFill>
                   <a:srgbClr val="FFD600"/>
                 </a:solidFill>
+                <a:latin typeface="Noto Sans JP" pitchFamily="34" charset="0"/>
+                <a:ea typeface="Noto Sans JP" pitchFamily="34" charset="-122"/>
+                <a:cs typeface="Noto Sans JP" pitchFamily="34" charset="-120"/>
               </a:rPr>
               <a:t>10分</a:t>
             </a:r>
-            <a:endParaRPr lang="en-US" sz="1050" dirty="0"/>
+            <a:endParaRPr lang="ja-JP" sz="1050" dirty="0"/>
           </a:p>
         </p:txBody>
       </p:sp>
@@ -2839,8 +2708,8 @@
         </p:nvSpPr>
         <p:spPr>
           <a:xfrm>
-            <a:off x="5019040" y="3383280"/>
-            <a:ext cx="1788160" cy="685800"/>
+            <a:off x="5024120" y="3364992"/>
+            <a:ext cx="1808480" cy="685800"/>
           </a:xfrm>
           <a:prstGeom prst="rect">
             <a:avLst/>
@@ -2864,8 +2733,8 @@
         </p:nvSpPr>
         <p:spPr>
           <a:xfrm>
-            <a:off x="5019040" y="3383280"/>
-            <a:ext cx="1788160" cy="685800"/>
+            <a:off x="5024120" y="3364992"/>
+            <a:ext cx="1808480" cy="685800"/>
           </a:xfrm>
           <a:prstGeom prst="rect">
             <a:avLst/>
@@ -2881,28 +2750,34 @@
               <a:buNone/>
             </a:pPr>
             <a:r>
-              <a:rPr lang="en-US" sz="1050" b="1" dirty="0">
+              <a:rPr lang="ja-JP" altLang="en-US" sz="1050" b="1" dirty="0">
                 <a:solidFill>
                   <a:srgbClr val="FFFFFF"/>
                 </a:solidFill>
+                <a:latin typeface="Noto Sans JP" pitchFamily="34" charset="0"/>
+                <a:ea typeface="Noto Sans JP" pitchFamily="34" charset="-122"/>
+                <a:cs typeface="Noto Sans JP" pitchFamily="34" charset="-120"/>
               </a:rPr>
               <a:t>ハンズオン②</a:t>
             </a:r>
-            <a:endParaRPr lang="en-US" sz="1050" dirty="0"/>
+            <a:endParaRPr lang="ja-JP" sz="1050" dirty="0"/>
           </a:p>
           <a:p>
             <a:pPr algn="ctr" indent="0" marL="0">
               <a:buNone/>
             </a:pPr>
             <a:r>
-              <a:rPr lang="en-US" sz="900" b="1" dirty="0">
+              <a:rPr lang="ja-JP" altLang="en-US" sz="900" b="1" dirty="0">
                 <a:solidFill>
                   <a:srgbClr val="FFFFFF"/>
                 </a:solidFill>
+                <a:latin typeface="Noto Sans JP" pitchFamily="34" charset="0"/>
+                <a:ea typeface="Noto Sans JP" pitchFamily="34" charset="-122"/>
+                <a:cs typeface="Noto Sans JP" pitchFamily="34" charset="-120"/>
               </a:rPr>
               <a:t>20分</a:t>
             </a:r>
-            <a:endParaRPr lang="en-US" sz="1050" dirty="0"/>
+            <a:endParaRPr lang="ja-JP" sz="1050" dirty="0"/>
           </a:p>
         </p:txBody>
       </p:sp>
@@ -2914,8 +2789,8 @@
         </p:nvSpPr>
         <p:spPr>
           <a:xfrm>
-            <a:off x="6807200" y="3383280"/>
-            <a:ext cx="1341120" cy="685800"/>
+            <a:off x="6832600" y="3364992"/>
+            <a:ext cx="1356360" cy="685800"/>
           </a:xfrm>
           <a:prstGeom prst="rect">
             <a:avLst/>
@@ -2939,8 +2814,8 @@
         </p:nvSpPr>
         <p:spPr>
           <a:xfrm>
-            <a:off x="6807200" y="3383280"/>
-            <a:ext cx="1341120" cy="685800"/>
+            <a:off x="6832600" y="3364992"/>
+            <a:ext cx="1356360" cy="685800"/>
           </a:xfrm>
           <a:prstGeom prst="rect">
             <a:avLst/>
@@ -2956,28 +2831,34 @@
               <a:buNone/>
             </a:pPr>
             <a:r>
-              <a:rPr lang="en-US" sz="1050" b="1" dirty="0">
+              <a:rPr lang="ja-JP" altLang="en-US" sz="1050" b="1" dirty="0">
                 <a:solidFill>
                   <a:srgbClr val="FFD600"/>
                 </a:solidFill>
+                <a:latin typeface="Noto Sans JP" pitchFamily="34" charset="0"/>
+                <a:ea typeface="Noto Sans JP" pitchFamily="34" charset="-122"/>
+                <a:cs typeface="Noto Sans JP" pitchFamily="34" charset="-120"/>
               </a:rPr>
               <a:t>質問・共有</a:t>
             </a:r>
-            <a:endParaRPr lang="en-US" sz="1050" dirty="0"/>
+            <a:endParaRPr lang="ja-JP" sz="1050" dirty="0"/>
           </a:p>
           <a:p>
             <a:pPr algn="ctr" indent="0" marL="0">
               <a:buNone/>
             </a:pPr>
             <a:r>
-              <a:rPr lang="en-US" sz="900" b="1" dirty="0">
+              <a:rPr lang="ja-JP" altLang="en-US" sz="900" b="1" dirty="0">
                 <a:solidFill>
                   <a:srgbClr val="FFD600"/>
                 </a:solidFill>
+                <a:latin typeface="Noto Sans JP" pitchFamily="34" charset="0"/>
+                <a:ea typeface="Noto Sans JP" pitchFamily="34" charset="-122"/>
+                <a:cs typeface="Noto Sans JP" pitchFamily="34" charset="-120"/>
               </a:rPr>
               <a:t>15分</a:t>
             </a:r>
-            <a:endParaRPr lang="en-US" sz="1050" dirty="0"/>
+            <a:endParaRPr lang="ja-JP" sz="1050" dirty="0"/>
           </a:p>
         </p:txBody>
       </p:sp>
@@ -2989,8 +2870,8 @@
         </p:nvSpPr>
         <p:spPr>
           <a:xfrm>
-            <a:off x="8148320" y="3383280"/>
-            <a:ext cx="447040" cy="685800"/>
+            <a:off x="8188960" y="3364992"/>
+            <a:ext cx="452120" cy="685800"/>
           </a:xfrm>
           <a:prstGeom prst="rect">
             <a:avLst/>
@@ -3014,8 +2895,8 @@
         </p:nvSpPr>
         <p:spPr>
           <a:xfrm>
-            <a:off x="8148320" y="3383280"/>
-            <a:ext cx="447040" cy="685800"/>
+            <a:off x="8188960" y="3364992"/>
+            <a:ext cx="452120" cy="685800"/>
           </a:xfrm>
           <a:prstGeom prst="rect">
             <a:avLst/>
@@ -3031,28 +2912,34 @@
               <a:buNone/>
             </a:pPr>
             <a:r>
-              <a:rPr lang="en-US" sz="850" b="1" dirty="0">
+              <a:rPr lang="ja-JP" altLang="en-US" sz="850" b="1" dirty="0">
                 <a:solidFill>
                   <a:srgbClr val="FFD600"/>
                 </a:solidFill>
+                <a:latin typeface="Noto Sans JP" pitchFamily="34" charset="0"/>
+                <a:ea typeface="Noto Sans JP" pitchFamily="34" charset="-122"/>
+                <a:cs typeface="Noto Sans JP" pitchFamily="34" charset="-120"/>
               </a:rPr>
               <a:t>宿題</a:t>
             </a:r>
-            <a:endParaRPr lang="en-US" sz="850" dirty="0"/>
+            <a:endParaRPr lang="ja-JP" sz="850" dirty="0"/>
           </a:p>
           <a:p>
             <a:pPr algn="ctr" indent="0" marL="0">
               <a:buNone/>
             </a:pPr>
             <a:r>
-              <a:rPr lang="en-US" sz="900" b="1" dirty="0">
+              <a:rPr lang="ja-JP" altLang="en-US" sz="900" b="1" dirty="0">
                 <a:solidFill>
                   <a:srgbClr val="FFD600"/>
                 </a:solidFill>
+                <a:latin typeface="Noto Sans JP" pitchFamily="34" charset="0"/>
+                <a:ea typeface="Noto Sans JP" pitchFamily="34" charset="-122"/>
+                <a:cs typeface="Noto Sans JP" pitchFamily="34" charset="-120"/>
               </a:rPr>
               <a:t>5分</a:t>
             </a:r>
-            <a:endParaRPr lang="en-US" sz="850" dirty="0"/>
+            <a:endParaRPr lang="ja-JP" sz="850" dirty="0"/>
           </a:p>
         </p:txBody>
       </p:sp>
@@ -3064,7 +2951,7 @@
         </p:nvSpPr>
         <p:spPr>
           <a:xfrm>
-            <a:off x="548640" y="4160520"/>
+            <a:off x="502920" y="4187952"/>
             <a:ext cx="3657600" cy="274320"/>
           </a:xfrm>
           <a:prstGeom prst="rect">
@@ -3081,10 +2968,13 @@
               <a:buNone/>
             </a:pPr>
             <a:r>
-              <a:rPr lang="en-US" sz="1000" dirty="0">
+              <a:rPr lang="ja-JP" altLang="en-US" sz="1050" b="1" dirty="0">
                 <a:solidFill>
                   <a:srgbClr val="1A1A1A"/>
                 </a:solidFill>
+                <a:latin typeface="Noto Sans JP" pitchFamily="34" charset="0"/>
+                <a:ea typeface="Noto Sans JP" pitchFamily="34" charset="-122"/>
+                <a:cs typeface="Noto Sans JP" pitchFamily="34" charset="-120"/>
               </a:rPr>
               <a:t>■ </a:t>
             </a:r>
@@ -3092,10 +2982,13 @@
               <a:buNone/>
             </a:pPr>
             <a:r>
-              <a:rPr lang="en-US" sz="1000" dirty="0">
-                <a:solidFill>
-                  <a:schemeClr val="tx2"/>
-                </a:solidFill>
+              <a:rPr lang="ja-JP" altLang="en-US" sz="1050" b="1" dirty="0">
+                <a:solidFill>
+                  <a:srgbClr val="1A1A1A"/>
+                </a:solidFill>
+                <a:latin typeface="Noto Sans JP" pitchFamily="34" charset="0"/>
+                <a:ea typeface="Noto Sans JP" pitchFamily="34" charset="-122"/>
+                <a:cs typeface="Noto Sans JP" pitchFamily="34" charset="-120"/>
               </a:rPr>
               <a:t>聞く　</a:t>
             </a:r>
@@ -3103,10 +2996,13 @@
               <a:buNone/>
             </a:pPr>
             <a:r>
-              <a:rPr lang="en-US" sz="1000" dirty="0">
+              <a:rPr lang="ja-JP" altLang="en-US" sz="1050" b="1" dirty="0">
                 <a:solidFill>
                   <a:srgbClr val="DD6420"/>
                 </a:solidFill>
+                <a:latin typeface="Noto Sans JP" pitchFamily="34" charset="0"/>
+                <a:ea typeface="Noto Sans JP" pitchFamily="34" charset="-122"/>
+                <a:cs typeface="Noto Sans JP" pitchFamily="34" charset="-120"/>
               </a:rPr>
               <a:t>■ </a:t>
             </a:r>
@@ -3114,14 +3010,17 @@
               <a:buNone/>
             </a:pPr>
             <a:r>
-              <a:rPr lang="en-US" sz="1000" dirty="0">
-                <a:solidFill>
-                  <a:schemeClr val="tx2"/>
-                </a:solidFill>
+              <a:rPr lang="ja-JP" altLang="en-US" sz="1050" b="1" dirty="0">
+                <a:solidFill>
+                  <a:srgbClr val="1A1A1A"/>
+                </a:solidFill>
+                <a:latin typeface="Noto Sans JP" pitchFamily="34" charset="0"/>
+                <a:ea typeface="Noto Sans JP" pitchFamily="34" charset="-122"/>
+                <a:cs typeface="Noto Sans JP" pitchFamily="34" charset="-120"/>
               </a:rPr>
               <a:t>手を動かす</a:t>
             </a:r>
-            <a:endParaRPr lang="en-US" sz="1000" dirty="0"/>
+            <a:endParaRPr lang="ja-JP" sz="1050" dirty="0"/>
           </a:p>
         </p:txBody>
       </p:sp>
@@ -3137,8 +3036,8 @@
         </p:nvSpPr>
         <p:spPr>
           <a:xfrm>
-            <a:off x="8229600" y="4773168"/>
-            <a:ext cx="365760" cy="228600"/>
+            <a:off x="8366760" y="4754880"/>
+            <a:ext cx="365760" cy="274320"/>
           </a:xfrm>
           <a:prstGeom prst="rect">
             <a:avLst/>
@@ -3150,20 +3049,23 @@
           </a:extLst>
         </p:spPr>
         <p:txBody>
-          <a:bodyPr/>
+          <a:bodyPr anchor="ctr"/>
           <a:lstStyle>
             <a:lvl1pPr>
-              <a:defRPr sz="900">
-                <a:solidFill>
-                  <a:srgbClr val="5A6872"/>
-                </a:solidFill>
+              <a:defRPr sz="850">
+                <a:solidFill>
+                  <a:srgbClr val="FFFFFF"/>
+                </a:solidFill>
+                <a:latin typeface="Noto Sans JP"/>
+                <a:ea typeface="Noto Sans JP"/>
+                <a:cs typeface="Noto Sans JP"/>
               </a:defRPr>
             </a:lvl1pPr>
           </a:lstStyle>
           <a:p>
             <a:pPr algn="r"/>
             <a:fld id="{F7021451-1387-4CA6-816F-3879F97B5CBC}" type="slidenum">
-              <a:rPr b="0" lang="en-US"/>
+              <a:rPr b="1" lang="en-US"/>
               <a:t>2</a:t>
             </a:fld>
             <a:endParaRPr lang="en-US"/>
@@ -3198,15 +3100,58 @@
       <p:sp>
         <p:nvSpPr>
           <p:cNvPr id="2" name="Text 0"/>
-          <p:cNvSpPr/>
-          <p:nvPr>
-            <p:ph idx="100" type="title" hasCustomPrompt="1"/>
-          </p:nvPr>
-        </p:nvSpPr>
-        <p:spPr>
-          <a:xfrm>
-            <a:off x="548640" y="658368"/>
-            <a:ext cx="8046720" cy="566928"/>
+          <p:cNvSpPr txBox="1"/>
+          <p:nvPr/>
+        </p:nvSpPr>
+        <p:spPr>
+          <a:xfrm rot="-180000">
+            <a:off x="411480" y="201168"/>
+            <a:ext cx="1478128" cy="352044"/>
+          </a:xfrm>
+          <a:prstGeom prst="rect">
+            <a:avLst/>
+          </a:prstGeom>
+          <a:solidFill>
+            <a:srgbClr val="1A1A1A"/>
+          </a:solidFill>
+          <a:ln>
+            <a:solidFill>
+              <a:srgbClr val="1A1A1A"/>
+            </a:solidFill>
+          </a:ln>
+        </p:spPr>
+        <p:txBody>
+          <a:bodyPr wrap="square" lIns="0" tIns="0" rIns="0" bIns="0" rtlCol="0" anchor="ctr"/>
+          <a:lstStyle/>
+          <a:p>
+            <a:pPr algn="ctr" indent="0" marL="0">
+              <a:buNone/>
+            </a:pPr>
+            <a:r>
+              <a:rPr lang="ja-JP" altLang="en-US" sz="1100" dirty="0">
+                <a:solidFill>
+                  <a:srgbClr val="FFFFFF"/>
+                </a:solidFill>
+                <a:latin typeface="Dela Gothic One" pitchFamily="34" charset="0"/>
+                <a:ea typeface="けいふぉんと" pitchFamily="34" charset="-122"/>
+                <a:cs typeface="Dela Gothic One" pitchFamily="34" charset="-120"/>
+              </a:rPr>
+              <a:t>説明① 10分</a:t>
+            </a:r>
+            <a:endParaRPr lang="ja-JP" sz="1100" dirty="0"/>
+          </a:p>
+        </p:txBody>
+      </p:sp>
+      <p:sp>
+        <p:nvSpPr>
+          <p:cNvPr id="3" name="Text 1"/>
+          <p:cNvSpPr txBox="1"/>
+          <p:nvPr/>
+        </p:nvSpPr>
+        <p:spPr>
+          <a:xfrm>
+            <a:off x="411480" y="502920"/>
+            <a:ext cx="8321040" cy="685800"/>
           </a:xfrm>
           <a:prstGeom prst="rect">
             <a:avLst/>
@@ -3215,116 +3160,58 @@
           <a:ln/>
         </p:spPr>
         <p:txBody>
-          <a:bodyPr wrap="square" lIns="0" tIns="0" rIns="0" bIns="0" rtlCol="0" anchor="ctr"/>
-          <a:lstStyle/>
-          <a:p>
-            <a:pPr algn="l" indent="0" marL="0">
-              <a:buNone/>
-            </a:pPr>
-            <a:r>
-              <a:rPr lang="en-US" sz="2400" b="1" dirty="0">
-                <a:solidFill>
-                  <a:schemeClr val="tx1"/>
-                </a:solidFill>
+          <a:bodyPr wrap="square" lIns="0" tIns="0" rIns="0" bIns="0" rtlCol="0" anchor="ctr">
+            <a:normAutofit/>
+          </a:bodyPr>
+          <a:lstStyle/>
+          <a:p>
+            <a:pPr indent="0" marL="0">
+              <a:buNone/>
+            </a:pPr>
+            <a:r>
+              <a:rPr lang="ja-JP" altLang="en-US" sz="2600" dirty="0">
+                <a:solidFill>
+                  <a:srgbClr val="1A1A1A"/>
+                </a:solidFill>
+                <a:latin typeface="Dela Gothic One" pitchFamily="34" charset="0"/>
+                <a:ea typeface="けいふぉんと" pitchFamily="34" charset="-122"/>
+                <a:cs typeface="Dela Gothic One" pitchFamily="34" charset="-120"/>
               </a:rPr>
               <a:t>入力の入口を1つにする</a:t>
             </a:r>
-            <a:endParaRPr lang="en-US" sz="2400" dirty="0"/>
-          </a:p>
-        </p:txBody>
-      </p:sp>
-      <p:sp>
-        <p:nvSpPr>
-          <p:cNvPr id="3" name="chip"/>
+            <a:endParaRPr lang="ja-JP" sz="2600" dirty="0"/>
+          </a:p>
+        </p:txBody>
+      </p:sp>
+      <p:sp>
+        <p:nvSpPr>
+          <p:cNvPr id="5" name="card"/>
           <p:cNvSpPr/>
           <p:nvPr/>
         </p:nvSpPr>
         <p:spPr>
           <a:xfrm>
-            <a:off x="548640" y="292608"/>
-            <a:ext cx="1344168" cy="292608"/>
+            <a:off x="502920" y="1691640"/>
+            <a:ext cx="1746504" cy="1600200"/>
           </a:xfrm>
           <a:prstGeom prst="roundRect">
             <a:avLst>
-              <a:gd name="adj" fmla="val 50000"/>
+              <a:gd name="adj" fmla="val 5714"/>
             </a:avLst>
           </a:prstGeom>
           <a:solidFill>
-            <a:schemeClr val="tx1"/>
-          </a:solidFill>
-          <a:ln w="12700">
-            <a:solidFill>
-              <a:schemeClr val="tx1"/>
-            </a:solidFill>
-            <a:prstDash val="solid"/>
-          </a:ln>
-        </p:spPr>
-      </p:sp>
-      <p:sp>
-        <p:nvSpPr>
-          <p:cNvPr id="4" name="chip-text"/>
-          <p:cNvSpPr txBox="1"/>
-          <p:nvPr/>
-        </p:nvSpPr>
-        <p:spPr>
-          <a:xfrm>
-            <a:off x="548640" y="292608"/>
-            <a:ext cx="1344168" cy="292608"/>
-          </a:xfrm>
-          <a:prstGeom prst="rect">
-            <a:avLst/>
-          </a:prstGeom>
-          <a:noFill/>
-          <a:ln/>
-        </p:spPr>
-        <p:txBody>
-          <a:bodyPr wrap="square" lIns="0" tIns="0" rIns="0" bIns="0" rtlCol="0" anchor="ctr"/>
-          <a:lstStyle/>
-          <a:p>
-            <a:pPr algn="ctr" indent="0" marL="0">
-              <a:buNone/>
-            </a:pPr>
-            <a:r>
-              <a:rPr lang="en-US" sz="1100" b="1" dirty="0">
-                <a:solidFill>
-                  <a:schemeClr val="accent1"/>
-                </a:solidFill>
-              </a:rPr>
-              <a:t>説明① 10分</a:t>
-            </a:r>
-            <a:endParaRPr lang="en-US" sz="1100" dirty="0"/>
-          </a:p>
-        </p:txBody>
-      </p:sp>
-      <p:sp>
-        <p:nvSpPr>
-          <p:cNvPr id="6" name="card"/>
-          <p:cNvSpPr/>
-          <p:nvPr/>
-        </p:nvSpPr>
-        <p:spPr>
-          <a:xfrm>
-            <a:off x="548640" y="1828800"/>
-            <a:ext cx="1723644" cy="1463040"/>
-          </a:xfrm>
-          <a:prstGeom prst="roundRect">
-            <a:avLst>
-              <a:gd name="adj" fmla="val 7500"/>
-            </a:avLst>
-          </a:prstGeom>
-          <a:solidFill>
-            <a:schemeClr val="bg1"/>
-          </a:solidFill>
-          <a:ln w="19050">
+            <a:srgbClr val="FFFFFF"/>
+          </a:solidFill>
+          <a:ln w="25400">
             <a:solidFill>
               <a:srgbClr val="1A1A1A"/>
             </a:solidFill>
             <a:prstDash val="solid"/>
           </a:ln>
           <a:effectLst>
-            <a:outerShdw sx="100000" sy="100000" kx="0" ky="0" algn="bl" rotWithShape="0" blurRad="101600" dist="38100" dir="2700000">
-              <a:srgbClr val="000000">
-                <a:alpha val="18000"/>
+            <a:outerShdw sx="100000" sy="100000" kx="0" ky="0" algn="bl" rotWithShape="0" blurRad="101600" dist="50800" dir="2700000">
+              <a:srgbClr val="1A1A1A">
+                <a:alpha val="100000"/>
               </a:srgbClr>
             </a:outerShdw>
           </a:effectLst>
@@ -3332,14 +3219,59 @@
       </p:sp>
       <p:sp>
         <p:nvSpPr>
-          <p:cNvPr id="7" name="Text 4"/>
+          <p:cNvPr id="6" name="Text 3"/>
           <p:cNvSpPr txBox="1"/>
           <p:nvPr/>
         </p:nvSpPr>
         <p:spPr>
-          <a:xfrm>
-            <a:off x="548640" y="1993392"/>
-            <a:ext cx="1723644" cy="274320"/>
+          <a:xfrm rot="-180000">
+            <a:off x="918972" y="1545336"/>
+            <a:ext cx="914400" cy="292608"/>
+          </a:xfrm>
+          <a:prstGeom prst="rect">
+            <a:avLst/>
+          </a:prstGeom>
+          <a:solidFill>
+            <a:srgbClr val="1A1A1A"/>
+          </a:solidFill>
+          <a:ln>
+            <a:solidFill>
+              <a:srgbClr val="1A1A1A"/>
+            </a:solidFill>
+          </a:ln>
+        </p:spPr>
+        <p:txBody>
+          <a:bodyPr wrap="square" lIns="0" tIns="0" rIns="0" bIns="0" rtlCol="0" anchor="ctr"/>
+          <a:lstStyle/>
+          <a:p>
+            <a:pPr algn="ctr" indent="0" marL="0">
+              <a:buNone/>
+            </a:pPr>
+            <a:r>
+              <a:rPr lang="ja-JP" altLang="en-US" sz="1000" dirty="0">
+                <a:solidFill>
+                  <a:srgbClr val="FFFFFF"/>
+                </a:solidFill>
+                <a:latin typeface="Dela Gothic One" pitchFamily="34" charset="0"/>
+                <a:ea typeface="けいふぉんと" pitchFamily="34" charset="-122"/>
+                <a:cs typeface="Dela Gothic One" pitchFamily="34" charset="-120"/>
+              </a:rPr>
+              <a:t>STEP 1</a:t>
+            </a:r>
+            <a:endParaRPr lang="ja-JP" sz="1000" dirty="0"/>
+          </a:p>
+        </p:txBody>
+      </p:sp>
+      <p:sp>
+        <p:nvSpPr>
+          <p:cNvPr id="7" name="flow-node"/>
+          <p:cNvSpPr txBox="1"/>
+          <p:nvPr/>
+        </p:nvSpPr>
+        <p:spPr>
+          <a:xfrm>
+            <a:off x="612648" y="1965960"/>
+            <a:ext cx="1527048" cy="1234440"/>
           </a:xfrm>
           <a:prstGeom prst="rect">
             <a:avLst/>
@@ -3348,63 +3280,32 @@
           <a:ln/>
         </p:spPr>
         <p:txBody>
-          <a:bodyPr wrap="square" lIns="0" tIns="0" rIns="0" bIns="0" rtlCol="0" anchor="ctr"/>
+          <a:bodyPr wrap="square" lIns="0" tIns="0" rIns="0" bIns="0" rtlCol="0" anchor="ctr">
+            <a:normAutofit/>
+          </a:bodyPr>
           <a:lstStyle/>
           <a:p>
             <a:pPr algn="ctr" indent="0" marL="0">
               <a:buNone/>
             </a:pPr>
             <a:r>
-              <a:rPr lang="en-US" sz="1000" b="1" dirty="0">
-                <a:solidFill>
-                  <a:schemeClr val="accent2"/>
-                </a:solidFill>
-              </a:rPr>
-              <a:t>STEP 1</a:t>
-            </a:r>
-            <a:endParaRPr lang="en-US" sz="1000" dirty="0"/>
-          </a:p>
-        </p:txBody>
-      </p:sp>
-      <p:sp>
-        <p:nvSpPr>
-          <p:cNvPr id="8" name="flow-node"/>
-          <p:cNvSpPr txBox="1"/>
-          <p:nvPr/>
-        </p:nvSpPr>
-        <p:spPr>
-          <a:xfrm>
-            <a:off x="640080" y="2286000"/>
-            <a:ext cx="1540764" cy="868680"/>
-          </a:xfrm>
-          <a:prstGeom prst="rect">
-            <a:avLst/>
-          </a:prstGeom>
-          <a:noFill/>
-          <a:ln/>
-        </p:spPr>
-        <p:txBody>
-          <a:bodyPr wrap="square" lIns="0" tIns="0" rIns="0" bIns="0" rtlCol="0" anchor="ctr"/>
-          <a:lstStyle/>
-          <a:p>
-            <a:pPr algn="ctr" indent="0" marL="0">
-              <a:buNone/>
-            </a:pPr>
-            <a:r>
-              <a:rPr lang="en-US" sz="1400" b="1" dirty="0">
-                <a:solidFill>
-                  <a:schemeClr val="tx1"/>
-                </a:solidFill>
+              <a:rPr lang="ja-JP" altLang="en-US" sz="1400" b="1" dirty="0">
+                <a:solidFill>
+                  <a:srgbClr val="1A1A1A"/>
+                </a:solidFill>
+                <a:latin typeface="Noto Sans JP" pitchFamily="34" charset="0"/>
+                <a:ea typeface="Noto Sans JP" pitchFamily="34" charset="-122"/>
+                <a:cs typeface="Noto Sans JP" pitchFamily="34" charset="-120"/>
               </a:rPr>
               <a:t>フォーム</a:t>
             </a:r>
-            <a:endParaRPr lang="en-US" sz="1400" dirty="0"/>
+            <a:endParaRPr lang="ja-JP" sz="1400" dirty="0"/>
           </a:p>
         </p:txBody>
       </p:sp>
       <p:pic>
         <p:nvPicPr>
-          <p:cNvPr id="9" name="flow-arrow" descr="preencoded.png">    </p:cNvPr>
+          <p:cNvPr id="8" name="flow-arrow" descr="preencoded.png">    </p:cNvPr>
           <p:cNvPicPr>
             <a:picLocks noChangeAspect="1"/>
           </p:cNvPicPr>
@@ -3418,8 +3319,8 @@
         </p:blipFill>
         <p:spPr>
           <a:xfrm>
-            <a:off x="2345436" y="2441448"/>
-            <a:ext cx="237744" cy="237744"/>
+            <a:off x="2313432" y="2363724"/>
+            <a:ext cx="256032" cy="256032"/>
           </a:xfrm>
           <a:prstGeom prst="rect">
             <a:avLst/>
@@ -3428,33 +3329,33 @@
       </p:pic>
       <p:sp>
         <p:nvSpPr>
-          <p:cNvPr id="10" name="card"/>
+          <p:cNvPr id="9" name="card"/>
           <p:cNvSpPr/>
           <p:nvPr/>
         </p:nvSpPr>
         <p:spPr>
           <a:xfrm>
-            <a:off x="2656332" y="1828800"/>
-            <a:ext cx="1723644" cy="1463040"/>
+            <a:off x="2633472" y="1691640"/>
+            <a:ext cx="1746504" cy="1600200"/>
           </a:xfrm>
           <a:prstGeom prst="roundRect">
             <a:avLst>
-              <a:gd name="adj" fmla="val 7500"/>
+              <a:gd name="adj" fmla="val 5714"/>
             </a:avLst>
           </a:prstGeom>
           <a:solidFill>
-            <a:schemeClr val="bg1"/>
-          </a:solidFill>
-          <a:ln w="19050">
+            <a:srgbClr val="FFFFFF"/>
+          </a:solidFill>
+          <a:ln w="25400">
             <a:solidFill>
               <a:srgbClr val="1A1A1A"/>
             </a:solidFill>
             <a:prstDash val="solid"/>
           </a:ln>
           <a:effectLst>
-            <a:outerShdw sx="100000" sy="100000" kx="0" ky="0" algn="bl" rotWithShape="0" blurRad="101600" dist="38100" dir="2700000">
-              <a:srgbClr val="000000">
-                <a:alpha val="18000"/>
+            <a:outerShdw sx="100000" sy="100000" kx="0" ky="0" algn="bl" rotWithShape="0" blurRad="101600" dist="50800" dir="2700000">
+              <a:srgbClr val="1A1A1A">
+                <a:alpha val="100000"/>
               </a:srgbClr>
             </a:outerShdw>
           </a:effectLst>
@@ -3462,14 +3363,59 @@
       </p:sp>
       <p:sp>
         <p:nvSpPr>
-          <p:cNvPr id="11" name="Text 7"/>
+          <p:cNvPr id="10" name="Text 6"/>
           <p:cNvSpPr txBox="1"/>
           <p:nvPr/>
         </p:nvSpPr>
         <p:spPr>
-          <a:xfrm>
-            <a:off x="2656332" y="1993392"/>
-            <a:ext cx="1723644" cy="274320"/>
+          <a:xfrm rot="-180000">
+            <a:off x="3049524" y="1545336"/>
+            <a:ext cx="914400" cy="292608"/>
+          </a:xfrm>
+          <a:prstGeom prst="rect">
+            <a:avLst/>
+          </a:prstGeom>
+          <a:solidFill>
+            <a:srgbClr val="1A1A1A"/>
+          </a:solidFill>
+          <a:ln>
+            <a:solidFill>
+              <a:srgbClr val="1A1A1A"/>
+            </a:solidFill>
+          </a:ln>
+        </p:spPr>
+        <p:txBody>
+          <a:bodyPr wrap="square" lIns="0" tIns="0" rIns="0" bIns="0" rtlCol="0" anchor="ctr"/>
+          <a:lstStyle/>
+          <a:p>
+            <a:pPr algn="ctr" indent="0" marL="0">
+              <a:buNone/>
+            </a:pPr>
+            <a:r>
+              <a:rPr lang="ja-JP" altLang="en-US" sz="1000" dirty="0">
+                <a:solidFill>
+                  <a:srgbClr val="FFFFFF"/>
+                </a:solidFill>
+                <a:latin typeface="Dela Gothic One" pitchFamily="34" charset="0"/>
+                <a:ea typeface="けいふぉんと" pitchFamily="34" charset="-122"/>
+                <a:cs typeface="Dela Gothic One" pitchFamily="34" charset="-120"/>
+              </a:rPr>
+              <a:t>STEP 2</a:t>
+            </a:r>
+            <a:endParaRPr lang="ja-JP" sz="1000" dirty="0"/>
+          </a:p>
+        </p:txBody>
+      </p:sp>
+      <p:sp>
+        <p:nvSpPr>
+          <p:cNvPr id="11" name="flow-node"/>
+          <p:cNvSpPr txBox="1"/>
+          <p:nvPr/>
+        </p:nvSpPr>
+        <p:spPr>
+          <a:xfrm>
+            <a:off x="2743200" y="1965960"/>
+            <a:ext cx="1527048" cy="1234440"/>
           </a:xfrm>
           <a:prstGeom prst="rect">
             <a:avLst/>
@@ -3478,63 +3424,32 @@
           <a:ln/>
         </p:spPr>
         <p:txBody>
-          <a:bodyPr wrap="square" lIns="0" tIns="0" rIns="0" bIns="0" rtlCol="0" anchor="ctr"/>
+          <a:bodyPr wrap="square" lIns="0" tIns="0" rIns="0" bIns="0" rtlCol="0" anchor="ctr">
+            <a:normAutofit/>
+          </a:bodyPr>
           <a:lstStyle/>
           <a:p>
             <a:pPr algn="ctr" indent="0" marL="0">
               <a:buNone/>
             </a:pPr>
             <a:r>
-              <a:rPr lang="en-US" sz="1000" b="1" dirty="0">
-                <a:solidFill>
-                  <a:schemeClr val="accent2"/>
-                </a:solidFill>
-              </a:rPr>
-              <a:t>STEP 2</a:t>
-            </a:r>
-            <a:endParaRPr lang="en-US" sz="1000" dirty="0"/>
-          </a:p>
-        </p:txBody>
-      </p:sp>
-      <p:sp>
-        <p:nvSpPr>
-          <p:cNvPr id="12" name="flow-node"/>
-          <p:cNvSpPr txBox="1"/>
-          <p:nvPr/>
-        </p:nvSpPr>
-        <p:spPr>
-          <a:xfrm>
-            <a:off x="2747772" y="2286000"/>
-            <a:ext cx="1540764" cy="868680"/>
-          </a:xfrm>
-          <a:prstGeom prst="rect">
-            <a:avLst/>
-          </a:prstGeom>
-          <a:noFill/>
-          <a:ln/>
-        </p:spPr>
-        <p:txBody>
-          <a:bodyPr wrap="square" lIns="0" tIns="0" rIns="0" bIns="0" rtlCol="0" anchor="ctr"/>
-          <a:lstStyle/>
-          <a:p>
-            <a:pPr algn="ctr" indent="0" marL="0">
-              <a:buNone/>
-            </a:pPr>
-            <a:r>
-              <a:rPr lang="en-US" sz="1400" b="1" dirty="0">
-                <a:solidFill>
-                  <a:schemeClr val="tx1"/>
-                </a:solidFill>
+              <a:rPr lang="ja-JP" altLang="en-US" sz="1400" b="1" dirty="0">
+                <a:solidFill>
+                  <a:srgbClr val="1A1A1A"/>
+                </a:solidFill>
+                <a:latin typeface="Noto Sans JP" pitchFamily="34" charset="0"/>
+                <a:ea typeface="Noto Sans JP" pitchFamily="34" charset="-122"/>
+                <a:cs typeface="Noto Sans JP" pitchFamily="34" charset="-120"/>
               </a:rPr>
               <a:t>テーブル</a:t>
             </a:r>
-            <a:endParaRPr lang="en-US" sz="1400" dirty="0"/>
+            <a:endParaRPr lang="ja-JP" sz="1400" dirty="0"/>
           </a:p>
         </p:txBody>
       </p:sp>
       <p:pic>
         <p:nvPicPr>
-          <p:cNvPr id="13" name="flow-arrow" descr="preencoded.png">    </p:cNvPr>
+          <p:cNvPr id="12" name="flow-arrow" descr="preencoded.png">    </p:cNvPr>
           <p:cNvPicPr>
             <a:picLocks noChangeAspect="1"/>
           </p:cNvPicPr>
@@ -3548,8 +3463,8 @@
         </p:blipFill>
         <p:spPr>
           <a:xfrm>
-            <a:off x="4453128" y="2441448"/>
-            <a:ext cx="237744" cy="237744"/>
+            <a:off x="4443984" y="2363724"/>
+            <a:ext cx="256032" cy="256032"/>
           </a:xfrm>
           <a:prstGeom prst="rect">
             <a:avLst/>
@@ -3558,33 +3473,33 @@
       </p:pic>
       <p:sp>
         <p:nvSpPr>
-          <p:cNvPr id="14" name="card"/>
+          <p:cNvPr id="13" name="card"/>
           <p:cNvSpPr/>
           <p:nvPr/>
         </p:nvSpPr>
         <p:spPr>
           <a:xfrm>
-            <a:off x="4764024" y="1828800"/>
-            <a:ext cx="1723644" cy="1463040"/>
+            <a:off x="4764024" y="1691640"/>
+            <a:ext cx="1746504" cy="1600200"/>
           </a:xfrm>
           <a:prstGeom prst="roundRect">
             <a:avLst>
-              <a:gd name="adj" fmla="val 7500"/>
+              <a:gd name="adj" fmla="val 5714"/>
             </a:avLst>
           </a:prstGeom>
           <a:solidFill>
-            <a:schemeClr val="bg1"/>
-          </a:solidFill>
-          <a:ln w="19050">
+            <a:srgbClr val="FFFFFF"/>
+          </a:solidFill>
+          <a:ln w="25400">
             <a:solidFill>
               <a:srgbClr val="1A1A1A"/>
             </a:solidFill>
             <a:prstDash val="solid"/>
           </a:ln>
           <a:effectLst>
-            <a:outerShdw sx="100000" sy="100000" kx="0" ky="0" algn="bl" rotWithShape="0" blurRad="101600" dist="38100" dir="2700000">
-              <a:srgbClr val="000000">
-                <a:alpha val="18000"/>
+            <a:outerShdw sx="100000" sy="100000" kx="0" ky="0" algn="bl" rotWithShape="0" blurRad="101600" dist="50800" dir="2700000">
+              <a:srgbClr val="1A1A1A">
+                <a:alpha val="100000"/>
               </a:srgbClr>
             </a:outerShdw>
           </a:effectLst>
@@ -3592,14 +3507,59 @@
       </p:sp>
       <p:sp>
         <p:nvSpPr>
-          <p:cNvPr id="15" name="Text 10"/>
+          <p:cNvPr id="14" name="Text 9"/>
           <p:cNvSpPr txBox="1"/>
           <p:nvPr/>
         </p:nvSpPr>
         <p:spPr>
-          <a:xfrm>
-            <a:off x="4764024" y="1993392"/>
-            <a:ext cx="1723644" cy="274320"/>
+          <a:xfrm rot="-180000">
+            <a:off x="5180076" y="1545336"/>
+            <a:ext cx="914400" cy="292608"/>
+          </a:xfrm>
+          <a:prstGeom prst="rect">
+            <a:avLst/>
+          </a:prstGeom>
+          <a:solidFill>
+            <a:srgbClr val="1A1A1A"/>
+          </a:solidFill>
+          <a:ln>
+            <a:solidFill>
+              <a:srgbClr val="1A1A1A"/>
+            </a:solidFill>
+          </a:ln>
+        </p:spPr>
+        <p:txBody>
+          <a:bodyPr wrap="square" lIns="0" tIns="0" rIns="0" bIns="0" rtlCol="0" anchor="ctr"/>
+          <a:lstStyle/>
+          <a:p>
+            <a:pPr algn="ctr" indent="0" marL="0">
+              <a:buNone/>
+            </a:pPr>
+            <a:r>
+              <a:rPr lang="ja-JP" altLang="en-US" sz="1000" dirty="0">
+                <a:solidFill>
+                  <a:srgbClr val="FFFFFF"/>
+                </a:solidFill>
+                <a:latin typeface="Dela Gothic One" pitchFamily="34" charset="0"/>
+                <a:ea typeface="けいふぉんと" pitchFamily="34" charset="-122"/>
+                <a:cs typeface="Dela Gothic One" pitchFamily="34" charset="-120"/>
+              </a:rPr>
+              <a:t>STEP 3</a:t>
+            </a:r>
+            <a:endParaRPr lang="ja-JP" sz="1000" dirty="0"/>
+          </a:p>
+        </p:txBody>
+      </p:sp>
+      <p:sp>
+        <p:nvSpPr>
+          <p:cNvPr id="15" name="flow-node"/>
+          <p:cNvSpPr txBox="1"/>
+          <p:nvPr/>
+        </p:nvSpPr>
+        <p:spPr>
+          <a:xfrm>
+            <a:off x="4873752" y="1965960"/>
+            <a:ext cx="1527048" cy="1234440"/>
           </a:xfrm>
           <a:prstGeom prst="rect">
             <a:avLst/>
@@ -3608,63 +3568,32 @@
           <a:ln/>
         </p:spPr>
         <p:txBody>
-          <a:bodyPr wrap="square" lIns="0" tIns="0" rIns="0" bIns="0" rtlCol="0" anchor="ctr"/>
+          <a:bodyPr wrap="square" lIns="0" tIns="0" rIns="0" bIns="0" rtlCol="0" anchor="ctr">
+            <a:normAutofit/>
+          </a:bodyPr>
           <a:lstStyle/>
           <a:p>
             <a:pPr algn="ctr" indent="0" marL="0">
               <a:buNone/>
             </a:pPr>
             <a:r>
-              <a:rPr lang="en-US" sz="1000" b="1" dirty="0">
-                <a:solidFill>
-                  <a:schemeClr val="accent2"/>
-                </a:solidFill>
-              </a:rPr>
-              <a:t>STEP 3</a:t>
-            </a:r>
-            <a:endParaRPr lang="en-US" sz="1000" dirty="0"/>
-          </a:p>
-        </p:txBody>
-      </p:sp>
-      <p:sp>
-        <p:nvSpPr>
-          <p:cNvPr id="16" name="flow-node"/>
-          <p:cNvSpPr txBox="1"/>
-          <p:nvPr/>
-        </p:nvSpPr>
-        <p:spPr>
-          <a:xfrm>
-            <a:off x="4855464" y="2286000"/>
-            <a:ext cx="1540764" cy="868680"/>
-          </a:xfrm>
-          <a:prstGeom prst="rect">
-            <a:avLst/>
-          </a:prstGeom>
-          <a:noFill/>
-          <a:ln/>
-        </p:spPr>
-        <p:txBody>
-          <a:bodyPr wrap="square" lIns="0" tIns="0" rIns="0" bIns="0" rtlCol="0" anchor="ctr"/>
-          <a:lstStyle/>
-          <a:p>
-            <a:pPr algn="ctr" indent="0" marL="0">
-              <a:buNone/>
-            </a:pPr>
-            <a:r>
-              <a:rPr lang="en-US" sz="1400" b="1" dirty="0">
-                <a:solidFill>
-                  <a:schemeClr val="tx1"/>
-                </a:solidFill>
+              <a:rPr lang="ja-JP" altLang="en-US" sz="1400" b="1" dirty="0">
+                <a:solidFill>
+                  <a:srgbClr val="1A1A1A"/>
+                </a:solidFill>
+                <a:latin typeface="Noto Sans JP" pitchFamily="34" charset="0"/>
+                <a:ea typeface="Noto Sans JP" pitchFamily="34" charset="-122"/>
+                <a:cs typeface="Noto Sans JP" pitchFamily="34" charset="-120"/>
               </a:rPr>
               <a:t>ビュー</a:t>
             </a:r>
-            <a:endParaRPr lang="en-US" sz="1400" dirty="0"/>
+            <a:endParaRPr lang="ja-JP" sz="1400" dirty="0"/>
           </a:p>
         </p:txBody>
       </p:sp>
       <p:pic>
         <p:nvPicPr>
-          <p:cNvPr id="17" name="flow-arrow" descr="preencoded.png">    </p:cNvPr>
+          <p:cNvPr id="16" name="flow-arrow" descr="preencoded.png">    </p:cNvPr>
           <p:cNvPicPr>
             <a:picLocks noChangeAspect="1"/>
           </p:cNvPicPr>
@@ -3678,8 +3607,8 @@
         </p:blipFill>
         <p:spPr>
           <a:xfrm>
-            <a:off x="6560820" y="2441448"/>
-            <a:ext cx="237744" cy="237744"/>
+            <a:off x="6574536" y="2363724"/>
+            <a:ext cx="256032" cy="256032"/>
           </a:xfrm>
           <a:prstGeom prst="rect">
             <a:avLst/>
@@ -3688,33 +3617,33 @@
       </p:pic>
       <p:sp>
         <p:nvSpPr>
-          <p:cNvPr id="18" name="card"/>
+          <p:cNvPr id="17" name="card"/>
           <p:cNvSpPr/>
           <p:nvPr/>
         </p:nvSpPr>
         <p:spPr>
           <a:xfrm>
-            <a:off x="6871716" y="1828800"/>
-            <a:ext cx="1723644" cy="1463040"/>
+            <a:off x="6894576" y="1691640"/>
+            <a:ext cx="1746504" cy="1600200"/>
           </a:xfrm>
           <a:prstGeom prst="roundRect">
             <a:avLst>
-              <a:gd name="adj" fmla="val 7500"/>
+              <a:gd name="adj" fmla="val 5714"/>
             </a:avLst>
           </a:prstGeom>
           <a:solidFill>
-            <a:schemeClr val="accent1"/>
-          </a:solidFill>
-          <a:ln w="19050">
+            <a:srgbClr val="F5A623"/>
+          </a:solidFill>
+          <a:ln w="25400">
             <a:solidFill>
               <a:srgbClr val="1A1A1A"/>
             </a:solidFill>
             <a:prstDash val="solid"/>
           </a:ln>
           <a:effectLst>
-            <a:outerShdw sx="100000" sy="100000" kx="0" ky="0" algn="bl" rotWithShape="0" blurRad="101600" dist="38100" dir="2700000">
-              <a:srgbClr val="000000">
-                <a:alpha val="18000"/>
+            <a:outerShdw sx="100000" sy="100000" kx="0" ky="0" algn="bl" rotWithShape="0" blurRad="101600" dist="50800" dir="2700000">
+              <a:srgbClr val="1A1A1A">
+                <a:alpha val="100000"/>
               </a:srgbClr>
             </a:outerShdw>
           </a:effectLst>
@@ -3722,14 +3651,59 @@
       </p:sp>
       <p:sp>
         <p:nvSpPr>
-          <p:cNvPr id="19" name="Text 13"/>
+          <p:cNvPr id="18" name="Text 12"/>
           <p:cNvSpPr txBox="1"/>
           <p:nvPr/>
         </p:nvSpPr>
         <p:spPr>
-          <a:xfrm>
-            <a:off x="6871716" y="1993392"/>
-            <a:ext cx="1723644" cy="274320"/>
+          <a:xfrm rot="-180000">
+            <a:off x="7310628" y="1545336"/>
+            <a:ext cx="914400" cy="292608"/>
+          </a:xfrm>
+          <a:prstGeom prst="rect">
+            <a:avLst/>
+          </a:prstGeom>
+          <a:solidFill>
+            <a:srgbClr val="1A1A1A"/>
+          </a:solidFill>
+          <a:ln>
+            <a:solidFill>
+              <a:srgbClr val="1A1A1A"/>
+            </a:solidFill>
+          </a:ln>
+        </p:spPr>
+        <p:txBody>
+          <a:bodyPr wrap="square" lIns="0" tIns="0" rIns="0" bIns="0" rtlCol="0" anchor="ctr"/>
+          <a:lstStyle/>
+          <a:p>
+            <a:pPr algn="ctr" indent="0" marL="0">
+              <a:buNone/>
+            </a:pPr>
+            <a:r>
+              <a:rPr lang="ja-JP" altLang="en-US" sz="1000" dirty="0">
+                <a:solidFill>
+                  <a:srgbClr val="FFFFFF"/>
+                </a:solidFill>
+                <a:latin typeface="Dela Gothic One" pitchFamily="34" charset="0"/>
+                <a:ea typeface="けいふぉんと" pitchFamily="34" charset="-122"/>
+                <a:cs typeface="Dela Gothic One" pitchFamily="34" charset="-120"/>
+              </a:rPr>
+              <a:t>STEP 4</a:t>
+            </a:r>
+            <a:endParaRPr lang="ja-JP" sz="1000" dirty="0"/>
+          </a:p>
+        </p:txBody>
+      </p:sp>
+      <p:sp>
+        <p:nvSpPr>
+          <p:cNvPr id="19" name="flow-node"/>
+          <p:cNvSpPr txBox="1"/>
+          <p:nvPr/>
+        </p:nvSpPr>
+        <p:spPr>
+          <a:xfrm>
+            <a:off x="7004304" y="1965960"/>
+            <a:ext cx="1527048" cy="1234440"/>
           </a:xfrm>
           <a:prstGeom prst="rect">
             <a:avLst/>
@@ -3738,144 +3712,80 @@
           <a:ln/>
         </p:spPr>
         <p:txBody>
-          <a:bodyPr wrap="square" lIns="0" tIns="0" rIns="0" bIns="0" rtlCol="0" anchor="ctr"/>
+          <a:bodyPr wrap="square" lIns="0" tIns="0" rIns="0" bIns="0" rtlCol="0" anchor="ctr">
+            <a:normAutofit/>
+          </a:bodyPr>
           <a:lstStyle/>
           <a:p>
             <a:pPr algn="ctr" indent="0" marL="0">
               <a:buNone/>
             </a:pPr>
             <a:r>
-              <a:rPr lang="en-US" sz="1000" b="1" dirty="0">
-                <a:solidFill>
-                  <a:schemeClr val="accent2"/>
-                </a:solidFill>
-              </a:rPr>
-              <a:t>STEP 4</a:t>
-            </a:r>
-            <a:endParaRPr lang="en-US" sz="1000" dirty="0"/>
-          </a:p>
-        </p:txBody>
-      </p:sp>
-      <p:sp>
-        <p:nvSpPr>
-          <p:cNvPr id="20" name="flow-node"/>
+              <a:rPr lang="ja-JP" altLang="en-US" sz="1400" b="1" dirty="0">
+                <a:solidFill>
+                  <a:srgbClr val="1A1A1A"/>
+                </a:solidFill>
+                <a:latin typeface="Noto Sans JP" pitchFamily="34" charset="0"/>
+                <a:ea typeface="Noto Sans JP" pitchFamily="34" charset="-122"/>
+                <a:cs typeface="Noto Sans JP" pitchFamily="34" charset="-120"/>
+              </a:rPr>
+              <a:t>ダッシュボード</a:t>
+            </a:r>
+            <a:endParaRPr lang="ja-JP" sz="1400" dirty="0"/>
+          </a:p>
+        </p:txBody>
+      </p:sp>
+      <p:sp>
+        <p:nvSpPr>
+          <p:cNvPr id="20" name="Text 14"/>
           <p:cNvSpPr txBox="1"/>
           <p:nvPr/>
         </p:nvSpPr>
         <p:spPr>
-          <a:xfrm>
-            <a:off x="6963156" y="2286000"/>
-            <a:ext cx="1540764" cy="868680"/>
-          </a:xfrm>
-          <a:prstGeom prst="rect">
-            <a:avLst/>
-          </a:prstGeom>
-          <a:noFill/>
-          <a:ln/>
-        </p:spPr>
-        <p:txBody>
-          <a:bodyPr wrap="square" lIns="0" tIns="0" rIns="0" bIns="0" rtlCol="0" anchor="ctr"/>
+          <a:xfrm rot="-60000">
+            <a:off x="502920" y="3794760"/>
+            <a:ext cx="8138160" cy="502920"/>
+          </a:xfrm>
+          <a:prstGeom prst="rect">
+            <a:avLst/>
+          </a:prstGeom>
+          <a:solidFill>
+            <a:srgbClr val="DD6420"/>
+          </a:solidFill>
+          <a:ln w="19050">
+            <a:solidFill>
+              <a:srgbClr val="1A1A1A"/>
+            </a:solidFill>
+          </a:ln>
+          <a:effectLst>
+            <a:outerShdw sx="100000" sy="100000" kx="0" ky="0" algn="bl" rotWithShape="0" blurRad="101600" dist="38100" dir="2700000">
+              <a:srgbClr val="1A1A1A">
+                <a:alpha val="100000"/>
+              </a:srgbClr>
+            </a:outerShdw>
+          </a:effectLst>
+        </p:spPr>
+        <p:txBody>
+          <a:bodyPr wrap="square" lIns="0" tIns="1905" rIns="1905" bIns="0" rtlCol="0" anchor="ctr">
+            <a:normAutofit/>
+          </a:bodyPr>
           <a:lstStyle/>
           <a:p>
             <a:pPr algn="ctr" indent="0" marL="0">
               <a:buNone/>
             </a:pPr>
             <a:r>
-              <a:rPr lang="en-US" sz="1400" b="1" dirty="0">
-                <a:solidFill>
-                  <a:schemeClr val="tx1"/>
-                </a:solidFill>
-              </a:rPr>
-              <a:t>ダッシュボード</a:t>
-            </a:r>
-            <a:endParaRPr lang="en-US" sz="1400" dirty="0"/>
-          </a:p>
-        </p:txBody>
-      </p:sp>
-      <p:sp>
-        <p:nvSpPr>
-          <p:cNvPr id="21" name="foot-box"/>
-          <p:cNvSpPr/>
-          <p:nvPr/>
-        </p:nvSpPr>
-        <p:spPr>
-          <a:xfrm>
-            <a:off x="548640" y="3794760"/>
-            <a:ext cx="8046720" cy="502920"/>
-          </a:xfrm>
-          <a:prstGeom prst="roundRect">
-            <a:avLst>
-              <a:gd name="adj" fmla="val 18182"/>
-            </a:avLst>
-          </a:prstGeom>
-          <a:solidFill>
-            <a:schemeClr val="bg2"/>
-          </a:solidFill>
-          <a:ln w="12700">
-            <a:solidFill>
-              <a:schemeClr val="bg2"/>
-            </a:solidFill>
-            <a:prstDash val="solid"/>
-          </a:ln>
-        </p:spPr>
-      </p:sp>
-      <p:pic>
-        <p:nvPicPr>
-          <p:cNvPr id="22" name="foot-icon" descr="preencoded.png">    </p:cNvPr>
-          <p:cNvPicPr>
-            <a:picLocks noChangeAspect="1"/>
-          </p:cNvPicPr>
-          <p:nvPr/>
-        </p:nvPicPr>
-        <p:blipFill>
-          <a:blip r:embed="rId4"/>
-          <a:stretch>
-            <a:fillRect/>
-          </a:stretch>
-        </p:blipFill>
-        <p:spPr>
-          <a:xfrm>
-            <a:off x="685800" y="3922776"/>
-            <a:ext cx="246888" cy="246888"/>
-          </a:xfrm>
-          <a:prstGeom prst="rect">
-            <a:avLst/>
-          </a:prstGeom>
-        </p:spPr>
-      </p:pic>
-      <p:sp>
-        <p:nvSpPr>
-          <p:cNvPr id="23" name="foot-text"/>
-          <p:cNvSpPr txBox="1"/>
-          <p:nvPr/>
-        </p:nvSpPr>
-        <p:spPr>
-          <a:xfrm>
-            <a:off x="1051560" y="3794760"/>
-            <a:ext cx="7406640" cy="502920"/>
-          </a:xfrm>
-          <a:prstGeom prst="rect">
-            <a:avLst/>
-          </a:prstGeom>
-          <a:noFill/>
-          <a:ln/>
-        </p:spPr>
-        <p:txBody>
-          <a:bodyPr wrap="square" lIns="0" tIns="0" rIns="0" bIns="0" rtlCol="0" anchor="ctr"/>
-          <a:lstStyle/>
-          <a:p>
-            <a:pPr indent="0" marL="0">
-              <a:buNone/>
-            </a:pPr>
-            <a:r>
-              <a:rPr lang="en-US" sz="1150" dirty="0">
-                <a:solidFill>
-                  <a:schemeClr val="tx1"/>
-                </a:solidFill>
+              <a:rPr lang="ja-JP" altLang="en-US" sz="1300" b="1" dirty="0">
+                <a:solidFill>
+                  <a:srgbClr val="FFFFFF"/>
+                </a:solidFill>
+                <a:latin typeface="Noto Sans JP" pitchFamily="34" charset="0"/>
+                <a:ea typeface="Noto Sans JP" pitchFamily="34" charset="-122"/>
+                <a:cs typeface="Noto Sans JP" pitchFamily="34" charset="-120"/>
               </a:rPr>
               <a:t>入力ミスを防ぐ工夫：必須にする／選択肢にする／説明文を書く。共有範囲は必ず確認</a:t>
             </a:r>
-            <a:endParaRPr lang="en-US" sz="1150" dirty="0"/>
+            <a:endParaRPr lang="ja-JP" sz="1300" dirty="0"/>
           </a:p>
         </p:txBody>
       </p:sp>
@@ -3891,8 +3801,8 @@
         </p:nvSpPr>
         <p:spPr>
           <a:xfrm>
-            <a:off x="8229600" y="4773168"/>
-            <a:ext cx="365760" cy="228600"/>
+            <a:off x="8366760" y="4754880"/>
+            <a:ext cx="365760" cy="274320"/>
           </a:xfrm>
           <a:prstGeom prst="rect">
             <a:avLst/>
@@ -3904,20 +3814,23 @@
           </a:extLst>
         </p:spPr>
         <p:txBody>
-          <a:bodyPr/>
+          <a:bodyPr anchor="ctr"/>
           <a:lstStyle>
             <a:lvl1pPr>
-              <a:defRPr sz="900">
-                <a:solidFill>
-                  <a:srgbClr val="5A6872"/>
-                </a:solidFill>
+              <a:defRPr sz="850">
+                <a:solidFill>
+                  <a:srgbClr val="FFFFFF"/>
+                </a:solidFill>
+                <a:latin typeface="Noto Sans JP"/>
+                <a:ea typeface="Noto Sans JP"/>
+                <a:cs typeface="Noto Sans JP"/>
               </a:defRPr>
             </a:lvl1pPr>
           </a:lstStyle>
           <a:p>
             <a:pPr algn="r"/>
             <a:fld id="{F7021451-1387-4CA6-816F-3879F97B5CBC}" type="slidenum">
-              <a:rPr b="0" lang="en-US"/>
+              <a:rPr b="1" lang="en-US"/>
               <a:t>3</a:t>
             </a:fld>
             <a:endParaRPr lang="en-US"/>
@@ -3952,15 +3865,58 @@
       <p:sp>
         <p:nvSpPr>
           <p:cNvPr id="2" name="Text 0"/>
-          <p:cNvSpPr/>
-          <p:nvPr>
-            <p:ph idx="100" type="title" hasCustomPrompt="1"/>
-          </p:nvPr>
-        </p:nvSpPr>
-        <p:spPr>
-          <a:xfrm>
-            <a:off x="548640" y="658368"/>
-            <a:ext cx="8046720" cy="566928"/>
+          <p:cNvSpPr txBox="1"/>
+          <p:nvPr/>
+        </p:nvSpPr>
+        <p:spPr>
+          <a:xfrm rot="-180000">
+            <a:off x="411480" y="201168"/>
+            <a:ext cx="1915668" cy="352044"/>
+          </a:xfrm>
+          <a:prstGeom prst="rect">
+            <a:avLst/>
+          </a:prstGeom>
+          <a:solidFill>
+            <a:srgbClr val="DD6420"/>
+          </a:solidFill>
+          <a:ln>
+            <a:solidFill>
+              <a:srgbClr val="DD6420"/>
+            </a:solidFill>
+          </a:ln>
+        </p:spPr>
+        <p:txBody>
+          <a:bodyPr wrap="square" lIns="0" tIns="0" rIns="0" bIns="0" rtlCol="0" anchor="ctr"/>
+          <a:lstStyle/>
+          <a:p>
+            <a:pPr algn="ctr" indent="0" marL="0">
+              <a:buNone/>
+            </a:pPr>
+            <a:r>
+              <a:rPr lang="ja-JP" altLang="en-US" sz="1100" dirty="0">
+                <a:solidFill>
+                  <a:srgbClr val="FFFFFF"/>
+                </a:solidFill>
+                <a:latin typeface="Dela Gothic One" pitchFamily="34" charset="0"/>
+                <a:ea typeface="けいふぉんと" pitchFamily="34" charset="-122"/>
+                <a:cs typeface="Dela Gothic One" pitchFamily="34" charset="-120"/>
+              </a:rPr>
+              <a:t>ハンズオン① 20分</a:t>
+            </a:r>
+            <a:endParaRPr lang="ja-JP" sz="1100" dirty="0"/>
+          </a:p>
+        </p:txBody>
+      </p:sp>
+      <p:sp>
+        <p:nvSpPr>
+          <p:cNvPr id="3" name="Text 1"/>
+          <p:cNvSpPr txBox="1"/>
+          <p:nvPr/>
+        </p:nvSpPr>
+        <p:spPr>
+          <a:xfrm>
+            <a:off x="411480" y="502920"/>
+            <a:ext cx="8321040" cy="685800"/>
           </a:xfrm>
           <a:prstGeom prst="rect">
             <a:avLst/>
@@ -3969,122 +3925,118 @@
           <a:ln/>
         </p:spPr>
         <p:txBody>
-          <a:bodyPr wrap="square" lIns="0" tIns="0" rIns="0" bIns="0" rtlCol="0" anchor="ctr"/>
-          <a:lstStyle/>
-          <a:p>
-            <a:pPr algn="l" indent="0" marL="0">
-              <a:buNone/>
-            </a:pPr>
-            <a:r>
-              <a:rPr lang="en-US" sz="2400" b="1" dirty="0">
-                <a:solidFill>
-                  <a:schemeClr val="tx1"/>
-                </a:solidFill>
+          <a:bodyPr wrap="square" lIns="0" tIns="0" rIns="0" bIns="0" rtlCol="0" anchor="ctr">
+            <a:normAutofit/>
+          </a:bodyPr>
+          <a:lstStyle/>
+          <a:p>
+            <a:pPr indent="0" marL="0">
+              <a:buNone/>
+            </a:pPr>
+            <a:r>
+              <a:rPr lang="ja-JP" altLang="en-US" sz="2600" dirty="0">
+                <a:solidFill>
+                  <a:srgbClr val="1A1A1A"/>
+                </a:solidFill>
+                <a:latin typeface="Dela Gothic One" pitchFamily="34" charset="0"/>
+                <a:ea typeface="けいふぉんと" pitchFamily="34" charset="-122"/>
+                <a:cs typeface="Dela Gothic One" pitchFamily="34" charset="-120"/>
               </a:rPr>
               <a:t>フォームを作る</a:t>
             </a:r>
-            <a:endParaRPr lang="en-US" sz="2400" dirty="0"/>
-          </a:p>
-        </p:txBody>
-      </p:sp>
-      <p:sp>
-        <p:nvSpPr>
-          <p:cNvPr id="3" name="chip"/>
+            <a:endParaRPr lang="ja-JP" sz="2600" dirty="0"/>
+          </a:p>
+        </p:txBody>
+      </p:sp>
+      <p:sp>
+        <p:nvSpPr>
+          <p:cNvPr id="5" name="card"/>
           <p:cNvSpPr/>
           <p:nvPr/>
         </p:nvSpPr>
         <p:spPr>
           <a:xfrm>
-            <a:off x="548640" y="292608"/>
-            <a:ext cx="1755648" cy="292608"/>
+            <a:off x="502920" y="1600200"/>
+            <a:ext cx="8138160" cy="566928"/>
           </a:xfrm>
           <a:prstGeom prst="roundRect">
             <a:avLst>
-              <a:gd name="adj" fmla="val 50000"/>
+              <a:gd name="adj" fmla="val 16129"/>
             </a:avLst>
           </a:prstGeom>
           <a:solidFill>
-            <a:schemeClr val="accent2"/>
-          </a:solidFill>
-          <a:ln w="12700">
-            <a:solidFill>
-              <a:schemeClr val="accent2"/>
-            </a:solidFill>
-            <a:prstDash val="solid"/>
-          </a:ln>
-        </p:spPr>
-      </p:sp>
-      <p:sp>
-        <p:nvSpPr>
-          <p:cNvPr id="4" name="chip-text"/>
-          <p:cNvSpPr txBox="1"/>
-          <p:nvPr/>
-        </p:nvSpPr>
-        <p:spPr>
-          <a:xfrm>
-            <a:off x="548640" y="292608"/>
-            <a:ext cx="1755648" cy="292608"/>
-          </a:xfrm>
-          <a:prstGeom prst="rect">
-            <a:avLst/>
-          </a:prstGeom>
-          <a:noFill/>
-          <a:ln/>
-        </p:spPr>
-        <p:txBody>
-          <a:bodyPr wrap="square" lIns="0" tIns="0" rIns="0" bIns="0" rtlCol="0" anchor="ctr"/>
-          <a:lstStyle/>
-          <a:p>
-            <a:pPr algn="ctr" indent="0" marL="0">
-              <a:buNone/>
-            </a:pPr>
-            <a:r>
-              <a:rPr lang="en-US" sz="1100" b="1" dirty="0">
-                <a:solidFill>
-                  <a:schemeClr val="bg1"/>
-                </a:solidFill>
-              </a:rPr>
-              <a:t>ハンズオン① 20分</a:t>
-            </a:r>
-            <a:endParaRPr lang="en-US" sz="1100" dirty="0"/>
-          </a:p>
-        </p:txBody>
-      </p:sp>
-      <p:sp>
-        <p:nvSpPr>
-          <p:cNvPr id="6" name="step-num"/>
-          <p:cNvSpPr/>
-          <p:nvPr/>
-        </p:nvSpPr>
-        <p:spPr>
-          <a:xfrm>
-            <a:off x="548640" y="1805940"/>
-            <a:ext cx="384048" cy="384048"/>
-          </a:xfrm>
-          <a:prstGeom prst="ellipse">
-            <a:avLst/>
-          </a:prstGeom>
-          <a:solidFill>
-            <a:schemeClr val="accent1"/>
-          </a:solidFill>
-          <a:ln w="15875">
+            <a:srgbClr val="FFFFFF"/>
+          </a:solidFill>
+          <a:ln w="25400">
             <a:solidFill>
               <a:srgbClr val="1A1A1A"/>
             </a:solidFill>
             <a:prstDash val="solid"/>
           </a:ln>
-        </p:spPr>
-      </p:sp>
-      <p:sp>
-        <p:nvSpPr>
-          <p:cNvPr id="7" name="step-num-text"/>
+          <a:effectLst>
+            <a:outerShdw sx="100000" sy="100000" kx="0" ky="0" algn="bl" rotWithShape="0" blurRad="101600" dist="38100" dir="2700000">
+              <a:srgbClr val="1A1A1A">
+                <a:alpha val="100000"/>
+              </a:srgbClr>
+            </a:outerShdw>
+          </a:effectLst>
+        </p:spPr>
+      </p:sp>
+      <p:sp>
+        <p:nvSpPr>
+          <p:cNvPr id="6" name="Text 3"/>
           <p:cNvSpPr txBox="1"/>
           <p:nvPr/>
         </p:nvSpPr>
         <p:spPr>
           <a:xfrm>
-            <a:off x="548640" y="1805940"/>
-            <a:ext cx="384048" cy="384048"/>
+            <a:off x="640080" y="1682496"/>
+            <a:ext cx="402336" cy="402336"/>
+          </a:xfrm>
+          <a:prstGeom prst="ellipse">
+            <a:avLst/>
+          </a:prstGeom>
+          <a:solidFill>
+            <a:srgbClr val="DD6420"/>
+          </a:solidFill>
+          <a:ln w="19050">
+            <a:solidFill>
+              <a:srgbClr val="1A1A1A"/>
+            </a:solidFill>
+          </a:ln>
+        </p:spPr>
+        <p:txBody>
+          <a:bodyPr wrap="square" lIns="0" tIns="0" rIns="0" bIns="0" rtlCol="0" anchor="ctr"/>
+          <a:lstStyle/>
+          <a:p>
+            <a:pPr algn="ctr" indent="0" marL="0">
+              <a:buNone/>
+            </a:pPr>
+            <a:r>
+              <a:rPr lang="ja-JP" altLang="en-US" sz="1500" dirty="0">
+                <a:solidFill>
+                  <a:srgbClr val="FFFFFF"/>
+                </a:solidFill>
+                <a:latin typeface="Dela Gothic One" pitchFamily="34" charset="0"/>
+                <a:ea typeface="けいふぉんと" pitchFamily="34" charset="-122"/>
+                <a:cs typeface="Dela Gothic One" pitchFamily="34" charset="-120"/>
+              </a:rPr>
+              <a:t>1</a:t>
+            </a:r>
+            <a:endParaRPr lang="ja-JP" sz="1500" dirty="0"/>
+          </a:p>
+        </p:txBody>
+      </p:sp>
+      <p:sp>
+        <p:nvSpPr>
+          <p:cNvPr id="7" name="step-text"/>
+          <p:cNvSpPr txBox="1"/>
+          <p:nvPr/>
+        </p:nvSpPr>
+        <p:spPr>
+          <a:xfrm>
+            <a:off x="1234440" y="1600200"/>
+            <a:ext cx="7269480" cy="566928"/>
           </a:xfrm>
           <a:prstGeom prst="rect">
             <a:avLst/>
@@ -4093,95 +4045,118 @@
           <a:ln/>
         </p:spPr>
         <p:txBody>
-          <a:bodyPr wrap="square" lIns="0" tIns="0" rIns="0" bIns="0" rtlCol="0" anchor="ctr"/>
-          <a:lstStyle/>
-          <a:p>
-            <a:pPr algn="ctr" indent="0" marL="0">
-              <a:buNone/>
-            </a:pPr>
-            <a:r>
-              <a:rPr lang="en-US" sz="1400" b="1" dirty="0">
-                <a:solidFill>
-                  <a:schemeClr val="tx1"/>
-                </a:solidFill>
-              </a:rPr>
-              <a:t>1</a:t>
-            </a:r>
-            <a:endParaRPr lang="en-US" sz="1400" dirty="0"/>
-          </a:p>
-        </p:txBody>
-      </p:sp>
-      <p:sp>
-        <p:nvSpPr>
-          <p:cNvPr id="8" name="step-text"/>
-          <p:cNvSpPr txBox="1"/>
-          <p:nvPr/>
-        </p:nvSpPr>
-        <p:spPr>
-          <a:xfrm>
-            <a:off x="1097280" y="1696212"/>
-            <a:ext cx="7498080" cy="603504"/>
-          </a:xfrm>
-          <a:prstGeom prst="rect">
-            <a:avLst/>
-          </a:prstGeom>
-          <a:noFill/>
-          <a:ln/>
-        </p:spPr>
-        <p:txBody>
-          <a:bodyPr wrap="square" lIns="0" tIns="0" rIns="0" bIns="0" rtlCol="0" anchor="ctr"/>
+          <a:bodyPr wrap="square" lIns="0" tIns="0" rIns="0" bIns="0" rtlCol="0" anchor="ctr">
+            <a:normAutofit/>
+          </a:bodyPr>
           <a:lstStyle/>
           <a:p>
             <a:pPr indent="0" marL="0">
               <a:buNone/>
             </a:pPr>
             <a:r>
-              <a:rPr lang="en-US" sz="1450" dirty="0">
-                <a:solidFill>
-                  <a:schemeClr val="tx1"/>
-                </a:solidFill>
+              <a:rPr lang="ja-JP" altLang="en-US" sz="1400" b="1" dirty="0">
+                <a:solidFill>
+                  <a:srgbClr val="1A1A1A"/>
+                </a:solidFill>
+                <a:latin typeface="Noto Sans JP" pitchFamily="34" charset="0"/>
+                <a:ea typeface="Noto Sans JP" pitchFamily="34" charset="-122"/>
+                <a:cs typeface="Noto Sans JP" pitchFamily="34" charset="-120"/>
               </a:rPr>
               <a:t>主テーブルでフォームビューを追加する</a:t>
             </a:r>
-            <a:endParaRPr lang="en-US" sz="1450" dirty="0"/>
-          </a:p>
-        </p:txBody>
-      </p:sp>
-      <p:sp>
-        <p:nvSpPr>
-          <p:cNvPr id="9" name="step-num"/>
+            <a:endParaRPr lang="ja-JP" sz="1400" dirty="0"/>
+          </a:p>
+        </p:txBody>
+      </p:sp>
+      <p:sp>
+        <p:nvSpPr>
+          <p:cNvPr id="8" name="card"/>
           <p:cNvSpPr/>
           <p:nvPr/>
         </p:nvSpPr>
         <p:spPr>
           <a:xfrm>
-            <a:off x="548640" y="2409444"/>
-            <a:ext cx="384048" cy="384048"/>
-          </a:xfrm>
-          <a:prstGeom prst="ellipse">
-            <a:avLst/>
-          </a:prstGeom>
-          <a:solidFill>
-            <a:schemeClr val="accent1"/>
-          </a:solidFill>
-          <a:ln w="15875">
+            <a:off x="502920" y="2295144"/>
+            <a:ext cx="8138160" cy="566928"/>
+          </a:xfrm>
+          <a:prstGeom prst="roundRect">
+            <a:avLst>
+              <a:gd name="adj" fmla="val 16129"/>
+            </a:avLst>
+          </a:prstGeom>
+          <a:solidFill>
+            <a:srgbClr val="FFFFFF"/>
+          </a:solidFill>
+          <a:ln w="25400">
             <a:solidFill>
               <a:srgbClr val="1A1A1A"/>
             </a:solidFill>
             <a:prstDash val="solid"/>
           </a:ln>
-        </p:spPr>
-      </p:sp>
-      <p:sp>
-        <p:nvSpPr>
-          <p:cNvPr id="10" name="step-num-text"/>
+          <a:effectLst>
+            <a:outerShdw sx="100000" sy="100000" kx="0" ky="0" algn="bl" rotWithShape="0" blurRad="101600" dist="38100" dir="2700000">
+              <a:srgbClr val="1A1A1A">
+                <a:alpha val="100000"/>
+              </a:srgbClr>
+            </a:outerShdw>
+          </a:effectLst>
+        </p:spPr>
+      </p:sp>
+      <p:sp>
+        <p:nvSpPr>
+          <p:cNvPr id="9" name="Text 6"/>
           <p:cNvSpPr txBox="1"/>
           <p:nvPr/>
         </p:nvSpPr>
         <p:spPr>
           <a:xfrm>
-            <a:off x="548640" y="2409444"/>
-            <a:ext cx="384048" cy="384048"/>
+            <a:off x="640080" y="2377440"/>
+            <a:ext cx="402336" cy="402336"/>
+          </a:xfrm>
+          <a:prstGeom prst="ellipse">
+            <a:avLst/>
+          </a:prstGeom>
+          <a:solidFill>
+            <a:srgbClr val="DD6420"/>
+          </a:solidFill>
+          <a:ln w="19050">
+            <a:solidFill>
+              <a:srgbClr val="1A1A1A"/>
+            </a:solidFill>
+          </a:ln>
+        </p:spPr>
+        <p:txBody>
+          <a:bodyPr wrap="square" lIns="0" tIns="0" rIns="0" bIns="0" rtlCol="0" anchor="ctr"/>
+          <a:lstStyle/>
+          <a:p>
+            <a:pPr algn="ctr" indent="0" marL="0">
+              <a:buNone/>
+            </a:pPr>
+            <a:r>
+              <a:rPr lang="ja-JP" altLang="en-US" sz="1500" dirty="0">
+                <a:solidFill>
+                  <a:srgbClr val="FFFFFF"/>
+                </a:solidFill>
+                <a:latin typeface="Dela Gothic One" pitchFamily="34" charset="0"/>
+                <a:ea typeface="けいふぉんと" pitchFamily="34" charset="-122"/>
+                <a:cs typeface="Dela Gothic One" pitchFamily="34" charset="-120"/>
+              </a:rPr>
+              <a:t>2</a:t>
+            </a:r>
+            <a:endParaRPr lang="ja-JP" sz="1500" dirty="0"/>
+          </a:p>
+        </p:txBody>
+      </p:sp>
+      <p:sp>
+        <p:nvSpPr>
+          <p:cNvPr id="10" name="step-text"/>
+          <p:cNvSpPr txBox="1"/>
+          <p:nvPr/>
+        </p:nvSpPr>
+        <p:spPr>
+          <a:xfrm>
+            <a:off x="1234440" y="2295144"/>
+            <a:ext cx="7269480" cy="566928"/>
           </a:xfrm>
           <a:prstGeom prst="rect">
             <a:avLst/>
@@ -4190,95 +4165,118 @@
           <a:ln/>
         </p:spPr>
         <p:txBody>
-          <a:bodyPr wrap="square" lIns="0" tIns="0" rIns="0" bIns="0" rtlCol="0" anchor="ctr"/>
-          <a:lstStyle/>
-          <a:p>
-            <a:pPr algn="ctr" indent="0" marL="0">
-              <a:buNone/>
-            </a:pPr>
-            <a:r>
-              <a:rPr lang="en-US" sz="1400" b="1" dirty="0">
-                <a:solidFill>
-                  <a:schemeClr val="tx1"/>
-                </a:solidFill>
-              </a:rPr>
-              <a:t>2</a:t>
-            </a:r>
-            <a:endParaRPr lang="en-US" sz="1400" dirty="0"/>
-          </a:p>
-        </p:txBody>
-      </p:sp>
-      <p:sp>
-        <p:nvSpPr>
-          <p:cNvPr id="11" name="step-text"/>
-          <p:cNvSpPr txBox="1"/>
-          <p:nvPr/>
-        </p:nvSpPr>
-        <p:spPr>
-          <a:xfrm>
-            <a:off x="1097280" y="2299716"/>
-            <a:ext cx="7498080" cy="603504"/>
-          </a:xfrm>
-          <a:prstGeom prst="rect">
-            <a:avLst/>
-          </a:prstGeom>
-          <a:noFill/>
-          <a:ln/>
-        </p:spPr>
-        <p:txBody>
-          <a:bodyPr wrap="square" lIns="0" tIns="0" rIns="0" bIns="0" rtlCol="0" anchor="ctr"/>
+          <a:bodyPr wrap="square" lIns="0" tIns="0" rIns="0" bIns="0" rtlCol="0" anchor="ctr">
+            <a:normAutofit/>
+          </a:bodyPr>
           <a:lstStyle/>
           <a:p>
             <a:pPr indent="0" marL="0">
               <a:buNone/>
             </a:pPr>
             <a:r>
-              <a:rPr lang="en-US" sz="1450" dirty="0">
-                <a:solidFill>
-                  <a:schemeClr val="tx1"/>
-                </a:solidFill>
+              <a:rPr lang="ja-JP" altLang="en-US" sz="1400" b="1" dirty="0">
+                <a:solidFill>
+                  <a:srgbClr val="1A1A1A"/>
+                </a:solidFill>
+                <a:latin typeface="Noto Sans JP" pitchFamily="34" charset="0"/>
+                <a:ea typeface="Noto Sans JP" pitchFamily="34" charset="-122"/>
+                <a:cs typeface="Noto Sans JP" pitchFamily="34" charset="-120"/>
               </a:rPr>
               <a:t>入力してほしい項目だけを表示し、順番を入れ替える</a:t>
             </a:r>
-            <a:endParaRPr lang="en-US" sz="1450" dirty="0"/>
-          </a:p>
-        </p:txBody>
-      </p:sp>
-      <p:sp>
-        <p:nvSpPr>
-          <p:cNvPr id="12" name="step-num"/>
+            <a:endParaRPr lang="ja-JP" sz="1400" dirty="0"/>
+          </a:p>
+        </p:txBody>
+      </p:sp>
+      <p:sp>
+        <p:nvSpPr>
+          <p:cNvPr id="11" name="card"/>
           <p:cNvSpPr/>
           <p:nvPr/>
         </p:nvSpPr>
         <p:spPr>
           <a:xfrm>
-            <a:off x="548640" y="3012948"/>
-            <a:ext cx="384048" cy="384048"/>
-          </a:xfrm>
-          <a:prstGeom prst="ellipse">
-            <a:avLst/>
-          </a:prstGeom>
-          <a:solidFill>
-            <a:schemeClr val="accent1"/>
-          </a:solidFill>
-          <a:ln w="15875">
+            <a:off x="502920" y="2990088"/>
+            <a:ext cx="8138160" cy="566928"/>
+          </a:xfrm>
+          <a:prstGeom prst="roundRect">
+            <a:avLst>
+              <a:gd name="adj" fmla="val 16129"/>
+            </a:avLst>
+          </a:prstGeom>
+          <a:solidFill>
+            <a:srgbClr val="FFFFFF"/>
+          </a:solidFill>
+          <a:ln w="25400">
             <a:solidFill>
               <a:srgbClr val="1A1A1A"/>
             </a:solidFill>
             <a:prstDash val="solid"/>
           </a:ln>
-        </p:spPr>
-      </p:sp>
-      <p:sp>
-        <p:nvSpPr>
-          <p:cNvPr id="13" name="step-num-text"/>
+          <a:effectLst>
+            <a:outerShdw sx="100000" sy="100000" kx="0" ky="0" algn="bl" rotWithShape="0" blurRad="101600" dist="38100" dir="2700000">
+              <a:srgbClr val="1A1A1A">
+                <a:alpha val="100000"/>
+              </a:srgbClr>
+            </a:outerShdw>
+          </a:effectLst>
+        </p:spPr>
+      </p:sp>
+      <p:sp>
+        <p:nvSpPr>
+          <p:cNvPr id="12" name="Text 9"/>
           <p:cNvSpPr txBox="1"/>
           <p:nvPr/>
         </p:nvSpPr>
         <p:spPr>
           <a:xfrm>
-            <a:off x="548640" y="3012948"/>
-            <a:ext cx="384048" cy="384048"/>
+            <a:off x="640080" y="3072384"/>
+            <a:ext cx="402336" cy="402336"/>
+          </a:xfrm>
+          <a:prstGeom prst="ellipse">
+            <a:avLst/>
+          </a:prstGeom>
+          <a:solidFill>
+            <a:srgbClr val="DD6420"/>
+          </a:solidFill>
+          <a:ln w="19050">
+            <a:solidFill>
+              <a:srgbClr val="1A1A1A"/>
+            </a:solidFill>
+          </a:ln>
+        </p:spPr>
+        <p:txBody>
+          <a:bodyPr wrap="square" lIns="0" tIns="0" rIns="0" bIns="0" rtlCol="0" anchor="ctr"/>
+          <a:lstStyle/>
+          <a:p>
+            <a:pPr algn="ctr" indent="0" marL="0">
+              <a:buNone/>
+            </a:pPr>
+            <a:r>
+              <a:rPr lang="ja-JP" altLang="en-US" sz="1500" dirty="0">
+                <a:solidFill>
+                  <a:srgbClr val="FFFFFF"/>
+                </a:solidFill>
+                <a:latin typeface="Dela Gothic One" pitchFamily="34" charset="0"/>
+                <a:ea typeface="けいふぉんと" pitchFamily="34" charset="-122"/>
+                <a:cs typeface="Dela Gothic One" pitchFamily="34" charset="-120"/>
+              </a:rPr>
+              <a:t>3</a:t>
+            </a:r>
+            <a:endParaRPr lang="ja-JP" sz="1500" dirty="0"/>
+          </a:p>
+        </p:txBody>
+      </p:sp>
+      <p:sp>
+        <p:nvSpPr>
+          <p:cNvPr id="13" name="step-text"/>
+          <p:cNvSpPr txBox="1"/>
+          <p:nvPr/>
+        </p:nvSpPr>
+        <p:spPr>
+          <a:xfrm>
+            <a:off x="1234440" y="2990088"/>
+            <a:ext cx="7269480" cy="566928"/>
           </a:xfrm>
           <a:prstGeom prst="rect">
             <a:avLst/>
@@ -4287,95 +4285,118 @@
           <a:ln/>
         </p:spPr>
         <p:txBody>
-          <a:bodyPr wrap="square" lIns="0" tIns="0" rIns="0" bIns="0" rtlCol="0" anchor="ctr"/>
-          <a:lstStyle/>
-          <a:p>
-            <a:pPr algn="ctr" indent="0" marL="0">
-              <a:buNone/>
-            </a:pPr>
-            <a:r>
-              <a:rPr lang="en-US" sz="1400" b="1" dirty="0">
-                <a:solidFill>
-                  <a:schemeClr val="tx1"/>
-                </a:solidFill>
-              </a:rPr>
-              <a:t>3</a:t>
-            </a:r>
-            <a:endParaRPr lang="en-US" sz="1400" dirty="0"/>
-          </a:p>
-        </p:txBody>
-      </p:sp>
-      <p:sp>
-        <p:nvSpPr>
-          <p:cNvPr id="14" name="step-text"/>
-          <p:cNvSpPr txBox="1"/>
-          <p:nvPr/>
-        </p:nvSpPr>
-        <p:spPr>
-          <a:xfrm>
-            <a:off x="1097280" y="2903220"/>
-            <a:ext cx="7498080" cy="603504"/>
-          </a:xfrm>
-          <a:prstGeom prst="rect">
-            <a:avLst/>
-          </a:prstGeom>
-          <a:noFill/>
-          <a:ln/>
-        </p:spPr>
-        <p:txBody>
-          <a:bodyPr wrap="square" lIns="0" tIns="0" rIns="0" bIns="0" rtlCol="0" anchor="ctr"/>
+          <a:bodyPr wrap="square" lIns="0" tIns="0" rIns="0" bIns="0" rtlCol="0" anchor="ctr">
+            <a:normAutofit/>
+          </a:bodyPr>
           <a:lstStyle/>
           <a:p>
             <a:pPr indent="0" marL="0">
               <a:buNone/>
             </a:pPr>
             <a:r>
-              <a:rPr lang="en-US" sz="1450" dirty="0">
-                <a:solidFill>
-                  <a:schemeClr val="tx1"/>
-                </a:solidFill>
+              <a:rPr lang="ja-JP" altLang="en-US" sz="1400" b="1" dirty="0">
+                <a:solidFill>
+                  <a:srgbClr val="1A1A1A"/>
+                </a:solidFill>
+                <a:latin typeface="Noto Sans JP" pitchFamily="34" charset="0"/>
+                <a:ea typeface="Noto Sans JP" pitchFamily="34" charset="-122"/>
+                <a:cs typeface="Noto Sans JP" pitchFamily="34" charset="-120"/>
               </a:rPr>
               <a:t>必須項目と説明文を設定する</a:t>
             </a:r>
-            <a:endParaRPr lang="en-US" sz="1450" dirty="0"/>
-          </a:p>
-        </p:txBody>
-      </p:sp>
-      <p:sp>
-        <p:nvSpPr>
-          <p:cNvPr id="15" name="step-num"/>
+            <a:endParaRPr lang="ja-JP" sz="1400" dirty="0"/>
+          </a:p>
+        </p:txBody>
+      </p:sp>
+      <p:sp>
+        <p:nvSpPr>
+          <p:cNvPr id="14" name="card"/>
           <p:cNvSpPr/>
           <p:nvPr/>
         </p:nvSpPr>
         <p:spPr>
           <a:xfrm>
-            <a:off x="548640" y="3616452"/>
-            <a:ext cx="384048" cy="384048"/>
-          </a:xfrm>
-          <a:prstGeom prst="ellipse">
-            <a:avLst/>
-          </a:prstGeom>
-          <a:solidFill>
-            <a:schemeClr val="accent1"/>
-          </a:solidFill>
-          <a:ln w="15875">
+            <a:off x="502920" y="3685032"/>
+            <a:ext cx="8138160" cy="566928"/>
+          </a:xfrm>
+          <a:prstGeom prst="roundRect">
+            <a:avLst>
+              <a:gd name="adj" fmla="val 16129"/>
+            </a:avLst>
+          </a:prstGeom>
+          <a:solidFill>
+            <a:srgbClr val="FFFFFF"/>
+          </a:solidFill>
+          <a:ln w="25400">
             <a:solidFill>
               <a:srgbClr val="1A1A1A"/>
             </a:solidFill>
             <a:prstDash val="solid"/>
           </a:ln>
-        </p:spPr>
-      </p:sp>
-      <p:sp>
-        <p:nvSpPr>
-          <p:cNvPr id="16" name="step-num-text"/>
+          <a:effectLst>
+            <a:outerShdw sx="100000" sy="100000" kx="0" ky="0" algn="bl" rotWithShape="0" blurRad="101600" dist="38100" dir="2700000">
+              <a:srgbClr val="1A1A1A">
+                <a:alpha val="100000"/>
+              </a:srgbClr>
+            </a:outerShdw>
+          </a:effectLst>
+        </p:spPr>
+      </p:sp>
+      <p:sp>
+        <p:nvSpPr>
+          <p:cNvPr id="15" name="Text 12"/>
           <p:cNvSpPr txBox="1"/>
           <p:nvPr/>
         </p:nvSpPr>
         <p:spPr>
           <a:xfrm>
-            <a:off x="548640" y="3616452"/>
-            <a:ext cx="384048" cy="384048"/>
+            <a:off x="640080" y="3767328"/>
+            <a:ext cx="402336" cy="402336"/>
+          </a:xfrm>
+          <a:prstGeom prst="ellipse">
+            <a:avLst/>
+          </a:prstGeom>
+          <a:solidFill>
+            <a:srgbClr val="DD6420"/>
+          </a:solidFill>
+          <a:ln w="19050">
+            <a:solidFill>
+              <a:srgbClr val="1A1A1A"/>
+            </a:solidFill>
+          </a:ln>
+        </p:spPr>
+        <p:txBody>
+          <a:bodyPr wrap="square" lIns="0" tIns="0" rIns="0" bIns="0" rtlCol="0" anchor="ctr"/>
+          <a:lstStyle/>
+          <a:p>
+            <a:pPr algn="ctr" indent="0" marL="0">
+              <a:buNone/>
+            </a:pPr>
+            <a:r>
+              <a:rPr lang="ja-JP" altLang="en-US" sz="1500" dirty="0">
+                <a:solidFill>
+                  <a:srgbClr val="FFFFFF"/>
+                </a:solidFill>
+                <a:latin typeface="Dela Gothic One" pitchFamily="34" charset="0"/>
+                <a:ea typeface="けいふぉんと" pitchFamily="34" charset="-122"/>
+                <a:cs typeface="Dela Gothic One" pitchFamily="34" charset="-120"/>
+              </a:rPr>
+              <a:t>4</a:t>
+            </a:r>
+            <a:endParaRPr lang="ja-JP" sz="1500" dirty="0"/>
+          </a:p>
+        </p:txBody>
+      </p:sp>
+      <p:sp>
+        <p:nvSpPr>
+          <p:cNvPr id="16" name="step-text"/>
+          <p:cNvSpPr txBox="1"/>
+          <p:nvPr/>
+        </p:nvSpPr>
+        <p:spPr>
+          <a:xfrm>
+            <a:off x="1234440" y="3685032"/>
+            <a:ext cx="7269480" cy="566928"/>
           </a:xfrm>
           <a:prstGeom prst="rect">
             <a:avLst/>
@@ -4384,57 +4405,26 @@
           <a:ln/>
         </p:spPr>
         <p:txBody>
-          <a:bodyPr wrap="square" lIns="0" tIns="0" rIns="0" bIns="0" rtlCol="0" anchor="ctr"/>
-          <a:lstStyle/>
-          <a:p>
-            <a:pPr algn="ctr" indent="0" marL="0">
-              <a:buNone/>
-            </a:pPr>
-            <a:r>
-              <a:rPr lang="en-US" sz="1400" b="1" dirty="0">
-                <a:solidFill>
-                  <a:schemeClr val="tx1"/>
-                </a:solidFill>
-              </a:rPr>
-              <a:t>4</a:t>
-            </a:r>
-            <a:endParaRPr lang="en-US" sz="1400" dirty="0"/>
-          </a:p>
-        </p:txBody>
-      </p:sp>
-      <p:sp>
-        <p:nvSpPr>
-          <p:cNvPr id="17" name="step-text"/>
-          <p:cNvSpPr txBox="1"/>
-          <p:nvPr/>
-        </p:nvSpPr>
-        <p:spPr>
-          <a:xfrm>
-            <a:off x="1097280" y="3506724"/>
-            <a:ext cx="7498080" cy="603504"/>
-          </a:xfrm>
-          <a:prstGeom prst="rect">
-            <a:avLst/>
-          </a:prstGeom>
-          <a:noFill/>
-          <a:ln/>
-        </p:spPr>
-        <p:txBody>
-          <a:bodyPr wrap="square" lIns="0" tIns="0" rIns="0" bIns="0" rtlCol="0" anchor="ctr"/>
+          <a:bodyPr wrap="square" lIns="0" tIns="0" rIns="0" bIns="0" rtlCol="0" anchor="ctr">
+            <a:normAutofit/>
+          </a:bodyPr>
           <a:lstStyle/>
           <a:p>
             <a:pPr indent="0" marL="0">
               <a:buNone/>
             </a:pPr>
             <a:r>
-              <a:rPr lang="en-US" sz="1450" dirty="0">
-                <a:solidFill>
-                  <a:schemeClr val="tx1"/>
-                </a:solidFill>
+              <a:rPr lang="ja-JP" altLang="en-US" sz="1400" b="1" dirty="0">
+                <a:solidFill>
+                  <a:srgbClr val="1A1A1A"/>
+                </a:solidFill>
+                <a:latin typeface="Noto Sans JP" pitchFamily="34" charset="0"/>
+                <a:ea typeface="Noto Sans JP" pitchFamily="34" charset="-122"/>
+                <a:cs typeface="Noto Sans JP" pitchFamily="34" charset="-120"/>
               </a:rPr>
               <a:t>スマホで開いて3件入力し、テーブルに入るか確かめる</a:t>
             </a:r>
-            <a:endParaRPr lang="en-US" sz="1450" dirty="0"/>
+            <a:endParaRPr lang="ja-JP" sz="1400" dirty="0"/>
           </a:p>
         </p:txBody>
       </p:sp>
@@ -4450,8 +4440,8 @@
         </p:nvSpPr>
         <p:spPr>
           <a:xfrm>
-            <a:off x="8229600" y="4773168"/>
-            <a:ext cx="365760" cy="228600"/>
+            <a:off x="8366760" y="4754880"/>
+            <a:ext cx="365760" cy="274320"/>
           </a:xfrm>
           <a:prstGeom prst="rect">
             <a:avLst/>
@@ -4463,20 +4453,23 @@
           </a:extLst>
         </p:spPr>
         <p:txBody>
-          <a:bodyPr/>
+          <a:bodyPr anchor="ctr"/>
           <a:lstStyle>
             <a:lvl1pPr>
-              <a:defRPr sz="900">
-                <a:solidFill>
-                  <a:srgbClr val="5A6872"/>
-                </a:solidFill>
+              <a:defRPr sz="850">
+                <a:solidFill>
+                  <a:srgbClr val="FFFFFF"/>
+                </a:solidFill>
+                <a:latin typeface="Noto Sans JP"/>
+                <a:ea typeface="Noto Sans JP"/>
+                <a:cs typeface="Noto Sans JP"/>
               </a:defRPr>
             </a:lvl1pPr>
           </a:lstStyle>
           <a:p>
             <a:pPr algn="r"/>
             <a:fld id="{F7021451-1387-4CA6-816F-3879F97B5CBC}" type="slidenum">
-              <a:rPr b="0" lang="en-US"/>
+              <a:rPr b="1" lang="en-US"/>
               <a:t>4</a:t>
             </a:fld>
             <a:endParaRPr lang="en-US"/>
@@ -4511,15 +4504,58 @@
       <p:sp>
         <p:nvSpPr>
           <p:cNvPr id="2" name="Text 0"/>
-          <p:cNvSpPr/>
-          <p:nvPr>
-            <p:ph idx="100" type="title" hasCustomPrompt="1"/>
-          </p:nvPr>
-        </p:nvSpPr>
-        <p:spPr>
-          <a:xfrm>
-            <a:off x="548640" y="658368"/>
-            <a:ext cx="8046720" cy="566928"/>
+          <p:cNvSpPr txBox="1"/>
+          <p:nvPr/>
+        </p:nvSpPr>
+        <p:spPr>
+          <a:xfrm rot="-180000">
+            <a:off x="411480" y="201168"/>
+            <a:ext cx="1478128" cy="352044"/>
+          </a:xfrm>
+          <a:prstGeom prst="rect">
+            <a:avLst/>
+          </a:prstGeom>
+          <a:solidFill>
+            <a:srgbClr val="1A1A1A"/>
+          </a:solidFill>
+          <a:ln>
+            <a:solidFill>
+              <a:srgbClr val="1A1A1A"/>
+            </a:solidFill>
+          </a:ln>
+        </p:spPr>
+        <p:txBody>
+          <a:bodyPr wrap="square" lIns="0" tIns="0" rIns="0" bIns="0" rtlCol="0" anchor="ctr"/>
+          <a:lstStyle/>
+          <a:p>
+            <a:pPr algn="ctr" indent="0" marL="0">
+              <a:buNone/>
+            </a:pPr>
+            <a:r>
+              <a:rPr lang="ja-JP" altLang="en-US" sz="1100" dirty="0">
+                <a:solidFill>
+                  <a:srgbClr val="FFFFFF"/>
+                </a:solidFill>
+                <a:latin typeface="Dela Gothic One" pitchFamily="34" charset="0"/>
+                <a:ea typeface="けいふぉんと" pitchFamily="34" charset="-122"/>
+                <a:cs typeface="Dela Gothic One" pitchFamily="34" charset="-120"/>
+              </a:rPr>
+              <a:t>説明② 10分</a:t>
+            </a:r>
+            <a:endParaRPr lang="ja-JP" sz="1100" dirty="0"/>
+          </a:p>
+        </p:txBody>
+      </p:sp>
+      <p:sp>
+        <p:nvSpPr>
+          <p:cNvPr id="3" name="Text 1"/>
+          <p:cNvSpPr txBox="1"/>
+          <p:nvPr/>
+        </p:nvSpPr>
+        <p:spPr>
+          <a:xfrm>
+            <a:off x="411480" y="502920"/>
+            <a:ext cx="8321040" cy="685800"/>
           </a:xfrm>
           <a:prstGeom prst="rect">
             <a:avLst/>
@@ -4528,86 +4564,60 @@
           <a:ln/>
         </p:spPr>
         <p:txBody>
-          <a:bodyPr wrap="square" lIns="0" tIns="0" rIns="0" bIns="0" rtlCol="0" anchor="ctr"/>
-          <a:lstStyle/>
-          <a:p>
-            <a:pPr algn="l" indent="0" marL="0">
-              <a:buNone/>
-            </a:pPr>
-            <a:r>
-              <a:rPr lang="en-US" sz="2400" b="1" dirty="0">
-                <a:solidFill>
-                  <a:schemeClr val="tx1"/>
-                </a:solidFill>
+          <a:bodyPr wrap="square" lIns="0" tIns="0" rIns="0" bIns="0" rtlCol="0" anchor="ctr">
+            <a:normAutofit/>
+          </a:bodyPr>
+          <a:lstStyle/>
+          <a:p>
+            <a:pPr indent="0" marL="0">
+              <a:buNone/>
+            </a:pPr>
+            <a:r>
+              <a:rPr lang="ja-JP" altLang="en-US" sz="2600" dirty="0">
+                <a:solidFill>
+                  <a:srgbClr val="1A1A1A"/>
+                </a:solidFill>
+                <a:latin typeface="Dela Gothic One" pitchFamily="34" charset="0"/>
+                <a:ea typeface="けいふぉんと" pitchFamily="34" charset="-122"/>
+                <a:cs typeface="Dela Gothic One" pitchFamily="34" charset="-120"/>
               </a:rPr>
               <a:t>見え方を変えるビュー</a:t>
             </a:r>
-            <a:endParaRPr lang="en-US" sz="2400" dirty="0"/>
-          </a:p>
-        </p:txBody>
-      </p:sp>
-      <p:sp>
-        <p:nvSpPr>
-          <p:cNvPr id="3" name="chip"/>
+            <a:endParaRPr lang="ja-JP" sz="2600" dirty="0"/>
+          </a:p>
+        </p:txBody>
+      </p:sp>
+      <p:sp>
+        <p:nvSpPr>
+          <p:cNvPr id="5" name="Shape 2"/>
           <p:cNvSpPr/>
           <p:nvPr/>
         </p:nvSpPr>
         <p:spPr>
           <a:xfrm>
-            <a:off x="548640" y="292608"/>
-            <a:ext cx="1344168" cy="292608"/>
-          </a:xfrm>
-          <a:prstGeom prst="roundRect">
-            <a:avLst>
-              <a:gd name="adj" fmla="val 50000"/>
-            </a:avLst>
-          </a:prstGeom>
-          <a:solidFill>
-            <a:schemeClr val="tx1"/>
-          </a:solidFill>
-          <a:ln w="12700">
+            <a:off x="502920" y="1417320"/>
+            <a:ext cx="8138160" cy="2194560"/>
+          </a:xfrm>
+          <a:prstGeom prst="rect">
+            <a:avLst/>
+          </a:prstGeom>
+          <a:solidFill>
+            <a:srgbClr val="FFFFFF"/>
+          </a:solidFill>
+          <a:ln w="25400">
             <a:solidFill>
-              <a:schemeClr val="tx1"/>
+              <a:srgbClr val="1A1A1A"/>
             </a:solidFill>
             <a:prstDash val="solid"/>
           </a:ln>
-        </p:spPr>
-      </p:sp>
-      <p:sp>
-        <p:nvSpPr>
-          <p:cNvPr id="4" name="chip-text"/>
-          <p:cNvSpPr txBox="1"/>
-          <p:nvPr/>
-        </p:nvSpPr>
-        <p:spPr>
-          <a:xfrm>
-            <a:off x="548640" y="292608"/>
-            <a:ext cx="1344168" cy="292608"/>
-          </a:xfrm>
-          <a:prstGeom prst="rect">
-            <a:avLst/>
-          </a:prstGeom>
-          <a:noFill/>
-          <a:ln/>
-        </p:spPr>
-        <p:txBody>
-          <a:bodyPr wrap="square" lIns="0" tIns="0" rIns="0" bIns="0" rtlCol="0" anchor="ctr"/>
-          <a:lstStyle/>
-          <a:p>
-            <a:pPr algn="ctr" indent="0" marL="0">
-              <a:buNone/>
-            </a:pPr>
-            <a:r>
-              <a:rPr lang="en-US" sz="1100" b="1" dirty="0">
-                <a:solidFill>
-                  <a:schemeClr val="accent1"/>
-                </a:solidFill>
-              </a:rPr>
-              <a:t>説明② 10分</a:t>
-            </a:r>
-            <a:endParaRPr lang="en-US" sz="1100" dirty="0"/>
-          </a:p>
-        </p:txBody>
+          <a:effectLst>
+            <a:outerShdw sx="100000" sy="100000" kx="0" ky="0" algn="bl" rotWithShape="0" blurRad="101600" dist="50800" dir="2700000">
+              <a:srgbClr val="1A1A1A">
+                <a:alpha val="100000"/>
+              </a:srgbClr>
+            </a:outerShdw>
+          </a:effectLst>
+        </p:spPr>
       </p:sp>
       <p:graphicFrame>
         <p:nvGraphicFramePr>
@@ -4624,16 +4634,16 @@
           </p:nvPr>
         </p:nvGraphicFramePr>
         <p:xfrm>
-          <a:off x="548640" y="1463040"/>
-          <a:ext cx="8046720" cy="914400"/>
+          <a:off x="502920" y="1417320"/>
+          <a:ext cx="8138160" cy="914400"/>
         </p:xfrm>
         <a:graphic>
           <a:graphicData uri="http://schemas.openxmlformats.org/drawingml/2006/table">
             <a:tbl>
               <a:tblPr/>
               <a:tblGrid>
-                <a:gridCol w="2145792"/>
-                <a:gridCol w="5900928"/>
+                <a:gridCol w="2170176"/>
+                <a:gridCol w="5967984"/>
               </a:tblGrid>
               <a:tr h="365760">
                 <a:tc>
@@ -4645,47 +4655,54 @@
                         <a:buNone/>
                       </a:pPr>
                       <a:r>
-                        <a:rPr lang="en-US" sz="1200" b="1" dirty="0">
+                        <a:rPr lang="en-US" sz="1250" b="1" dirty="0">
                           <a:solidFill>
-                            <a:srgbClr val="FFD600"/>
+                            <a:srgbClr val="FFFFFF"/>
                           </a:solidFill>
+                          <a:latin typeface="Noto Sans JP" pitchFamily="34" charset="0"/>
+                          <a:ea typeface="Noto Sans JP" pitchFamily="34" charset="-122"/>
+                          <a:cs typeface="Noto Sans JP" pitchFamily="34" charset="-120"/>
                         </a:rPr>
                         <a:t>ビュー</a:t>
                       </a:r>
-                      <a:endParaRPr lang="en-US" sz="1200" dirty="0"/>
+                      <a:endParaRPr lang="en-US" sz="1250" dirty="0">
+                        <a:latin typeface="Noto Sans JP" charset="0"/>
+                        <a:ea typeface="Noto Sans JP" charset="0"/>
+                        <a:cs typeface="Noto Sans JP" charset="0"/>
+                      </a:endParaRPr>
                     </a:p>
                   </a:txBody>
                   <a:tcPr marL="91440" marR="91440" marT="0" marB="0" anchor="ctr">
-                    <a:lnL w="9525" cap="flat" cmpd="sng" algn="ctr">
+                    <a:lnL w="12700" cap="flat" cmpd="sng" algn="ctr">
                       <a:solidFill>
-                        <a:srgbClr val="BBBBBB"/>
+                        <a:srgbClr val="1A1A1A"/>
                       </a:solidFill>
                       <a:prstDash val="solid"/>
                       <a:round/>
                       <a:headEnd type="none" w="med" len="med"/>
                       <a:tailEnd type="none" w="med" len="med"/>
                     </a:lnL>
-                    <a:lnR w="9525" cap="flat" cmpd="sng" algn="ctr">
+                    <a:lnR w="12700" cap="flat" cmpd="sng" algn="ctr">
                       <a:solidFill>
-                        <a:srgbClr val="BBBBBB"/>
+                        <a:srgbClr val="1A1A1A"/>
                       </a:solidFill>
                       <a:prstDash val="solid"/>
                       <a:round/>
                       <a:headEnd type="none" w="med" len="med"/>
                       <a:tailEnd type="none" w="med" len="med"/>
                     </a:lnR>
-                    <a:lnT w="9525" cap="flat" cmpd="sng" algn="ctr">
+                    <a:lnT w="12700" cap="flat" cmpd="sng" algn="ctr">
                       <a:solidFill>
-                        <a:srgbClr val="BBBBBB"/>
+                        <a:srgbClr val="1A1A1A"/>
                       </a:solidFill>
                       <a:prstDash val="solid"/>
                       <a:round/>
                       <a:headEnd type="none" w="med" len="med"/>
                       <a:tailEnd type="none" w="med" len="med"/>
                     </a:lnT>
-                    <a:lnB w="9525" cap="flat" cmpd="sng" algn="ctr">
+                    <a:lnB w="12700" cap="flat" cmpd="sng" algn="ctr">
                       <a:solidFill>
-                        <a:srgbClr val="BBBBBB"/>
+                        <a:srgbClr val="1A1A1A"/>
                       </a:solidFill>
                       <a:prstDash val="solid"/>
                       <a:round/>
@@ -4706,47 +4723,54 @@
                         <a:buNone/>
                       </a:pPr>
                       <a:r>
-                        <a:rPr lang="en-US" sz="1200" b="1" dirty="0">
+                        <a:rPr lang="en-US" sz="1250" b="1" dirty="0">
                           <a:solidFill>
-                            <a:srgbClr val="FFD600"/>
+                            <a:srgbClr val="FFFFFF"/>
                           </a:solidFill>
+                          <a:latin typeface="Noto Sans JP" pitchFamily="34" charset="0"/>
+                          <a:ea typeface="Noto Sans JP" pitchFamily="34" charset="-122"/>
+                          <a:cs typeface="Noto Sans JP" pitchFamily="34" charset="-120"/>
                         </a:rPr>
                         <a:t>向いている使い方</a:t>
                       </a:r>
-                      <a:endParaRPr lang="en-US" sz="1200" dirty="0"/>
+                      <a:endParaRPr lang="en-US" sz="1250" dirty="0">
+                        <a:latin typeface="Noto Sans JP" charset="0"/>
+                        <a:ea typeface="Noto Sans JP" charset="0"/>
+                        <a:cs typeface="Noto Sans JP" charset="0"/>
+                      </a:endParaRPr>
                     </a:p>
                   </a:txBody>
                   <a:tcPr marL="91440" marR="91440" marT="0" marB="0" anchor="ctr">
-                    <a:lnL w="9525" cap="flat" cmpd="sng" algn="ctr">
+                    <a:lnL w="12700" cap="flat" cmpd="sng" algn="ctr">
                       <a:solidFill>
-                        <a:srgbClr val="BBBBBB"/>
+                        <a:srgbClr val="1A1A1A"/>
                       </a:solidFill>
                       <a:prstDash val="solid"/>
                       <a:round/>
                       <a:headEnd type="none" w="med" len="med"/>
                       <a:tailEnd type="none" w="med" len="med"/>
                     </a:lnL>
-                    <a:lnR w="9525" cap="flat" cmpd="sng" algn="ctr">
+                    <a:lnR w="12700" cap="flat" cmpd="sng" algn="ctr">
                       <a:solidFill>
-                        <a:srgbClr val="BBBBBB"/>
+                        <a:srgbClr val="1A1A1A"/>
                       </a:solidFill>
                       <a:prstDash val="solid"/>
                       <a:round/>
                       <a:headEnd type="none" w="med" len="med"/>
                       <a:tailEnd type="none" w="med" len="med"/>
                     </a:lnR>
-                    <a:lnT w="9525" cap="flat" cmpd="sng" algn="ctr">
+                    <a:lnT w="12700" cap="flat" cmpd="sng" algn="ctr">
                       <a:solidFill>
-                        <a:srgbClr val="BBBBBB"/>
+                        <a:srgbClr val="1A1A1A"/>
                       </a:solidFill>
                       <a:prstDash val="solid"/>
                       <a:round/>
                       <a:headEnd type="none" w="med" len="med"/>
                       <a:tailEnd type="none" w="med" len="med"/>
                     </a:lnT>
-                    <a:lnB w="9525" cap="flat" cmpd="sng" algn="ctr">
+                    <a:lnB w="12700" cap="flat" cmpd="sng" algn="ctr">
                       <a:solidFill>
-                        <a:srgbClr val="BBBBBB"/>
+                        <a:srgbClr val="1A1A1A"/>
                       </a:solidFill>
                       <a:prstDash val="solid"/>
                       <a:round/>
@@ -4771,45 +4795,52 @@
                       <a:r>
                         <a:rPr lang="en-US" sz="1200" b="1" dirty="0">
                           <a:solidFill>
-                            <a:srgbClr val="1A1A1A"/>
+                            <a:srgbClr val="DD6420"/>
                           </a:solidFill>
+                          <a:latin typeface="Noto Sans JP" pitchFamily="34" charset="0"/>
+                          <a:ea typeface="Noto Sans JP" pitchFamily="34" charset="-122"/>
+                          <a:cs typeface="Noto Sans JP" pitchFamily="34" charset="-120"/>
                         </a:rPr>
                         <a:t>表（グリッド）</a:t>
                       </a:r>
-                      <a:endParaRPr lang="en-US" sz="1200" dirty="0"/>
+                      <a:endParaRPr lang="en-US" sz="1200" dirty="0">
+                        <a:latin typeface="Noto Sans JP" charset="0"/>
+                        <a:ea typeface="Noto Sans JP" charset="0"/>
+                        <a:cs typeface="Noto Sans JP" charset="0"/>
+                      </a:endParaRPr>
                     </a:p>
                   </a:txBody>
                   <a:tcPr marL="91440" marR="91440" marT="0" marB="0" anchor="ctr">
-                    <a:lnL w="9525" cap="flat" cmpd="sng" algn="ctr">
+                    <a:lnL w="12700" cap="flat" cmpd="sng" algn="ctr">
                       <a:solidFill>
-                        <a:srgbClr val="BBBBBB"/>
+                        <a:srgbClr val="1A1A1A"/>
                       </a:solidFill>
                       <a:prstDash val="solid"/>
                       <a:round/>
                       <a:headEnd type="none" w="med" len="med"/>
                       <a:tailEnd type="none" w="med" len="med"/>
                     </a:lnL>
-                    <a:lnR w="9525" cap="flat" cmpd="sng" algn="ctr">
+                    <a:lnR w="12700" cap="flat" cmpd="sng" algn="ctr">
                       <a:solidFill>
-                        <a:srgbClr val="BBBBBB"/>
+                        <a:srgbClr val="1A1A1A"/>
                       </a:solidFill>
                       <a:prstDash val="solid"/>
                       <a:round/>
                       <a:headEnd type="none" w="med" len="med"/>
                       <a:tailEnd type="none" w="med" len="med"/>
                     </a:lnR>
-                    <a:lnT w="9525" cap="flat" cmpd="sng" algn="ctr">
+                    <a:lnT w="12700" cap="flat" cmpd="sng" algn="ctr">
                       <a:solidFill>
-                        <a:srgbClr val="BBBBBB"/>
+                        <a:srgbClr val="1A1A1A"/>
                       </a:solidFill>
                       <a:prstDash val="solid"/>
                       <a:round/>
                       <a:headEnd type="none" w="med" len="med"/>
                       <a:tailEnd type="none" w="med" len="med"/>
                     </a:lnT>
-                    <a:lnB w="9525" cap="flat" cmpd="sng" algn="ctr">
+                    <a:lnB w="12700" cap="flat" cmpd="sng" algn="ctr">
                       <a:solidFill>
-                        <a:srgbClr val="BBBBBB"/>
+                        <a:srgbClr val="1A1A1A"/>
                       </a:solidFill>
                       <a:prstDash val="solid"/>
                       <a:round/>
@@ -4830,47 +4861,54 @@
                         <a:buNone/>
                       </a:pPr>
                       <a:r>
-                        <a:rPr lang="en-US" sz="1200" dirty="0">
+                        <a:rPr lang="en-US" sz="1200" b="1" dirty="0">
                           <a:solidFill>
                             <a:srgbClr val="1A1A1A"/>
                           </a:solidFill>
+                          <a:latin typeface="Noto Sans JP Medium" pitchFamily="34" charset="0"/>
+                          <a:ea typeface="Noto Sans JP Medium" pitchFamily="34" charset="-122"/>
+                          <a:cs typeface="Noto Sans JP Medium" pitchFamily="34" charset="-120"/>
                         </a:rPr>
                         <a:t>全体の一覧、編集</a:t>
                       </a:r>
-                      <a:endParaRPr lang="en-US" sz="1200" dirty="0"/>
+                      <a:endParaRPr lang="en-US" sz="1200" dirty="0">
+                        <a:latin typeface="Noto Sans JP Medium" charset="0"/>
+                        <a:ea typeface="Noto Sans JP Medium" charset="0"/>
+                        <a:cs typeface="Noto Sans JP Medium" charset="0"/>
+                      </a:endParaRPr>
                     </a:p>
                   </a:txBody>
                   <a:tcPr marL="91440" marR="91440" marT="0" marB="0" anchor="ctr">
-                    <a:lnL w="9525" cap="flat" cmpd="sng" algn="ctr">
+                    <a:lnL w="12700" cap="flat" cmpd="sng" algn="ctr">
                       <a:solidFill>
-                        <a:srgbClr val="BBBBBB"/>
+                        <a:srgbClr val="1A1A1A"/>
                       </a:solidFill>
                       <a:prstDash val="solid"/>
                       <a:round/>
                       <a:headEnd type="none" w="med" len="med"/>
                       <a:tailEnd type="none" w="med" len="med"/>
                     </a:lnL>
-                    <a:lnR w="9525" cap="flat" cmpd="sng" algn="ctr">
+                    <a:lnR w="12700" cap="flat" cmpd="sng" algn="ctr">
                       <a:solidFill>
-                        <a:srgbClr val="BBBBBB"/>
+                        <a:srgbClr val="1A1A1A"/>
                       </a:solidFill>
                       <a:prstDash val="solid"/>
                       <a:round/>
                       <a:headEnd type="none" w="med" len="med"/>
                       <a:tailEnd type="none" w="med" len="med"/>
                     </a:lnR>
-                    <a:lnT w="9525" cap="flat" cmpd="sng" algn="ctr">
+                    <a:lnT w="12700" cap="flat" cmpd="sng" algn="ctr">
                       <a:solidFill>
-                        <a:srgbClr val="BBBBBB"/>
+                        <a:srgbClr val="1A1A1A"/>
                       </a:solidFill>
                       <a:prstDash val="solid"/>
                       <a:round/>
                       <a:headEnd type="none" w="med" len="med"/>
                       <a:tailEnd type="none" w="med" len="med"/>
                     </a:lnT>
-                    <a:lnB w="9525" cap="flat" cmpd="sng" algn="ctr">
+                    <a:lnB w="12700" cap="flat" cmpd="sng" algn="ctr">
                       <a:solidFill>
-                        <a:srgbClr val="BBBBBB"/>
+                        <a:srgbClr val="1A1A1A"/>
                       </a:solidFill>
                       <a:prstDash val="solid"/>
                       <a:round/>
@@ -4895,169 +4933,52 @@
                       <a:r>
                         <a:rPr lang="en-US" sz="1200" b="1" dirty="0">
                           <a:solidFill>
-                            <a:srgbClr val="1A1A1A"/>
+                            <a:srgbClr val="DD6420"/>
                           </a:solidFill>
+                          <a:latin typeface="Noto Sans JP" pitchFamily="34" charset="0"/>
+                          <a:ea typeface="Noto Sans JP" pitchFamily="34" charset="-122"/>
+                          <a:cs typeface="Noto Sans JP" pitchFamily="34" charset="-120"/>
                         </a:rPr>
                         <a:t>かんばん</a:t>
                       </a:r>
-                      <a:endParaRPr lang="en-US" sz="1200" dirty="0"/>
+                      <a:endParaRPr lang="en-US" sz="1200" dirty="0">
+                        <a:latin typeface="Noto Sans JP" charset="0"/>
+                        <a:ea typeface="Noto Sans JP" charset="0"/>
+                        <a:cs typeface="Noto Sans JP" charset="0"/>
+                      </a:endParaRPr>
                     </a:p>
                   </a:txBody>
                   <a:tcPr marL="91440" marR="91440" marT="0" marB="0" anchor="ctr">
-                    <a:lnL w="9525" cap="flat" cmpd="sng" algn="ctr">
+                    <a:lnL w="12700" cap="flat" cmpd="sng" algn="ctr">
                       <a:solidFill>
-                        <a:srgbClr val="BBBBBB"/>
+                        <a:srgbClr val="1A1A1A"/>
                       </a:solidFill>
                       <a:prstDash val="solid"/>
                       <a:round/>
                       <a:headEnd type="none" w="med" len="med"/>
                       <a:tailEnd type="none" w="med" len="med"/>
                     </a:lnL>
-                    <a:lnR w="9525" cap="flat" cmpd="sng" algn="ctr">
+                    <a:lnR w="12700" cap="flat" cmpd="sng" algn="ctr">
                       <a:solidFill>
-                        <a:srgbClr val="BBBBBB"/>
+                        <a:srgbClr val="1A1A1A"/>
                       </a:solidFill>
                       <a:prstDash val="solid"/>
                       <a:round/>
                       <a:headEnd type="none" w="med" len="med"/>
                       <a:tailEnd type="none" w="med" len="med"/>
                     </a:lnR>
-                    <a:lnT w="9525" cap="flat" cmpd="sng" algn="ctr">
+                    <a:lnT w="12700" cap="flat" cmpd="sng" algn="ctr">
                       <a:solidFill>
-                        <a:srgbClr val="BBBBBB"/>
+                        <a:srgbClr val="1A1A1A"/>
                       </a:solidFill>
                       <a:prstDash val="solid"/>
                       <a:round/>
                       <a:headEnd type="none" w="med" len="med"/>
                       <a:tailEnd type="none" w="med" len="med"/>
                     </a:lnT>
-                    <a:lnB w="9525" cap="flat" cmpd="sng" algn="ctr">
+                    <a:lnB w="12700" cap="flat" cmpd="sng" algn="ctr">
                       <a:solidFill>
-                        <a:srgbClr val="BBBBBB"/>
-                      </a:solidFill>
-                      <a:prstDash val="solid"/>
-                      <a:round/>
-                      <a:headEnd type="none" w="med" len="med"/>
-                      <a:tailEnd type="none" w="med" len="med"/>
-                    </a:lnB>
-                    <a:solidFill>
-                      <a:srgbClr val="F4F4F4"/>
-                    </a:solidFill>
-                  </a:tcPr>
-                </a:tc>
-                <a:tc>
-                  <a:txBody>
-                    <a:bodyPr/>
-                    <a:lstStyle/>
-                    <a:p>
-                      <a:pPr indent="0" marL="0">
-                        <a:buNone/>
-                      </a:pPr>
-                      <a:r>
-                        <a:rPr lang="en-US" sz="1200" dirty="0">
-                          <a:solidFill>
-                            <a:srgbClr val="1A1A1A"/>
-                          </a:solidFill>
-                        </a:rPr>
-                        <a:t>ステータスごとの進み具合（受付→確定→来店済）</a:t>
-                      </a:r>
-                      <a:endParaRPr lang="en-US" sz="1200" dirty="0"/>
-                    </a:p>
-                  </a:txBody>
-                  <a:tcPr marL="91440" marR="91440" marT="0" marB="0" anchor="ctr">
-                    <a:lnL w="9525" cap="flat" cmpd="sng" algn="ctr">
-                      <a:solidFill>
-                        <a:srgbClr val="BBBBBB"/>
-                      </a:solidFill>
-                      <a:prstDash val="solid"/>
-                      <a:round/>
-                      <a:headEnd type="none" w="med" len="med"/>
-                      <a:tailEnd type="none" w="med" len="med"/>
-                    </a:lnL>
-                    <a:lnR w="9525" cap="flat" cmpd="sng" algn="ctr">
-                      <a:solidFill>
-                        <a:srgbClr val="BBBBBB"/>
-                      </a:solidFill>
-                      <a:prstDash val="solid"/>
-                      <a:round/>
-                      <a:headEnd type="none" w="med" len="med"/>
-                      <a:tailEnd type="none" w="med" len="med"/>
-                    </a:lnR>
-                    <a:lnT w="9525" cap="flat" cmpd="sng" algn="ctr">
-                      <a:solidFill>
-                        <a:srgbClr val="BBBBBB"/>
-                      </a:solidFill>
-                      <a:prstDash val="solid"/>
-                      <a:round/>
-                      <a:headEnd type="none" w="med" len="med"/>
-                      <a:tailEnd type="none" w="med" len="med"/>
-                    </a:lnT>
-                    <a:lnB w="9525" cap="flat" cmpd="sng" algn="ctr">
-                      <a:solidFill>
-                        <a:srgbClr val="BBBBBB"/>
-                      </a:solidFill>
-                      <a:prstDash val="solid"/>
-                      <a:round/>
-                      <a:headEnd type="none" w="med" len="med"/>
-                      <a:tailEnd type="none" w="med" len="med"/>
-                    </a:lnB>
-                    <a:solidFill>
-                      <a:srgbClr val="F4F4F4"/>
-                    </a:solidFill>
-                  </a:tcPr>
-                </a:tc>
-              </a:tr>
-              <a:tr h="365760">
-                <a:tc>
-                  <a:txBody>
-                    <a:bodyPr/>
-                    <a:lstStyle/>
-                    <a:p>
-                      <a:pPr indent="0" marL="0">
-                        <a:buNone/>
-                      </a:pPr>
-                      <a:r>
-                        <a:rPr lang="en-US" sz="1200" b="1" dirty="0">
-                          <a:solidFill>
-                            <a:srgbClr val="1A1A1A"/>
-                          </a:solidFill>
-                        </a:rPr>
-                        <a:t>カレンダー</a:t>
-                      </a:r>
-                      <a:endParaRPr lang="en-US" sz="1200" dirty="0"/>
-                    </a:p>
-                  </a:txBody>
-                  <a:tcPr marL="91440" marR="91440" marT="0" marB="0" anchor="ctr">
-                    <a:lnL w="9525" cap="flat" cmpd="sng" algn="ctr">
-                      <a:solidFill>
-                        <a:srgbClr val="BBBBBB"/>
-                      </a:solidFill>
-                      <a:prstDash val="solid"/>
-                      <a:round/>
-                      <a:headEnd type="none" w="med" len="med"/>
-                      <a:tailEnd type="none" w="med" len="med"/>
-                    </a:lnL>
-                    <a:lnR w="9525" cap="flat" cmpd="sng" algn="ctr">
-                      <a:solidFill>
-                        <a:srgbClr val="BBBBBB"/>
-                      </a:solidFill>
-                      <a:prstDash val="solid"/>
-                      <a:round/>
-                      <a:headEnd type="none" w="med" len="med"/>
-                      <a:tailEnd type="none" w="med" len="med"/>
-                    </a:lnR>
-                    <a:lnT w="9525" cap="flat" cmpd="sng" algn="ctr">
-                      <a:solidFill>
-                        <a:srgbClr val="BBBBBB"/>
-                      </a:solidFill>
-                      <a:prstDash val="solid"/>
-                      <a:round/>
-                      <a:headEnd type="none" w="med" len="med"/>
-                      <a:tailEnd type="none" w="med" len="med"/>
-                    </a:lnT>
-                    <a:lnB w="9525" cap="flat" cmpd="sng" algn="ctr">
-                      <a:solidFill>
-                        <a:srgbClr val="BBBBBB"/>
+                        <a:srgbClr val="1A1A1A"/>
                       </a:solidFill>
                       <a:prstDash val="solid"/>
                       <a:round/>
@@ -5078,47 +4999,54 @@
                         <a:buNone/>
                       </a:pPr>
                       <a:r>
-                        <a:rPr lang="en-US" sz="1200" dirty="0">
+                        <a:rPr lang="en-US" sz="1200" b="1" dirty="0">
                           <a:solidFill>
                             <a:srgbClr val="1A1A1A"/>
                           </a:solidFill>
+                          <a:latin typeface="Noto Sans JP Medium" pitchFamily="34" charset="0"/>
+                          <a:ea typeface="Noto Sans JP Medium" pitchFamily="34" charset="-122"/>
+                          <a:cs typeface="Noto Sans JP Medium" pitchFamily="34" charset="-120"/>
                         </a:rPr>
-                        <a:t>日付で見る（予約・締切）</a:t>
+                        <a:t>ステータスごとの進み具合（受付→確定→来店済）</a:t>
                       </a:r>
-                      <a:endParaRPr lang="en-US" sz="1200" dirty="0"/>
+                      <a:endParaRPr lang="en-US" sz="1200" dirty="0">
+                        <a:latin typeface="Noto Sans JP Medium" charset="0"/>
+                        <a:ea typeface="Noto Sans JP Medium" charset="0"/>
+                        <a:cs typeface="Noto Sans JP Medium" charset="0"/>
+                      </a:endParaRPr>
                     </a:p>
                   </a:txBody>
                   <a:tcPr marL="91440" marR="91440" marT="0" marB="0" anchor="ctr">
-                    <a:lnL w="9525" cap="flat" cmpd="sng" algn="ctr">
+                    <a:lnL w="12700" cap="flat" cmpd="sng" algn="ctr">
                       <a:solidFill>
-                        <a:srgbClr val="BBBBBB"/>
+                        <a:srgbClr val="1A1A1A"/>
                       </a:solidFill>
                       <a:prstDash val="solid"/>
                       <a:round/>
                       <a:headEnd type="none" w="med" len="med"/>
                       <a:tailEnd type="none" w="med" len="med"/>
                     </a:lnL>
-                    <a:lnR w="9525" cap="flat" cmpd="sng" algn="ctr">
+                    <a:lnR w="12700" cap="flat" cmpd="sng" algn="ctr">
                       <a:solidFill>
-                        <a:srgbClr val="BBBBBB"/>
+                        <a:srgbClr val="1A1A1A"/>
                       </a:solidFill>
                       <a:prstDash val="solid"/>
                       <a:round/>
                       <a:headEnd type="none" w="med" len="med"/>
                       <a:tailEnd type="none" w="med" len="med"/>
                     </a:lnR>
-                    <a:lnT w="9525" cap="flat" cmpd="sng" algn="ctr">
+                    <a:lnT w="12700" cap="flat" cmpd="sng" algn="ctr">
                       <a:solidFill>
-                        <a:srgbClr val="BBBBBB"/>
+                        <a:srgbClr val="1A1A1A"/>
                       </a:solidFill>
                       <a:prstDash val="solid"/>
                       <a:round/>
                       <a:headEnd type="none" w="med" len="med"/>
                       <a:tailEnd type="none" w="med" len="med"/>
                     </a:lnT>
-                    <a:lnB w="9525" cap="flat" cmpd="sng" algn="ctr">
+                    <a:lnB w="12700" cap="flat" cmpd="sng" algn="ctr">
                       <a:solidFill>
-                        <a:srgbClr val="BBBBBB"/>
+                        <a:srgbClr val="1A1A1A"/>
                       </a:solidFill>
                       <a:prstDash val="solid"/>
                       <a:round/>
@@ -5143,169 +5071,52 @@
                       <a:r>
                         <a:rPr lang="en-US" sz="1200" b="1" dirty="0">
                           <a:solidFill>
-                            <a:srgbClr val="1A1A1A"/>
+                            <a:srgbClr val="DD6420"/>
                           </a:solidFill>
+                          <a:latin typeface="Noto Sans JP" pitchFamily="34" charset="0"/>
+                          <a:ea typeface="Noto Sans JP" pitchFamily="34" charset="-122"/>
+                          <a:cs typeface="Noto Sans JP" pitchFamily="34" charset="-120"/>
                         </a:rPr>
-                        <a:t>ギャラリー</a:t>
+                        <a:t>カレンダー</a:t>
                       </a:r>
-                      <a:endParaRPr lang="en-US" sz="1200" dirty="0"/>
+                      <a:endParaRPr lang="en-US" sz="1200" dirty="0">
+                        <a:latin typeface="Noto Sans JP" charset="0"/>
+                        <a:ea typeface="Noto Sans JP" charset="0"/>
+                        <a:cs typeface="Noto Sans JP" charset="0"/>
+                      </a:endParaRPr>
                     </a:p>
                   </a:txBody>
                   <a:tcPr marL="91440" marR="91440" marT="0" marB="0" anchor="ctr">
-                    <a:lnL w="9525" cap="flat" cmpd="sng" algn="ctr">
+                    <a:lnL w="12700" cap="flat" cmpd="sng" algn="ctr">
                       <a:solidFill>
-                        <a:srgbClr val="BBBBBB"/>
+                        <a:srgbClr val="1A1A1A"/>
                       </a:solidFill>
                       <a:prstDash val="solid"/>
                       <a:round/>
                       <a:headEnd type="none" w="med" len="med"/>
                       <a:tailEnd type="none" w="med" len="med"/>
                     </a:lnL>
-                    <a:lnR w="9525" cap="flat" cmpd="sng" algn="ctr">
+                    <a:lnR w="12700" cap="flat" cmpd="sng" algn="ctr">
                       <a:solidFill>
-                        <a:srgbClr val="BBBBBB"/>
+                        <a:srgbClr val="1A1A1A"/>
                       </a:solidFill>
                       <a:prstDash val="solid"/>
                       <a:round/>
                       <a:headEnd type="none" w="med" len="med"/>
                       <a:tailEnd type="none" w="med" len="med"/>
                     </a:lnR>
-                    <a:lnT w="9525" cap="flat" cmpd="sng" algn="ctr">
+                    <a:lnT w="12700" cap="flat" cmpd="sng" algn="ctr">
                       <a:solidFill>
-                        <a:srgbClr val="BBBBBB"/>
+                        <a:srgbClr val="1A1A1A"/>
                       </a:solidFill>
                       <a:prstDash val="solid"/>
                       <a:round/>
                       <a:headEnd type="none" w="med" len="med"/>
                       <a:tailEnd type="none" w="med" len="med"/>
                     </a:lnT>
-                    <a:lnB w="9525" cap="flat" cmpd="sng" algn="ctr">
+                    <a:lnB w="12700" cap="flat" cmpd="sng" algn="ctr">
                       <a:solidFill>
-                        <a:srgbClr val="BBBBBB"/>
-                      </a:solidFill>
-                      <a:prstDash val="solid"/>
-                      <a:round/>
-                      <a:headEnd type="none" w="med" len="med"/>
-                      <a:tailEnd type="none" w="med" len="med"/>
-                    </a:lnB>
-                    <a:solidFill>
-                      <a:srgbClr val="F4F4F4"/>
-                    </a:solidFill>
-                  </a:tcPr>
-                </a:tc>
-                <a:tc>
-                  <a:txBody>
-                    <a:bodyPr/>
-                    <a:lstStyle/>
-                    <a:p>
-                      <a:pPr indent="0" marL="0">
-                        <a:buNone/>
-                      </a:pPr>
-                      <a:r>
-                        <a:rPr lang="en-US" sz="1200" dirty="0">
-                          <a:solidFill>
-                            <a:srgbClr val="1A1A1A"/>
-                          </a:solidFill>
-                        </a:rPr>
-                        <a:t>写真付きのカード（商品・物件）</a:t>
-                      </a:r>
-                      <a:endParaRPr lang="en-US" sz="1200" dirty="0"/>
-                    </a:p>
-                  </a:txBody>
-                  <a:tcPr marL="91440" marR="91440" marT="0" marB="0" anchor="ctr">
-                    <a:lnL w="9525" cap="flat" cmpd="sng" algn="ctr">
-                      <a:solidFill>
-                        <a:srgbClr val="BBBBBB"/>
-                      </a:solidFill>
-                      <a:prstDash val="solid"/>
-                      <a:round/>
-                      <a:headEnd type="none" w="med" len="med"/>
-                      <a:tailEnd type="none" w="med" len="med"/>
-                    </a:lnL>
-                    <a:lnR w="9525" cap="flat" cmpd="sng" algn="ctr">
-                      <a:solidFill>
-                        <a:srgbClr val="BBBBBB"/>
-                      </a:solidFill>
-                      <a:prstDash val="solid"/>
-                      <a:round/>
-                      <a:headEnd type="none" w="med" len="med"/>
-                      <a:tailEnd type="none" w="med" len="med"/>
-                    </a:lnR>
-                    <a:lnT w="9525" cap="flat" cmpd="sng" algn="ctr">
-                      <a:solidFill>
-                        <a:srgbClr val="BBBBBB"/>
-                      </a:solidFill>
-                      <a:prstDash val="solid"/>
-                      <a:round/>
-                      <a:headEnd type="none" w="med" len="med"/>
-                      <a:tailEnd type="none" w="med" len="med"/>
-                    </a:lnT>
-                    <a:lnB w="9525" cap="flat" cmpd="sng" algn="ctr">
-                      <a:solidFill>
-                        <a:srgbClr val="BBBBBB"/>
-                      </a:solidFill>
-                      <a:prstDash val="solid"/>
-                      <a:round/>
-                      <a:headEnd type="none" w="med" len="med"/>
-                      <a:tailEnd type="none" w="med" len="med"/>
-                    </a:lnB>
-                    <a:solidFill>
-                      <a:srgbClr val="F4F4F4"/>
-                    </a:solidFill>
-                  </a:tcPr>
-                </a:tc>
-              </a:tr>
-              <a:tr h="365760">
-                <a:tc>
-                  <a:txBody>
-                    <a:bodyPr/>
-                    <a:lstStyle/>
-                    <a:p>
-                      <a:pPr indent="0" marL="0">
-                        <a:buNone/>
-                      </a:pPr>
-                      <a:r>
-                        <a:rPr lang="en-US" sz="1200" b="1" dirty="0">
-                          <a:solidFill>
-                            <a:srgbClr val="1A1A1A"/>
-                          </a:solidFill>
-                        </a:rPr>
-                        <a:t>ガント</a:t>
-                      </a:r>
-                      <a:endParaRPr lang="en-US" sz="1200" dirty="0"/>
-                    </a:p>
-                  </a:txBody>
-                  <a:tcPr marL="91440" marR="91440" marT="0" marB="0" anchor="ctr">
-                    <a:lnL w="9525" cap="flat" cmpd="sng" algn="ctr">
-                      <a:solidFill>
-                        <a:srgbClr val="BBBBBB"/>
-                      </a:solidFill>
-                      <a:prstDash val="solid"/>
-                      <a:round/>
-                      <a:headEnd type="none" w="med" len="med"/>
-                      <a:tailEnd type="none" w="med" len="med"/>
-                    </a:lnL>
-                    <a:lnR w="9525" cap="flat" cmpd="sng" algn="ctr">
-                      <a:solidFill>
-                        <a:srgbClr val="BBBBBB"/>
-                      </a:solidFill>
-                      <a:prstDash val="solid"/>
-                      <a:round/>
-                      <a:headEnd type="none" w="med" len="med"/>
-                      <a:tailEnd type="none" w="med" len="med"/>
-                    </a:lnR>
-                    <a:lnT w="9525" cap="flat" cmpd="sng" algn="ctr">
-                      <a:solidFill>
-                        <a:srgbClr val="BBBBBB"/>
-                      </a:solidFill>
-                      <a:prstDash val="solid"/>
-                      <a:round/>
-                      <a:headEnd type="none" w="med" len="med"/>
-                      <a:tailEnd type="none" w="med" len="med"/>
-                    </a:lnT>
-                    <a:lnB w="9525" cap="flat" cmpd="sng" algn="ctr">
-                      <a:solidFill>
-                        <a:srgbClr val="BBBBBB"/>
+                        <a:srgbClr val="1A1A1A"/>
                       </a:solidFill>
                       <a:prstDash val="solid"/>
                       <a:round/>
@@ -5326,47 +5137,330 @@
                         <a:buNone/>
                       </a:pPr>
                       <a:r>
-                        <a:rPr lang="en-US" sz="1200" dirty="0">
+                        <a:rPr lang="en-US" sz="1200" b="1" dirty="0">
                           <a:solidFill>
                             <a:srgbClr val="1A1A1A"/>
                           </a:solidFill>
+                          <a:latin typeface="Noto Sans JP Medium" pitchFamily="34" charset="0"/>
+                          <a:ea typeface="Noto Sans JP Medium" pitchFamily="34" charset="-122"/>
+                          <a:cs typeface="Noto Sans JP Medium" pitchFamily="34" charset="-120"/>
                         </a:rPr>
-                        <a:t>期間のある作業・工程</a:t>
+                        <a:t>日付で見る（予約・締切）</a:t>
                       </a:r>
-                      <a:endParaRPr lang="en-US" sz="1200" dirty="0"/>
+                      <a:endParaRPr lang="en-US" sz="1200" dirty="0">
+                        <a:latin typeface="Noto Sans JP Medium" charset="0"/>
+                        <a:ea typeface="Noto Sans JP Medium" charset="0"/>
+                        <a:cs typeface="Noto Sans JP Medium" charset="0"/>
+                      </a:endParaRPr>
                     </a:p>
                   </a:txBody>
                   <a:tcPr marL="91440" marR="91440" marT="0" marB="0" anchor="ctr">
-                    <a:lnL w="9525" cap="flat" cmpd="sng" algn="ctr">
+                    <a:lnL w="12700" cap="flat" cmpd="sng" algn="ctr">
                       <a:solidFill>
-                        <a:srgbClr val="BBBBBB"/>
+                        <a:srgbClr val="1A1A1A"/>
                       </a:solidFill>
                       <a:prstDash val="solid"/>
                       <a:round/>
                       <a:headEnd type="none" w="med" len="med"/>
                       <a:tailEnd type="none" w="med" len="med"/>
                     </a:lnL>
-                    <a:lnR w="9525" cap="flat" cmpd="sng" algn="ctr">
+                    <a:lnR w="12700" cap="flat" cmpd="sng" algn="ctr">
                       <a:solidFill>
-                        <a:srgbClr val="BBBBBB"/>
+                        <a:srgbClr val="1A1A1A"/>
                       </a:solidFill>
                       <a:prstDash val="solid"/>
                       <a:round/>
                       <a:headEnd type="none" w="med" len="med"/>
                       <a:tailEnd type="none" w="med" len="med"/>
                     </a:lnR>
-                    <a:lnT w="9525" cap="flat" cmpd="sng" algn="ctr">
+                    <a:lnT w="12700" cap="flat" cmpd="sng" algn="ctr">
                       <a:solidFill>
-                        <a:srgbClr val="BBBBBB"/>
+                        <a:srgbClr val="1A1A1A"/>
                       </a:solidFill>
                       <a:prstDash val="solid"/>
                       <a:round/>
                       <a:headEnd type="none" w="med" len="med"/>
                       <a:tailEnd type="none" w="med" len="med"/>
                     </a:lnT>
-                    <a:lnB w="9525" cap="flat" cmpd="sng" algn="ctr">
+                    <a:lnB w="12700" cap="flat" cmpd="sng" algn="ctr">
                       <a:solidFill>
-                        <a:srgbClr val="BBBBBB"/>
+                        <a:srgbClr val="1A1A1A"/>
+                      </a:solidFill>
+                      <a:prstDash val="solid"/>
+                      <a:round/>
+                      <a:headEnd type="none" w="med" len="med"/>
+                      <a:tailEnd type="none" w="med" len="med"/>
+                    </a:lnB>
+                    <a:solidFill>
+                      <a:srgbClr val="FFFFFF"/>
+                    </a:solidFill>
+                  </a:tcPr>
+                </a:tc>
+              </a:tr>
+              <a:tr h="365760">
+                <a:tc>
+                  <a:txBody>
+                    <a:bodyPr/>
+                    <a:lstStyle/>
+                    <a:p>
+                      <a:pPr indent="0" marL="0">
+                        <a:buNone/>
+                      </a:pPr>
+                      <a:r>
+                        <a:rPr lang="en-US" sz="1200" b="1" dirty="0">
+                          <a:solidFill>
+                            <a:srgbClr val="DD6420"/>
+                          </a:solidFill>
+                          <a:latin typeface="Noto Sans JP" pitchFamily="34" charset="0"/>
+                          <a:ea typeface="Noto Sans JP" pitchFamily="34" charset="-122"/>
+                          <a:cs typeface="Noto Sans JP" pitchFamily="34" charset="-120"/>
+                        </a:rPr>
+                        <a:t>ギャラリー</a:t>
+                      </a:r>
+                      <a:endParaRPr lang="en-US" sz="1200" dirty="0">
+                        <a:latin typeface="Noto Sans JP" charset="0"/>
+                        <a:ea typeface="Noto Sans JP" charset="0"/>
+                        <a:cs typeface="Noto Sans JP" charset="0"/>
+                      </a:endParaRPr>
+                    </a:p>
+                  </a:txBody>
+                  <a:tcPr marL="91440" marR="91440" marT="0" marB="0" anchor="ctr">
+                    <a:lnL w="12700" cap="flat" cmpd="sng" algn="ctr">
+                      <a:solidFill>
+                        <a:srgbClr val="1A1A1A"/>
+                      </a:solidFill>
+                      <a:prstDash val="solid"/>
+                      <a:round/>
+                      <a:headEnd type="none" w="med" len="med"/>
+                      <a:tailEnd type="none" w="med" len="med"/>
+                    </a:lnL>
+                    <a:lnR w="12700" cap="flat" cmpd="sng" algn="ctr">
+                      <a:solidFill>
+                        <a:srgbClr val="1A1A1A"/>
+                      </a:solidFill>
+                      <a:prstDash val="solid"/>
+                      <a:round/>
+                      <a:headEnd type="none" w="med" len="med"/>
+                      <a:tailEnd type="none" w="med" len="med"/>
+                    </a:lnR>
+                    <a:lnT w="12700" cap="flat" cmpd="sng" algn="ctr">
+                      <a:solidFill>
+                        <a:srgbClr val="1A1A1A"/>
+                      </a:solidFill>
+                      <a:prstDash val="solid"/>
+                      <a:round/>
+                      <a:headEnd type="none" w="med" len="med"/>
+                      <a:tailEnd type="none" w="med" len="med"/>
+                    </a:lnT>
+                    <a:lnB w="12700" cap="flat" cmpd="sng" algn="ctr">
+                      <a:solidFill>
+                        <a:srgbClr val="1A1A1A"/>
+                      </a:solidFill>
+                      <a:prstDash val="solid"/>
+                      <a:round/>
+                      <a:headEnd type="none" w="med" len="med"/>
+                      <a:tailEnd type="none" w="med" len="med"/>
+                    </a:lnB>
+                    <a:solidFill>
+                      <a:srgbClr val="FFFFFF"/>
+                    </a:solidFill>
+                  </a:tcPr>
+                </a:tc>
+                <a:tc>
+                  <a:txBody>
+                    <a:bodyPr/>
+                    <a:lstStyle/>
+                    <a:p>
+                      <a:pPr indent="0" marL="0">
+                        <a:buNone/>
+                      </a:pPr>
+                      <a:r>
+                        <a:rPr lang="en-US" sz="1200" b="1" dirty="0">
+                          <a:solidFill>
+                            <a:srgbClr val="1A1A1A"/>
+                          </a:solidFill>
+                          <a:latin typeface="Noto Sans JP Medium" pitchFamily="34" charset="0"/>
+                          <a:ea typeface="Noto Sans JP Medium" pitchFamily="34" charset="-122"/>
+                          <a:cs typeface="Noto Sans JP Medium" pitchFamily="34" charset="-120"/>
+                        </a:rPr>
+                        <a:t>写真付きのカード（商品・物件）</a:t>
+                      </a:r>
+                      <a:endParaRPr lang="en-US" sz="1200" dirty="0">
+                        <a:latin typeface="Noto Sans JP Medium" charset="0"/>
+                        <a:ea typeface="Noto Sans JP Medium" charset="0"/>
+                        <a:cs typeface="Noto Sans JP Medium" charset="0"/>
+                      </a:endParaRPr>
+                    </a:p>
+                  </a:txBody>
+                  <a:tcPr marL="91440" marR="91440" marT="0" marB="0" anchor="ctr">
+                    <a:lnL w="12700" cap="flat" cmpd="sng" algn="ctr">
+                      <a:solidFill>
+                        <a:srgbClr val="1A1A1A"/>
+                      </a:solidFill>
+                      <a:prstDash val="solid"/>
+                      <a:round/>
+                      <a:headEnd type="none" w="med" len="med"/>
+                      <a:tailEnd type="none" w="med" len="med"/>
+                    </a:lnL>
+                    <a:lnR w="12700" cap="flat" cmpd="sng" algn="ctr">
+                      <a:solidFill>
+                        <a:srgbClr val="1A1A1A"/>
+                      </a:solidFill>
+                      <a:prstDash val="solid"/>
+                      <a:round/>
+                      <a:headEnd type="none" w="med" len="med"/>
+                      <a:tailEnd type="none" w="med" len="med"/>
+                    </a:lnR>
+                    <a:lnT w="12700" cap="flat" cmpd="sng" algn="ctr">
+                      <a:solidFill>
+                        <a:srgbClr val="1A1A1A"/>
+                      </a:solidFill>
+                      <a:prstDash val="solid"/>
+                      <a:round/>
+                      <a:headEnd type="none" w="med" len="med"/>
+                      <a:tailEnd type="none" w="med" len="med"/>
+                    </a:lnT>
+                    <a:lnB w="12700" cap="flat" cmpd="sng" algn="ctr">
+                      <a:solidFill>
+                        <a:srgbClr val="1A1A1A"/>
+                      </a:solidFill>
+                      <a:prstDash val="solid"/>
+                      <a:round/>
+                      <a:headEnd type="none" w="med" len="med"/>
+                      <a:tailEnd type="none" w="med" len="med"/>
+                    </a:lnB>
+                    <a:solidFill>
+                      <a:srgbClr val="FFFFFF"/>
+                    </a:solidFill>
+                  </a:tcPr>
+                </a:tc>
+              </a:tr>
+              <a:tr h="365760">
+                <a:tc>
+                  <a:txBody>
+                    <a:bodyPr/>
+                    <a:lstStyle/>
+                    <a:p>
+                      <a:pPr indent="0" marL="0">
+                        <a:buNone/>
+                      </a:pPr>
+                      <a:r>
+                        <a:rPr lang="en-US" sz="1200" b="1" dirty="0">
+                          <a:solidFill>
+                            <a:srgbClr val="DD6420"/>
+                          </a:solidFill>
+                          <a:latin typeface="Noto Sans JP" pitchFamily="34" charset="0"/>
+                          <a:ea typeface="Noto Sans JP" pitchFamily="34" charset="-122"/>
+                          <a:cs typeface="Noto Sans JP" pitchFamily="34" charset="-120"/>
+                        </a:rPr>
+                        <a:t>ガント</a:t>
+                      </a:r>
+                      <a:endParaRPr lang="en-US" sz="1200" dirty="0">
+                        <a:latin typeface="Noto Sans JP" charset="0"/>
+                        <a:ea typeface="Noto Sans JP" charset="0"/>
+                        <a:cs typeface="Noto Sans JP" charset="0"/>
+                      </a:endParaRPr>
+                    </a:p>
+                  </a:txBody>
+                  <a:tcPr marL="91440" marR="91440" marT="0" marB="0" anchor="ctr">
+                    <a:lnL w="12700" cap="flat" cmpd="sng" algn="ctr">
+                      <a:solidFill>
+                        <a:srgbClr val="1A1A1A"/>
+                      </a:solidFill>
+                      <a:prstDash val="solid"/>
+                      <a:round/>
+                      <a:headEnd type="none" w="med" len="med"/>
+                      <a:tailEnd type="none" w="med" len="med"/>
+                    </a:lnL>
+                    <a:lnR w="12700" cap="flat" cmpd="sng" algn="ctr">
+                      <a:solidFill>
+                        <a:srgbClr val="1A1A1A"/>
+                      </a:solidFill>
+                      <a:prstDash val="solid"/>
+                      <a:round/>
+                      <a:headEnd type="none" w="med" len="med"/>
+                      <a:tailEnd type="none" w="med" len="med"/>
+                    </a:lnR>
+                    <a:lnT w="12700" cap="flat" cmpd="sng" algn="ctr">
+                      <a:solidFill>
+                        <a:srgbClr val="1A1A1A"/>
+                      </a:solidFill>
+                      <a:prstDash val="solid"/>
+                      <a:round/>
+                      <a:headEnd type="none" w="med" len="med"/>
+                      <a:tailEnd type="none" w="med" len="med"/>
+                    </a:lnT>
+                    <a:lnB w="12700" cap="flat" cmpd="sng" algn="ctr">
+                      <a:solidFill>
+                        <a:srgbClr val="1A1A1A"/>
+                      </a:solidFill>
+                      <a:prstDash val="solid"/>
+                      <a:round/>
+                      <a:headEnd type="none" w="med" len="med"/>
+                      <a:tailEnd type="none" w="med" len="med"/>
+                    </a:lnB>
+                    <a:solidFill>
+                      <a:srgbClr val="FFFFFF"/>
+                    </a:solidFill>
+                  </a:tcPr>
+                </a:tc>
+                <a:tc>
+                  <a:txBody>
+                    <a:bodyPr/>
+                    <a:lstStyle/>
+                    <a:p>
+                      <a:pPr indent="0" marL="0">
+                        <a:buNone/>
+                      </a:pPr>
+                      <a:r>
+                        <a:rPr lang="en-US" sz="1200" b="1" dirty="0">
+                          <a:solidFill>
+                            <a:srgbClr val="1A1A1A"/>
+                          </a:solidFill>
+                          <a:latin typeface="Noto Sans JP Medium" pitchFamily="34" charset="0"/>
+                          <a:ea typeface="Noto Sans JP Medium" pitchFamily="34" charset="-122"/>
+                          <a:cs typeface="Noto Sans JP Medium" pitchFamily="34" charset="-120"/>
+                        </a:rPr>
+                        <a:t>期間のある作業・工程</a:t>
+                      </a:r>
+                      <a:endParaRPr lang="en-US" sz="1200" dirty="0">
+                        <a:latin typeface="Noto Sans JP Medium" charset="0"/>
+                        <a:ea typeface="Noto Sans JP Medium" charset="0"/>
+                        <a:cs typeface="Noto Sans JP Medium" charset="0"/>
+                      </a:endParaRPr>
+                    </a:p>
+                  </a:txBody>
+                  <a:tcPr marL="91440" marR="91440" marT="0" marB="0" anchor="ctr">
+                    <a:lnL w="12700" cap="flat" cmpd="sng" algn="ctr">
+                      <a:solidFill>
+                        <a:srgbClr val="1A1A1A"/>
+                      </a:solidFill>
+                      <a:prstDash val="solid"/>
+                      <a:round/>
+                      <a:headEnd type="none" w="med" len="med"/>
+                      <a:tailEnd type="none" w="med" len="med"/>
+                    </a:lnL>
+                    <a:lnR w="12700" cap="flat" cmpd="sng" algn="ctr">
+                      <a:solidFill>
+                        <a:srgbClr val="1A1A1A"/>
+                      </a:solidFill>
+                      <a:prstDash val="solid"/>
+                      <a:round/>
+                      <a:headEnd type="none" w="med" len="med"/>
+                      <a:tailEnd type="none" w="med" len="med"/>
+                    </a:lnR>
+                    <a:lnT w="12700" cap="flat" cmpd="sng" algn="ctr">
+                      <a:solidFill>
+                        <a:srgbClr val="1A1A1A"/>
+                      </a:solidFill>
+                      <a:prstDash val="solid"/>
+                      <a:round/>
+                      <a:headEnd type="none" w="med" len="med"/>
+                      <a:tailEnd type="none" w="med" len="med"/>
+                    </a:lnT>
+                    <a:lnB w="12700" cap="flat" cmpd="sng" algn="ctr">
+                      <a:solidFill>
+                        <a:srgbClr val="1A1A1A"/>
                       </a:solidFill>
                       <a:prstDash val="solid"/>
                       <a:round/>
@@ -5385,88 +5479,97 @@
       </p:graphicFrame>
       <p:sp>
         <p:nvSpPr>
-          <p:cNvPr id="7" name="foot-box"/>
-          <p:cNvSpPr/>
-          <p:nvPr/>
-        </p:nvSpPr>
-        <p:spPr>
-          <a:xfrm>
-            <a:off x="548640" y="4114800"/>
-            <a:ext cx="8046720" cy="502920"/>
-          </a:xfrm>
-          <a:prstGeom prst="roundRect">
-            <a:avLst>
-              <a:gd name="adj" fmla="val 18182"/>
-            </a:avLst>
-          </a:prstGeom>
-          <a:solidFill>
-            <a:schemeClr val="bg2"/>
-          </a:solidFill>
-          <a:ln w="12700">
+          <p:cNvPr id="7" name="Text 3"/>
+          <p:cNvSpPr txBox="1"/>
+          <p:nvPr/>
+        </p:nvSpPr>
+        <p:spPr>
+          <a:xfrm rot="-60000">
+            <a:off x="502920" y="4114800"/>
+            <a:ext cx="8138160" cy="502920"/>
+          </a:xfrm>
+          <a:prstGeom prst="rect">
+            <a:avLst/>
+          </a:prstGeom>
+          <a:solidFill>
+            <a:srgbClr val="DD6420"/>
+          </a:solidFill>
+          <a:ln w="19050">
             <a:solidFill>
-              <a:schemeClr val="bg2"/>
+              <a:srgbClr val="1A1A1A"/>
             </a:solidFill>
-            <a:prstDash val="solid"/>
           </a:ln>
-        </p:spPr>
-      </p:sp>
-      <p:pic>
-        <p:nvPicPr>
-          <p:cNvPr id="8" name="foot-icon" descr="preencoded.png">    </p:cNvPr>
-          <p:cNvPicPr>
-            <a:picLocks noChangeAspect="1"/>
-          </p:cNvPicPr>
-          <p:nvPr/>
-        </p:nvPicPr>
-        <p:blipFill>
-          <a:blip r:embed="rId1"/>
-          <a:stretch>
-            <a:fillRect/>
-          </a:stretch>
-        </p:blipFill>
-        <p:spPr>
-          <a:xfrm>
-            <a:off x="685800" y="4242816"/>
-            <a:ext cx="246888" cy="246888"/>
-          </a:xfrm>
-          <a:prstGeom prst="rect">
-            <a:avLst/>
-          </a:prstGeom>
-        </p:spPr>
-      </p:pic>
-      <p:sp>
-        <p:nvSpPr>
-          <p:cNvPr id="9" name="foot-text"/>
-          <p:cNvSpPr txBox="1"/>
-          <p:nvPr/>
-        </p:nvSpPr>
-        <p:spPr>
-          <a:xfrm>
-            <a:off x="1051560" y="4114800"/>
-            <a:ext cx="7406640" cy="502920"/>
-          </a:xfrm>
-          <a:prstGeom prst="rect">
-            <a:avLst/>
-          </a:prstGeom>
-          <a:noFill/>
-          <a:ln/>
-        </p:spPr>
-        <p:txBody>
-          <a:bodyPr wrap="square" lIns="0" tIns="0" rIns="0" bIns="0" rtlCol="0" anchor="ctr"/>
-          <a:lstStyle/>
-          <a:p>
-            <a:pPr indent="0" marL="0">
-              <a:buNone/>
-            </a:pPr>
-            <a:r>
-              <a:rPr lang="en-US" sz="1150" dirty="0">
-                <a:solidFill>
-                  <a:schemeClr val="tx1"/>
-                </a:solidFill>
-              </a:rPr>
-              <a:t>ビューごとに絞り込み・並べ替え・グループ化を保存できる。「本日の予約」「自分の担当分」など使う人ごとに作る</a:t>
-            </a:r>
-            <a:endParaRPr lang="en-US" sz="1150" dirty="0"/>
+          <a:effectLst>
+            <a:outerShdw sx="100000" sy="100000" kx="0" ky="0" algn="bl" rotWithShape="0" blurRad="101600" dist="38100" dir="2700000">
+              <a:srgbClr val="1A1A1A">
+                <a:alpha val="100000"/>
+              </a:srgbClr>
+            </a:outerShdw>
+          </a:effectLst>
+        </p:spPr>
+        <p:txBody>
+          <a:bodyPr wrap="square" lIns="0" tIns="1905" rIns="1905" bIns="0" rtlCol="0" anchor="ctr">
+            <a:normAutofit/>
+          </a:bodyPr>
+          <a:lstStyle/>
+          <a:p>
+            <a:pPr algn="ctr" indent="0" marL="0">
+              <a:buNone/>
+            </a:pPr>
+            <a:r>
+              <a:rPr lang="ja-JP" altLang="en-US" sz="1300" b="1" dirty="0">
+                <a:solidFill>
+                  <a:srgbClr val="FFFFFF"/>
+                </a:solidFill>
+                <a:latin typeface="Noto Sans JP" pitchFamily="34" charset="0"/>
+                <a:ea typeface="Noto Sans JP" pitchFamily="34" charset="-122"/>
+                <a:cs typeface="Noto Sans JP" pitchFamily="34" charset="-120"/>
+              </a:rPr>
+              <a:t>ビューごとに絞り込み・並べ替え・グループ化を保存できる。</a:t>
+            </a:r>
+            <a:pPr algn="ctr" indent="0" marL="0">
+              <a:buNone/>
+            </a:pPr>
+            <a:r>
+              <a:rPr lang="ja-JP" altLang="en-US" sz="1300" b="1" dirty="0">
+                <a:solidFill>
+                  <a:srgbClr val="FFD600"/>
+                </a:solidFill>
+                <a:latin typeface="Noto Sans JP" pitchFamily="34" charset="0"/>
+                <a:ea typeface="Noto Sans JP" pitchFamily="34" charset="-122"/>
+                <a:cs typeface="Noto Sans JP" pitchFamily="34" charset="-120"/>
+              </a:rPr>
+              <a:t>「本日の予約」</a:t>
+            </a:r>
+            <a:pPr algn="ctr" indent="0" marL="0">
+              <a:buNone/>
+            </a:pPr>
+            <a:r>
+              <a:rPr lang="ja-JP" altLang="en-US" sz="1300" b="1" dirty="0">
+                <a:solidFill>
+                  <a:srgbClr val="FFD600"/>
+                </a:solidFill>
+                <a:latin typeface="Noto Sans JP" pitchFamily="34" charset="0"/>
+                <a:ea typeface="Noto Sans JP" pitchFamily="34" charset="-122"/>
+                <a:cs typeface="Noto Sans JP" pitchFamily="34" charset="-120"/>
+              </a:rPr>
+              <a:t>「自分の担当分」</a:t>
+            </a:r>
+            <a:pPr algn="ctr" indent="0" marL="0">
+              <a:buNone/>
+            </a:pPr>
+            <a:r>
+              <a:rPr lang="ja-JP" altLang="en-US" sz="1300" b="1" dirty="0">
+                <a:solidFill>
+                  <a:srgbClr val="FFFFFF"/>
+                </a:solidFill>
+                <a:latin typeface="Noto Sans JP" pitchFamily="34" charset="0"/>
+                <a:ea typeface="Noto Sans JP" pitchFamily="34" charset="-122"/>
+                <a:cs typeface="Noto Sans JP" pitchFamily="34" charset="-120"/>
+              </a:rPr>
+              <a:t>など使う人ごとに作る</a:t>
+            </a:r>
+            <a:endParaRPr lang="ja-JP" sz="1300" dirty="0"/>
           </a:p>
         </p:txBody>
       </p:sp>
@@ -5482,8 +5585,8 @@
         </p:nvSpPr>
         <p:spPr>
           <a:xfrm>
-            <a:off x="8229600" y="4773168"/>
-            <a:ext cx="365760" cy="228600"/>
+            <a:off x="8366760" y="4754880"/>
+            <a:ext cx="365760" cy="274320"/>
           </a:xfrm>
           <a:prstGeom prst="rect">
             <a:avLst/>
@@ -5495,20 +5598,23 @@
           </a:extLst>
         </p:spPr>
         <p:txBody>
-          <a:bodyPr/>
+          <a:bodyPr anchor="ctr"/>
           <a:lstStyle>
             <a:lvl1pPr>
-              <a:defRPr sz="900">
-                <a:solidFill>
-                  <a:srgbClr val="5A6872"/>
-                </a:solidFill>
+              <a:defRPr sz="850">
+                <a:solidFill>
+                  <a:srgbClr val="FFFFFF"/>
+                </a:solidFill>
+                <a:latin typeface="Noto Sans JP"/>
+                <a:ea typeface="Noto Sans JP"/>
+                <a:cs typeface="Noto Sans JP"/>
               </a:defRPr>
             </a:lvl1pPr>
           </a:lstStyle>
           <a:p>
             <a:pPr algn="r"/>
             <a:fld id="{F7021451-1387-4CA6-816F-3879F97B5CBC}" type="slidenum">
-              <a:rPr b="0" lang="en-US"/>
+              <a:rPr b="1" lang="en-US"/>
               <a:t>5</a:t>
             </a:fld>
             <a:endParaRPr lang="en-US"/>
@@ -5543,15 +5649,58 @@
       <p:sp>
         <p:nvSpPr>
           <p:cNvPr id="2" name="Text 0"/>
-          <p:cNvSpPr/>
-          <p:nvPr>
-            <p:ph idx="100" type="title" hasCustomPrompt="1"/>
-          </p:nvPr>
-        </p:nvSpPr>
-        <p:spPr>
-          <a:xfrm>
-            <a:off x="548640" y="658368"/>
-            <a:ext cx="8046720" cy="566928"/>
+          <p:cNvSpPr txBox="1"/>
+          <p:nvPr/>
+        </p:nvSpPr>
+        <p:spPr>
+          <a:xfrm rot="-180000">
+            <a:off x="411480" y="201168"/>
+            <a:ext cx="1915668" cy="352044"/>
+          </a:xfrm>
+          <a:prstGeom prst="rect">
+            <a:avLst/>
+          </a:prstGeom>
+          <a:solidFill>
+            <a:srgbClr val="DD6420"/>
+          </a:solidFill>
+          <a:ln>
+            <a:solidFill>
+              <a:srgbClr val="DD6420"/>
+            </a:solidFill>
+          </a:ln>
+        </p:spPr>
+        <p:txBody>
+          <a:bodyPr wrap="square" lIns="0" tIns="0" rIns="0" bIns="0" rtlCol="0" anchor="ctr"/>
+          <a:lstStyle/>
+          <a:p>
+            <a:pPr algn="ctr" indent="0" marL="0">
+              <a:buNone/>
+            </a:pPr>
+            <a:r>
+              <a:rPr lang="ja-JP" altLang="en-US" sz="1100" dirty="0">
+                <a:solidFill>
+                  <a:srgbClr val="FFFFFF"/>
+                </a:solidFill>
+                <a:latin typeface="Dela Gothic One" pitchFamily="34" charset="0"/>
+                <a:ea typeface="けいふぉんと" pitchFamily="34" charset="-122"/>
+                <a:cs typeface="Dela Gothic One" pitchFamily="34" charset="-120"/>
+              </a:rPr>
+              <a:t>ハンズオン② 20分</a:t>
+            </a:r>
+            <a:endParaRPr lang="ja-JP" sz="1100" dirty="0"/>
+          </a:p>
+        </p:txBody>
+      </p:sp>
+      <p:sp>
+        <p:nvSpPr>
+          <p:cNvPr id="3" name="Text 1"/>
+          <p:cNvSpPr txBox="1"/>
+          <p:nvPr/>
+        </p:nvSpPr>
+        <p:spPr>
+          <a:xfrm>
+            <a:off x="411480" y="502920"/>
+            <a:ext cx="8321040" cy="685800"/>
           </a:xfrm>
           <a:prstGeom prst="rect">
             <a:avLst/>
@@ -5560,122 +5709,118 @@
           <a:ln/>
         </p:spPr>
         <p:txBody>
-          <a:bodyPr wrap="square" lIns="0" tIns="0" rIns="0" bIns="0" rtlCol="0" anchor="ctr"/>
-          <a:lstStyle/>
-          <a:p>
-            <a:pPr algn="l" indent="0" marL="0">
-              <a:buNone/>
-            </a:pPr>
-            <a:r>
-              <a:rPr lang="en-US" sz="2400" b="1" dirty="0">
-                <a:solidFill>
-                  <a:schemeClr val="tx1"/>
-                </a:solidFill>
+          <a:bodyPr wrap="square" lIns="0" tIns="0" rIns="0" bIns="0" rtlCol="0" anchor="ctr">
+            <a:normAutofit/>
+          </a:bodyPr>
+          <a:lstStyle/>
+          <a:p>
+            <a:pPr indent="0" marL="0">
+              <a:buNone/>
+            </a:pPr>
+            <a:r>
+              <a:rPr lang="ja-JP" altLang="en-US" sz="2600" dirty="0">
+                <a:solidFill>
+                  <a:srgbClr val="1A1A1A"/>
+                </a:solidFill>
+                <a:latin typeface="Dela Gothic One" pitchFamily="34" charset="0"/>
+                <a:ea typeface="けいふぉんと" pitchFamily="34" charset="-122"/>
+                <a:cs typeface="Dela Gothic One" pitchFamily="34" charset="-120"/>
               </a:rPr>
               <a:t>ビューとダッシュボード</a:t>
             </a:r>
-            <a:endParaRPr lang="en-US" sz="2400" dirty="0"/>
-          </a:p>
-        </p:txBody>
-      </p:sp>
-      <p:sp>
-        <p:nvSpPr>
-          <p:cNvPr id="3" name="chip"/>
+            <a:endParaRPr lang="ja-JP" sz="2600" dirty="0"/>
+          </a:p>
+        </p:txBody>
+      </p:sp>
+      <p:sp>
+        <p:nvSpPr>
+          <p:cNvPr id="4" name="card"/>
           <p:cNvSpPr/>
           <p:nvPr/>
         </p:nvSpPr>
         <p:spPr>
           <a:xfrm>
-            <a:off x="548640" y="292608"/>
-            <a:ext cx="1755648" cy="292608"/>
+            <a:off x="502920" y="1417320"/>
+            <a:ext cx="8138160" cy="509778"/>
           </a:xfrm>
           <a:prstGeom prst="roundRect">
             <a:avLst>
-              <a:gd name="adj" fmla="val 50000"/>
+              <a:gd name="adj" fmla="val 17937"/>
             </a:avLst>
           </a:prstGeom>
           <a:solidFill>
-            <a:schemeClr val="accent2"/>
-          </a:solidFill>
-          <a:ln w="12700">
-            <a:solidFill>
-              <a:schemeClr val="accent2"/>
-            </a:solidFill>
-            <a:prstDash val="solid"/>
-          </a:ln>
-        </p:spPr>
-      </p:sp>
-      <p:sp>
-        <p:nvSpPr>
-          <p:cNvPr id="4" name="chip-text"/>
-          <p:cNvSpPr txBox="1"/>
-          <p:nvPr/>
-        </p:nvSpPr>
-        <p:spPr>
-          <a:xfrm>
-            <a:off x="548640" y="292608"/>
-            <a:ext cx="1755648" cy="292608"/>
-          </a:xfrm>
-          <a:prstGeom prst="rect">
-            <a:avLst/>
-          </a:prstGeom>
-          <a:noFill/>
-          <a:ln/>
-        </p:spPr>
-        <p:txBody>
-          <a:bodyPr wrap="square" lIns="0" tIns="0" rIns="0" bIns="0" rtlCol="0" anchor="ctr"/>
-          <a:lstStyle/>
-          <a:p>
-            <a:pPr algn="ctr" indent="0" marL="0">
-              <a:buNone/>
-            </a:pPr>
-            <a:r>
-              <a:rPr lang="en-US" sz="1100" b="1" dirty="0">
-                <a:solidFill>
-                  <a:schemeClr val="bg1"/>
-                </a:solidFill>
-              </a:rPr>
-              <a:t>ハンズオン② 20分</a:t>
-            </a:r>
-            <a:endParaRPr lang="en-US" sz="1100" dirty="0"/>
-          </a:p>
-        </p:txBody>
-      </p:sp>
-      <p:sp>
-        <p:nvSpPr>
-          <p:cNvPr id="5" name="step-num"/>
-          <p:cNvSpPr/>
-          <p:nvPr/>
-        </p:nvSpPr>
-        <p:spPr>
-          <a:xfrm>
-            <a:off x="548640" y="1572768"/>
-            <a:ext cx="384048" cy="384048"/>
-          </a:xfrm>
-          <a:prstGeom prst="ellipse">
-            <a:avLst/>
-          </a:prstGeom>
-          <a:solidFill>
-            <a:schemeClr val="accent1"/>
-          </a:solidFill>
-          <a:ln w="15875">
+            <a:srgbClr val="FFFFFF"/>
+          </a:solidFill>
+          <a:ln w="25400">
             <a:solidFill>
               <a:srgbClr val="1A1A1A"/>
             </a:solidFill>
             <a:prstDash val="solid"/>
           </a:ln>
-        </p:spPr>
-      </p:sp>
-      <p:sp>
-        <p:nvSpPr>
-          <p:cNvPr id="6" name="step-num-text"/>
+          <a:effectLst>
+            <a:outerShdw sx="100000" sy="100000" kx="0" ky="0" algn="bl" rotWithShape="0" blurRad="101600" dist="38100" dir="2700000">
+              <a:srgbClr val="1A1A1A">
+                <a:alpha val="100000"/>
+              </a:srgbClr>
+            </a:outerShdw>
+          </a:effectLst>
+        </p:spPr>
+      </p:sp>
+      <p:sp>
+        <p:nvSpPr>
+          <p:cNvPr id="5" name="Text 3"/>
           <p:cNvSpPr txBox="1"/>
           <p:nvPr/>
         </p:nvSpPr>
         <p:spPr>
           <a:xfrm>
-            <a:off x="548640" y="1572768"/>
-            <a:ext cx="384048" cy="384048"/>
+            <a:off x="640080" y="1472184"/>
+            <a:ext cx="400050" cy="400050"/>
+          </a:xfrm>
+          <a:prstGeom prst="ellipse">
+            <a:avLst/>
+          </a:prstGeom>
+          <a:solidFill>
+            <a:srgbClr val="DD6420"/>
+          </a:solidFill>
+          <a:ln w="19050">
+            <a:solidFill>
+              <a:srgbClr val="1A1A1A"/>
+            </a:solidFill>
+          </a:ln>
+        </p:spPr>
+        <p:txBody>
+          <a:bodyPr wrap="square" lIns="0" tIns="0" rIns="0" bIns="0" rtlCol="0" anchor="ctr"/>
+          <a:lstStyle/>
+          <a:p>
+            <a:pPr algn="ctr" indent="0" marL="0">
+              <a:buNone/>
+            </a:pPr>
+            <a:r>
+              <a:rPr lang="ja-JP" altLang="en-US" sz="1500" dirty="0">
+                <a:solidFill>
+                  <a:srgbClr val="FFFFFF"/>
+                </a:solidFill>
+                <a:latin typeface="Dela Gothic One" pitchFamily="34" charset="0"/>
+                <a:ea typeface="けいふぉんと" pitchFamily="34" charset="-122"/>
+                <a:cs typeface="Dela Gothic One" pitchFamily="34" charset="-120"/>
+              </a:rPr>
+              <a:t>1</a:t>
+            </a:r>
+            <a:endParaRPr lang="ja-JP" sz="1500" dirty="0"/>
+          </a:p>
+        </p:txBody>
+      </p:sp>
+      <p:sp>
+        <p:nvSpPr>
+          <p:cNvPr id="6" name="step-text"/>
+          <p:cNvSpPr txBox="1"/>
+          <p:nvPr/>
+        </p:nvSpPr>
+        <p:spPr>
+          <a:xfrm>
+            <a:off x="1234440" y="1417320"/>
+            <a:ext cx="7269480" cy="509778"/>
           </a:xfrm>
           <a:prstGeom prst="rect">
             <a:avLst/>
@@ -5684,95 +5829,118 @@
           <a:ln/>
         </p:spPr>
         <p:txBody>
-          <a:bodyPr wrap="square" lIns="0" tIns="0" rIns="0" bIns="0" rtlCol="0" anchor="ctr"/>
-          <a:lstStyle/>
-          <a:p>
-            <a:pPr algn="ctr" indent="0" marL="0">
-              <a:buNone/>
-            </a:pPr>
-            <a:r>
-              <a:rPr lang="en-US" sz="1400" b="1" dirty="0">
-                <a:solidFill>
-                  <a:schemeClr val="tx1"/>
-                </a:solidFill>
-              </a:rPr>
-              <a:t>1</a:t>
-            </a:r>
-            <a:endParaRPr lang="en-US" sz="1400" dirty="0"/>
-          </a:p>
-        </p:txBody>
-      </p:sp>
-      <p:sp>
-        <p:nvSpPr>
-          <p:cNvPr id="7" name="step-text"/>
-          <p:cNvSpPr txBox="1"/>
-          <p:nvPr/>
-        </p:nvSpPr>
-        <p:spPr>
-          <a:xfrm>
-            <a:off x="1097280" y="1463040"/>
-            <a:ext cx="7498080" cy="603504"/>
-          </a:xfrm>
-          <a:prstGeom prst="rect">
-            <a:avLst/>
-          </a:prstGeom>
-          <a:noFill/>
-          <a:ln/>
-        </p:spPr>
-        <p:txBody>
-          <a:bodyPr wrap="square" lIns="0" tIns="0" rIns="0" bIns="0" rtlCol="0" anchor="ctr"/>
+          <a:bodyPr wrap="square" lIns="0" tIns="0" rIns="0" bIns="0" rtlCol="0" anchor="ctr">
+            <a:normAutofit/>
+          </a:bodyPr>
           <a:lstStyle/>
           <a:p>
             <a:pPr indent="0" marL="0">
               <a:buNone/>
             </a:pPr>
             <a:r>
-              <a:rPr lang="en-US" sz="1450" dirty="0">
-                <a:solidFill>
-                  <a:schemeClr val="tx1"/>
-                </a:solidFill>
+              <a:rPr lang="ja-JP" altLang="en-US" sz="1400" b="1" dirty="0">
+                <a:solidFill>
+                  <a:srgbClr val="1A1A1A"/>
+                </a:solidFill>
+                <a:latin typeface="Noto Sans JP" pitchFamily="34" charset="0"/>
+                <a:ea typeface="Noto Sans JP" pitchFamily="34" charset="-122"/>
+                <a:cs typeface="Noto Sans JP" pitchFamily="34" charset="-120"/>
               </a:rPr>
               <a:t>かんばんビューを作り、ステータスでグループ化する</a:t>
             </a:r>
-            <a:endParaRPr lang="en-US" sz="1450" dirty="0"/>
-          </a:p>
-        </p:txBody>
-      </p:sp>
-      <p:sp>
-        <p:nvSpPr>
-          <p:cNvPr id="8" name="step-num"/>
+            <a:endParaRPr lang="ja-JP" sz="1400" dirty="0"/>
+          </a:p>
+        </p:txBody>
+      </p:sp>
+      <p:sp>
+        <p:nvSpPr>
+          <p:cNvPr id="7" name="card"/>
           <p:cNvSpPr/>
           <p:nvPr/>
         </p:nvSpPr>
         <p:spPr>
           <a:xfrm>
-            <a:off x="548640" y="2176272"/>
-            <a:ext cx="384048" cy="384048"/>
-          </a:xfrm>
-          <a:prstGeom prst="ellipse">
-            <a:avLst/>
-          </a:prstGeom>
-          <a:solidFill>
-            <a:schemeClr val="accent1"/>
-          </a:solidFill>
-          <a:ln w="15875">
+            <a:off x="502920" y="2055114"/>
+            <a:ext cx="8138160" cy="509778"/>
+          </a:xfrm>
+          <a:prstGeom prst="roundRect">
+            <a:avLst>
+              <a:gd name="adj" fmla="val 17937"/>
+            </a:avLst>
+          </a:prstGeom>
+          <a:solidFill>
+            <a:srgbClr val="FFFFFF"/>
+          </a:solidFill>
+          <a:ln w="25400">
             <a:solidFill>
               <a:srgbClr val="1A1A1A"/>
             </a:solidFill>
             <a:prstDash val="solid"/>
           </a:ln>
-        </p:spPr>
-      </p:sp>
-      <p:sp>
-        <p:nvSpPr>
-          <p:cNvPr id="9" name="step-num-text"/>
+          <a:effectLst>
+            <a:outerShdw sx="100000" sy="100000" kx="0" ky="0" algn="bl" rotWithShape="0" blurRad="101600" dist="38100" dir="2700000">
+              <a:srgbClr val="1A1A1A">
+                <a:alpha val="100000"/>
+              </a:srgbClr>
+            </a:outerShdw>
+          </a:effectLst>
+        </p:spPr>
+      </p:sp>
+      <p:sp>
+        <p:nvSpPr>
+          <p:cNvPr id="8" name="Text 6"/>
           <p:cNvSpPr txBox="1"/>
           <p:nvPr/>
         </p:nvSpPr>
         <p:spPr>
           <a:xfrm>
-            <a:off x="548640" y="2176272"/>
-            <a:ext cx="384048" cy="384048"/>
+            <a:off x="640080" y="2109978"/>
+            <a:ext cx="400050" cy="400050"/>
+          </a:xfrm>
+          <a:prstGeom prst="ellipse">
+            <a:avLst/>
+          </a:prstGeom>
+          <a:solidFill>
+            <a:srgbClr val="DD6420"/>
+          </a:solidFill>
+          <a:ln w="19050">
+            <a:solidFill>
+              <a:srgbClr val="1A1A1A"/>
+            </a:solidFill>
+          </a:ln>
+        </p:spPr>
+        <p:txBody>
+          <a:bodyPr wrap="square" lIns="0" tIns="0" rIns="0" bIns="0" rtlCol="0" anchor="ctr"/>
+          <a:lstStyle/>
+          <a:p>
+            <a:pPr algn="ctr" indent="0" marL="0">
+              <a:buNone/>
+            </a:pPr>
+            <a:r>
+              <a:rPr lang="ja-JP" altLang="en-US" sz="1500" dirty="0">
+                <a:solidFill>
+                  <a:srgbClr val="FFFFFF"/>
+                </a:solidFill>
+                <a:latin typeface="Dela Gothic One" pitchFamily="34" charset="0"/>
+                <a:ea typeface="けいふぉんと" pitchFamily="34" charset="-122"/>
+                <a:cs typeface="Dela Gothic One" pitchFamily="34" charset="-120"/>
+              </a:rPr>
+              <a:t>2</a:t>
+            </a:r>
+            <a:endParaRPr lang="ja-JP" sz="1500" dirty="0"/>
+          </a:p>
+        </p:txBody>
+      </p:sp>
+      <p:sp>
+        <p:nvSpPr>
+          <p:cNvPr id="9" name="step-text"/>
+          <p:cNvSpPr txBox="1"/>
+          <p:nvPr/>
+        </p:nvSpPr>
+        <p:spPr>
+          <a:xfrm>
+            <a:off x="1234440" y="2055114"/>
+            <a:ext cx="7269480" cy="509778"/>
           </a:xfrm>
           <a:prstGeom prst="rect">
             <a:avLst/>
@@ -5781,95 +5949,118 @@
           <a:ln/>
         </p:spPr>
         <p:txBody>
-          <a:bodyPr wrap="square" lIns="0" tIns="0" rIns="0" bIns="0" rtlCol="0" anchor="ctr"/>
-          <a:lstStyle/>
-          <a:p>
-            <a:pPr algn="ctr" indent="0" marL="0">
-              <a:buNone/>
-            </a:pPr>
-            <a:r>
-              <a:rPr lang="en-US" sz="1400" b="1" dirty="0">
-                <a:solidFill>
-                  <a:schemeClr val="tx1"/>
-                </a:solidFill>
-              </a:rPr>
-              <a:t>2</a:t>
-            </a:r>
-            <a:endParaRPr lang="en-US" sz="1400" dirty="0"/>
-          </a:p>
-        </p:txBody>
-      </p:sp>
-      <p:sp>
-        <p:nvSpPr>
-          <p:cNvPr id="10" name="step-text"/>
-          <p:cNvSpPr txBox="1"/>
-          <p:nvPr/>
-        </p:nvSpPr>
-        <p:spPr>
-          <a:xfrm>
-            <a:off x="1097280" y="2066544"/>
-            <a:ext cx="7498080" cy="603504"/>
-          </a:xfrm>
-          <a:prstGeom prst="rect">
-            <a:avLst/>
-          </a:prstGeom>
-          <a:noFill/>
-          <a:ln/>
-        </p:spPr>
-        <p:txBody>
-          <a:bodyPr wrap="square" lIns="0" tIns="0" rIns="0" bIns="0" rtlCol="0" anchor="ctr"/>
+          <a:bodyPr wrap="square" lIns="0" tIns="0" rIns="0" bIns="0" rtlCol="0" anchor="ctr">
+            <a:normAutofit/>
+          </a:bodyPr>
           <a:lstStyle/>
           <a:p>
             <a:pPr indent="0" marL="0">
               <a:buNone/>
             </a:pPr>
             <a:r>
-              <a:rPr lang="en-US" sz="1450" dirty="0">
-                <a:solidFill>
-                  <a:schemeClr val="tx1"/>
-                </a:solidFill>
+              <a:rPr lang="ja-JP" altLang="en-US" sz="1400" b="1" dirty="0">
+                <a:solidFill>
+                  <a:srgbClr val="1A1A1A"/>
+                </a:solidFill>
+                <a:latin typeface="Noto Sans JP" pitchFamily="34" charset="0"/>
+                <a:ea typeface="Noto Sans JP" pitchFamily="34" charset="-122"/>
+                <a:cs typeface="Noto Sans JP" pitchFamily="34" charset="-120"/>
               </a:rPr>
               <a:t>「本日の予約」「今週の予約」など絞り込み済みビューを2つ作る</a:t>
             </a:r>
-            <a:endParaRPr lang="en-US" sz="1450" dirty="0"/>
-          </a:p>
-        </p:txBody>
-      </p:sp>
-      <p:sp>
-        <p:nvSpPr>
-          <p:cNvPr id="11" name="step-num"/>
+            <a:endParaRPr lang="ja-JP" sz="1400" dirty="0"/>
+          </a:p>
+        </p:txBody>
+      </p:sp>
+      <p:sp>
+        <p:nvSpPr>
+          <p:cNvPr id="10" name="card"/>
           <p:cNvSpPr/>
           <p:nvPr/>
         </p:nvSpPr>
         <p:spPr>
           <a:xfrm>
-            <a:off x="548640" y="2779776"/>
-            <a:ext cx="384048" cy="384048"/>
-          </a:xfrm>
-          <a:prstGeom prst="ellipse">
-            <a:avLst/>
-          </a:prstGeom>
-          <a:solidFill>
-            <a:schemeClr val="accent1"/>
-          </a:solidFill>
-          <a:ln w="15875">
+            <a:off x="502920" y="2692908"/>
+            <a:ext cx="8138160" cy="509778"/>
+          </a:xfrm>
+          <a:prstGeom prst="roundRect">
+            <a:avLst>
+              <a:gd name="adj" fmla="val 17937"/>
+            </a:avLst>
+          </a:prstGeom>
+          <a:solidFill>
+            <a:srgbClr val="FFFFFF"/>
+          </a:solidFill>
+          <a:ln w="25400">
             <a:solidFill>
               <a:srgbClr val="1A1A1A"/>
             </a:solidFill>
             <a:prstDash val="solid"/>
           </a:ln>
-        </p:spPr>
-      </p:sp>
-      <p:sp>
-        <p:nvSpPr>
-          <p:cNvPr id="12" name="step-num-text"/>
+          <a:effectLst>
+            <a:outerShdw sx="100000" sy="100000" kx="0" ky="0" algn="bl" rotWithShape="0" blurRad="101600" dist="38100" dir="2700000">
+              <a:srgbClr val="1A1A1A">
+                <a:alpha val="100000"/>
+              </a:srgbClr>
+            </a:outerShdw>
+          </a:effectLst>
+        </p:spPr>
+      </p:sp>
+      <p:sp>
+        <p:nvSpPr>
+          <p:cNvPr id="11" name="Text 9"/>
           <p:cNvSpPr txBox="1"/>
           <p:nvPr/>
         </p:nvSpPr>
         <p:spPr>
           <a:xfrm>
-            <a:off x="548640" y="2779776"/>
-            <a:ext cx="384048" cy="384048"/>
+            <a:off x="640080" y="2747772"/>
+            <a:ext cx="400050" cy="400050"/>
+          </a:xfrm>
+          <a:prstGeom prst="ellipse">
+            <a:avLst/>
+          </a:prstGeom>
+          <a:solidFill>
+            <a:srgbClr val="DD6420"/>
+          </a:solidFill>
+          <a:ln w="19050">
+            <a:solidFill>
+              <a:srgbClr val="1A1A1A"/>
+            </a:solidFill>
+          </a:ln>
+        </p:spPr>
+        <p:txBody>
+          <a:bodyPr wrap="square" lIns="0" tIns="0" rIns="0" bIns="0" rtlCol="0" anchor="ctr"/>
+          <a:lstStyle/>
+          <a:p>
+            <a:pPr algn="ctr" indent="0" marL="0">
+              <a:buNone/>
+            </a:pPr>
+            <a:r>
+              <a:rPr lang="ja-JP" altLang="en-US" sz="1500" dirty="0">
+                <a:solidFill>
+                  <a:srgbClr val="FFFFFF"/>
+                </a:solidFill>
+                <a:latin typeface="Dela Gothic One" pitchFamily="34" charset="0"/>
+                <a:ea typeface="けいふぉんと" pitchFamily="34" charset="-122"/>
+                <a:cs typeface="Dela Gothic One" pitchFamily="34" charset="-120"/>
+              </a:rPr>
+              <a:t>3</a:t>
+            </a:r>
+            <a:endParaRPr lang="ja-JP" sz="1500" dirty="0"/>
+          </a:p>
+        </p:txBody>
+      </p:sp>
+      <p:sp>
+        <p:nvSpPr>
+          <p:cNvPr id="12" name="step-text"/>
+          <p:cNvSpPr txBox="1"/>
+          <p:nvPr/>
+        </p:nvSpPr>
+        <p:spPr>
+          <a:xfrm>
+            <a:off x="1234440" y="2692908"/>
+            <a:ext cx="7269480" cy="509778"/>
           </a:xfrm>
           <a:prstGeom prst="rect">
             <a:avLst/>
@@ -5878,95 +6069,118 @@
           <a:ln/>
         </p:spPr>
         <p:txBody>
-          <a:bodyPr wrap="square" lIns="0" tIns="0" rIns="0" bIns="0" rtlCol="0" anchor="ctr"/>
-          <a:lstStyle/>
-          <a:p>
-            <a:pPr algn="ctr" indent="0" marL="0">
-              <a:buNone/>
-            </a:pPr>
-            <a:r>
-              <a:rPr lang="en-US" sz="1400" b="1" dirty="0">
-                <a:solidFill>
-                  <a:schemeClr val="tx1"/>
-                </a:solidFill>
-              </a:rPr>
-              <a:t>3</a:t>
-            </a:r>
-            <a:endParaRPr lang="en-US" sz="1400" dirty="0"/>
-          </a:p>
-        </p:txBody>
-      </p:sp>
-      <p:sp>
-        <p:nvSpPr>
-          <p:cNvPr id="13" name="step-text"/>
-          <p:cNvSpPr txBox="1"/>
-          <p:nvPr/>
-        </p:nvSpPr>
-        <p:spPr>
-          <a:xfrm>
-            <a:off x="1097280" y="2670048"/>
-            <a:ext cx="7498080" cy="603504"/>
-          </a:xfrm>
-          <a:prstGeom prst="rect">
-            <a:avLst/>
-          </a:prstGeom>
-          <a:noFill/>
-          <a:ln/>
-        </p:spPr>
-        <p:txBody>
-          <a:bodyPr wrap="square" lIns="0" tIns="0" rIns="0" bIns="0" rtlCol="0" anchor="ctr"/>
+          <a:bodyPr wrap="square" lIns="0" tIns="0" rIns="0" bIns="0" rtlCol="0" anchor="ctr">
+            <a:normAutofit/>
+          </a:bodyPr>
           <a:lstStyle/>
           <a:p>
             <a:pPr indent="0" marL="0">
               <a:buNone/>
             </a:pPr>
             <a:r>
-              <a:rPr lang="en-US" sz="1450" dirty="0">
-                <a:solidFill>
-                  <a:schemeClr val="tx1"/>
-                </a:solidFill>
+              <a:rPr lang="ja-JP" altLang="en-US" sz="1400" b="1" dirty="0">
+                <a:solidFill>
+                  <a:srgbClr val="1A1A1A"/>
+                </a:solidFill>
+                <a:latin typeface="Noto Sans JP" pitchFamily="34" charset="0"/>
+                <a:ea typeface="Noto Sans JP" pitchFamily="34" charset="-122"/>
+                <a:cs typeface="Noto Sans JP" pitchFamily="34" charset="-120"/>
               </a:rPr>
               <a:t>ダッシュボードに「今月の件数」「ステータス別」「受付経路別」を置く</a:t>
             </a:r>
-            <a:endParaRPr lang="en-US" sz="1450" dirty="0"/>
-          </a:p>
-        </p:txBody>
-      </p:sp>
-      <p:sp>
-        <p:nvSpPr>
-          <p:cNvPr id="14" name="step-num"/>
+            <a:endParaRPr lang="ja-JP" sz="1400" dirty="0"/>
+          </a:p>
+        </p:txBody>
+      </p:sp>
+      <p:sp>
+        <p:nvSpPr>
+          <p:cNvPr id="13" name="card"/>
           <p:cNvSpPr/>
           <p:nvPr/>
         </p:nvSpPr>
         <p:spPr>
           <a:xfrm>
-            <a:off x="548640" y="3383280"/>
-            <a:ext cx="384048" cy="384048"/>
-          </a:xfrm>
-          <a:prstGeom prst="ellipse">
-            <a:avLst/>
-          </a:prstGeom>
-          <a:solidFill>
-            <a:schemeClr val="accent1"/>
-          </a:solidFill>
-          <a:ln w="15875">
+            <a:off x="502920" y="3330702"/>
+            <a:ext cx="8138160" cy="509778"/>
+          </a:xfrm>
+          <a:prstGeom prst="roundRect">
+            <a:avLst>
+              <a:gd name="adj" fmla="val 17937"/>
+            </a:avLst>
+          </a:prstGeom>
+          <a:solidFill>
+            <a:srgbClr val="FFFFFF"/>
+          </a:solidFill>
+          <a:ln w="25400">
             <a:solidFill>
               <a:srgbClr val="1A1A1A"/>
             </a:solidFill>
             <a:prstDash val="solid"/>
           </a:ln>
-        </p:spPr>
-      </p:sp>
-      <p:sp>
-        <p:nvSpPr>
-          <p:cNvPr id="15" name="step-num-text"/>
+          <a:effectLst>
+            <a:outerShdw sx="100000" sy="100000" kx="0" ky="0" algn="bl" rotWithShape="0" blurRad="101600" dist="38100" dir="2700000">
+              <a:srgbClr val="1A1A1A">
+                <a:alpha val="100000"/>
+              </a:srgbClr>
+            </a:outerShdw>
+          </a:effectLst>
+        </p:spPr>
+      </p:sp>
+      <p:sp>
+        <p:nvSpPr>
+          <p:cNvPr id="14" name="Text 12"/>
           <p:cNvSpPr txBox="1"/>
           <p:nvPr/>
         </p:nvSpPr>
         <p:spPr>
           <a:xfrm>
-            <a:off x="548640" y="3383280"/>
-            <a:ext cx="384048" cy="384048"/>
+            <a:off x="640080" y="3385566"/>
+            <a:ext cx="400050" cy="400050"/>
+          </a:xfrm>
+          <a:prstGeom prst="ellipse">
+            <a:avLst/>
+          </a:prstGeom>
+          <a:solidFill>
+            <a:srgbClr val="DD6420"/>
+          </a:solidFill>
+          <a:ln w="19050">
+            <a:solidFill>
+              <a:srgbClr val="1A1A1A"/>
+            </a:solidFill>
+          </a:ln>
+        </p:spPr>
+        <p:txBody>
+          <a:bodyPr wrap="square" lIns="0" tIns="0" rIns="0" bIns="0" rtlCol="0" anchor="ctr"/>
+          <a:lstStyle/>
+          <a:p>
+            <a:pPr algn="ctr" indent="0" marL="0">
+              <a:buNone/>
+            </a:pPr>
+            <a:r>
+              <a:rPr lang="ja-JP" altLang="en-US" sz="1500" dirty="0">
+                <a:solidFill>
+                  <a:srgbClr val="FFFFFF"/>
+                </a:solidFill>
+                <a:latin typeface="Dela Gothic One" pitchFamily="34" charset="0"/>
+                <a:ea typeface="けいふぉんと" pitchFamily="34" charset="-122"/>
+                <a:cs typeface="Dela Gothic One" pitchFamily="34" charset="-120"/>
+              </a:rPr>
+              <a:t>4</a:t>
+            </a:r>
+            <a:endParaRPr lang="ja-JP" sz="1500" dirty="0"/>
+          </a:p>
+        </p:txBody>
+      </p:sp>
+      <p:sp>
+        <p:nvSpPr>
+          <p:cNvPr id="15" name="step-text"/>
+          <p:cNvSpPr txBox="1"/>
+          <p:nvPr/>
+        </p:nvSpPr>
+        <p:spPr>
+          <a:xfrm>
+            <a:off x="1234440" y="3330702"/>
+            <a:ext cx="7269480" cy="509778"/>
           </a:xfrm>
           <a:prstGeom prst="rect">
             <a:avLst/>
@@ -5975,144 +6189,80 @@
           <a:ln/>
         </p:spPr>
         <p:txBody>
-          <a:bodyPr wrap="square" lIns="0" tIns="0" rIns="0" bIns="0" rtlCol="0" anchor="ctr"/>
+          <a:bodyPr wrap="square" lIns="0" tIns="0" rIns="0" bIns="0" rtlCol="0" anchor="ctr">
+            <a:normAutofit/>
+          </a:bodyPr>
+          <a:lstStyle/>
+          <a:p>
+            <a:pPr indent="0" marL="0">
+              <a:buNone/>
+            </a:pPr>
+            <a:r>
+              <a:rPr lang="ja-JP" altLang="en-US" sz="1400" b="1" dirty="0">
+                <a:solidFill>
+                  <a:srgbClr val="1A1A1A"/>
+                </a:solidFill>
+                <a:latin typeface="Noto Sans JP" pitchFamily="34" charset="0"/>
+                <a:ea typeface="Noto Sans JP" pitchFamily="34" charset="-122"/>
+                <a:cs typeface="Noto Sans JP" pitchFamily="34" charset="-120"/>
+              </a:rPr>
+              <a:t>使い方をWiki「03 操作マニュアル」に1ページ1操作で書く</a:t>
+            </a:r>
+            <a:endParaRPr lang="ja-JP" sz="1400" dirty="0"/>
+          </a:p>
+        </p:txBody>
+      </p:sp>
+      <p:sp>
+        <p:nvSpPr>
+          <p:cNvPr id="16" name="Text 14"/>
+          <p:cNvSpPr txBox="1"/>
+          <p:nvPr/>
+        </p:nvSpPr>
+        <p:spPr>
+          <a:xfrm rot="-60000">
+            <a:off x="502920" y="4005072"/>
+            <a:ext cx="8138160" cy="502920"/>
+          </a:xfrm>
+          <a:prstGeom prst="rect">
+            <a:avLst/>
+          </a:prstGeom>
+          <a:solidFill>
+            <a:srgbClr val="DD6420"/>
+          </a:solidFill>
+          <a:ln w="19050">
+            <a:solidFill>
+              <a:srgbClr val="1A1A1A"/>
+            </a:solidFill>
+          </a:ln>
+          <a:effectLst>
+            <a:outerShdw sx="100000" sy="100000" kx="0" ky="0" algn="bl" rotWithShape="0" blurRad="101600" dist="38100" dir="2700000">
+              <a:srgbClr val="1A1A1A">
+                <a:alpha val="100000"/>
+              </a:srgbClr>
+            </a:outerShdw>
+          </a:effectLst>
+        </p:spPr>
+        <p:txBody>
+          <a:bodyPr wrap="square" lIns="0" tIns="1905" rIns="1905" bIns="0" rtlCol="0" anchor="ctr">
+            <a:normAutofit/>
+          </a:bodyPr>
           <a:lstStyle/>
           <a:p>
             <a:pPr algn="ctr" indent="0" marL="0">
               <a:buNone/>
             </a:pPr>
             <a:r>
-              <a:rPr lang="en-US" sz="1400" b="1" dirty="0">
-                <a:solidFill>
-                  <a:schemeClr val="tx1"/>
-                </a:solidFill>
-              </a:rPr>
-              <a:t>4</a:t>
-            </a:r>
-            <a:endParaRPr lang="en-US" sz="1400" dirty="0"/>
-          </a:p>
-        </p:txBody>
-      </p:sp>
-      <p:sp>
-        <p:nvSpPr>
-          <p:cNvPr id="16" name="step-text"/>
-          <p:cNvSpPr txBox="1"/>
-          <p:nvPr/>
-        </p:nvSpPr>
-        <p:spPr>
-          <a:xfrm>
-            <a:off x="1097280" y="3273552"/>
-            <a:ext cx="7498080" cy="603504"/>
-          </a:xfrm>
-          <a:prstGeom prst="rect">
-            <a:avLst/>
-          </a:prstGeom>
-          <a:noFill/>
-          <a:ln/>
-        </p:spPr>
-        <p:txBody>
-          <a:bodyPr wrap="square" lIns="0" tIns="0" rIns="0" bIns="0" rtlCol="0" anchor="ctr"/>
-          <a:lstStyle/>
-          <a:p>
-            <a:pPr indent="0" marL="0">
-              <a:buNone/>
-            </a:pPr>
-            <a:r>
-              <a:rPr lang="en-US" sz="1450" dirty="0">
-                <a:solidFill>
-                  <a:schemeClr val="tx1"/>
-                </a:solidFill>
-              </a:rPr>
-              <a:t>使い方をWiki「03 操作マニュアル」に1ページ1操作で書く</a:t>
-            </a:r>
-            <a:endParaRPr lang="en-US" sz="1450" dirty="0"/>
-          </a:p>
-        </p:txBody>
-      </p:sp>
-      <p:sp>
-        <p:nvSpPr>
-          <p:cNvPr id="17" name="foot-box"/>
-          <p:cNvSpPr/>
-          <p:nvPr/>
-        </p:nvSpPr>
-        <p:spPr>
-          <a:xfrm>
-            <a:off x="548640" y="3977640"/>
-            <a:ext cx="8046720" cy="502920"/>
-          </a:xfrm>
-          <a:prstGeom prst="roundRect">
-            <a:avLst>
-              <a:gd name="adj" fmla="val 18182"/>
-            </a:avLst>
-          </a:prstGeom>
-          <a:solidFill>
-            <a:schemeClr val="bg2"/>
-          </a:solidFill>
-          <a:ln w="12700">
-            <a:solidFill>
-              <a:schemeClr val="bg2"/>
-            </a:solidFill>
-            <a:prstDash val="solid"/>
-          </a:ln>
-        </p:spPr>
-      </p:sp>
-      <p:pic>
-        <p:nvPicPr>
-          <p:cNvPr id="18" name="foot-icon" descr="preencoded.png">    </p:cNvPr>
-          <p:cNvPicPr>
-            <a:picLocks noChangeAspect="1"/>
-          </p:cNvPicPr>
-          <p:nvPr/>
-        </p:nvPicPr>
-        <p:blipFill>
-          <a:blip r:embed="rId1"/>
-          <a:stretch>
-            <a:fillRect/>
-          </a:stretch>
-        </p:blipFill>
-        <p:spPr>
-          <a:xfrm>
-            <a:off x="685800" y="4105656"/>
-            <a:ext cx="246888" cy="246888"/>
-          </a:xfrm>
-          <a:prstGeom prst="rect">
-            <a:avLst/>
-          </a:prstGeom>
-        </p:spPr>
-      </p:pic>
-      <p:sp>
-        <p:nvSpPr>
-          <p:cNvPr id="19" name="foot-text"/>
-          <p:cNvSpPr txBox="1"/>
-          <p:nvPr/>
-        </p:nvSpPr>
-        <p:spPr>
-          <a:xfrm>
-            <a:off x="1051560" y="3977640"/>
-            <a:ext cx="7406640" cy="502920"/>
-          </a:xfrm>
-          <a:prstGeom prst="rect">
-            <a:avLst/>
-          </a:prstGeom>
-          <a:noFill/>
-          <a:ln/>
-        </p:spPr>
-        <p:txBody>
-          <a:bodyPr wrap="square" lIns="0" tIns="0" rIns="0" bIns="0" rtlCol="0" anchor="ctr"/>
-          <a:lstStyle/>
-          <a:p>
-            <a:pPr indent="0" marL="0">
-              <a:buNone/>
-            </a:pPr>
-            <a:r>
-              <a:rPr lang="en-US" sz="1150" dirty="0">
-                <a:solidFill>
-                  <a:schemeClr val="tx1"/>
-                </a:solidFill>
+              <a:rPr lang="ja-JP" altLang="en-US" sz="1300" b="1" dirty="0">
+                <a:solidFill>
+                  <a:srgbClr val="FFFFFF"/>
+                </a:solidFill>
+                <a:latin typeface="Noto Sans JP" pitchFamily="34" charset="0"/>
+                <a:ea typeface="Noto Sans JP" pitchFamily="34" charset="-122"/>
+                <a:cs typeface="Noto Sans JP" pitchFamily="34" charset="-120"/>
               </a:rPr>
               <a:t>マニュアルはAIに下書きさせてよい（プロンプト集 P-04）</a:t>
             </a:r>
-            <a:endParaRPr lang="en-US" sz="1150" dirty="0"/>
+            <a:endParaRPr lang="ja-JP" sz="1300" dirty="0"/>
           </a:p>
         </p:txBody>
       </p:sp>
@@ -6128,8 +6278,8 @@
         </p:nvSpPr>
         <p:spPr>
           <a:xfrm>
-            <a:off x="8229600" y="4773168"/>
-            <a:ext cx="365760" cy="228600"/>
+            <a:off x="8366760" y="4754880"/>
+            <a:ext cx="365760" cy="274320"/>
           </a:xfrm>
           <a:prstGeom prst="rect">
             <a:avLst/>
@@ -6141,20 +6291,23 @@
           </a:extLst>
         </p:spPr>
         <p:txBody>
-          <a:bodyPr/>
+          <a:bodyPr anchor="ctr"/>
           <a:lstStyle>
             <a:lvl1pPr>
-              <a:defRPr sz="900">
-                <a:solidFill>
-                  <a:srgbClr val="5A6872"/>
-                </a:solidFill>
+              <a:defRPr sz="850">
+                <a:solidFill>
+                  <a:srgbClr val="FFFFFF"/>
+                </a:solidFill>
+                <a:latin typeface="Noto Sans JP"/>
+                <a:ea typeface="Noto Sans JP"/>
+                <a:cs typeface="Noto Sans JP"/>
               </a:defRPr>
             </a:lvl1pPr>
           </a:lstStyle>
           <a:p>
             <a:pPr algn="r"/>
             <a:fld id="{F7021451-1387-4CA6-816F-3879F97B5CBC}" type="slidenum">
-              <a:rPr b="0" lang="en-US"/>
+              <a:rPr b="1" lang="en-US"/>
               <a:t>6</a:t>
             </a:fld>
             <a:endParaRPr lang="en-US"/>
@@ -6189,15 +6342,58 @@
       <p:sp>
         <p:nvSpPr>
           <p:cNvPr id="2" name="Text 0"/>
-          <p:cNvSpPr/>
-          <p:nvPr>
-            <p:ph idx="100" type="title" hasCustomPrompt="1"/>
-          </p:nvPr>
-        </p:nvSpPr>
-        <p:spPr>
-          <a:xfrm>
-            <a:off x="548640" y="658368"/>
-            <a:ext cx="8046720" cy="566928"/>
+          <p:cNvSpPr txBox="1"/>
+          <p:nvPr/>
+        </p:nvSpPr>
+        <p:spPr>
+          <a:xfrm rot="-180000">
+            <a:off x="411480" y="201168"/>
+            <a:ext cx="894740" cy="352044"/>
+          </a:xfrm>
+          <a:prstGeom prst="rect">
+            <a:avLst/>
+          </a:prstGeom>
+          <a:solidFill>
+            <a:srgbClr val="1A1A1A"/>
+          </a:solidFill>
+          <a:ln>
+            <a:solidFill>
+              <a:srgbClr val="1A1A1A"/>
+            </a:solidFill>
+          </a:ln>
+        </p:spPr>
+        <p:txBody>
+          <a:bodyPr wrap="square" lIns="0" tIns="0" rIns="0" bIns="0" rtlCol="0" anchor="ctr"/>
+          <a:lstStyle/>
+          <a:p>
+            <a:pPr algn="ctr" indent="0" marL="0">
+              <a:buNone/>
+            </a:pPr>
+            <a:r>
+              <a:rPr lang="ja-JP" altLang="en-US" sz="1100" dirty="0">
+                <a:solidFill>
+                  <a:srgbClr val="FFFFFF"/>
+                </a:solidFill>
+                <a:latin typeface="Dela Gothic One" pitchFamily="34" charset="0"/>
+                <a:ea typeface="けいふぉんと" pitchFamily="34" charset="-122"/>
+                <a:cs typeface="Dela Gothic One" pitchFamily="34" charset="-120"/>
+              </a:rPr>
+              <a:t>まとめ</a:t>
+            </a:r>
+            <a:endParaRPr lang="ja-JP" sz="1100" dirty="0"/>
+          </a:p>
+        </p:txBody>
+      </p:sp>
+      <p:sp>
+        <p:nvSpPr>
+          <p:cNvPr id="3" name="Text 1"/>
+          <p:cNvSpPr txBox="1"/>
+          <p:nvPr/>
+        </p:nvSpPr>
+        <p:spPr>
+          <a:xfrm>
+            <a:off x="411480" y="502920"/>
+            <a:ext cx="8321040" cy="685800"/>
           </a:xfrm>
           <a:prstGeom prst="rect">
             <a:avLst/>
@@ -6206,105 +6402,79 @@
           <a:ln/>
         </p:spPr>
         <p:txBody>
-          <a:bodyPr wrap="square" lIns="0" tIns="0" rIns="0" bIns="0" rtlCol="0" anchor="ctr"/>
-          <a:lstStyle/>
-          <a:p>
-            <a:pPr algn="l" indent="0" marL="0">
-              <a:buNone/>
-            </a:pPr>
-            <a:r>
-              <a:rPr lang="en-US" sz="2400" b="1" dirty="0">
-                <a:solidFill>
-                  <a:schemeClr val="tx1"/>
-                </a:solidFill>
+          <a:bodyPr wrap="square" lIns="0" tIns="0" rIns="0" bIns="0" rtlCol="0" anchor="ctr">
+            <a:normAutofit/>
+          </a:bodyPr>
+          <a:lstStyle/>
+          <a:p>
+            <a:pPr indent="0" marL="0">
+              <a:buNone/>
+            </a:pPr>
+            <a:r>
+              <a:rPr lang="ja-JP" altLang="en-US" sz="2600" dirty="0">
+                <a:solidFill>
+                  <a:srgbClr val="1A1A1A"/>
+                </a:solidFill>
+                <a:latin typeface="Dela Gothic One" pitchFamily="34" charset="0"/>
+                <a:ea typeface="けいふぉんと" pitchFamily="34" charset="-122"/>
+                <a:cs typeface="Dela Gothic One" pitchFamily="34" charset="-120"/>
               </a:rPr>
               <a:t>宿題と、今日のチェック</a:t>
             </a:r>
-            <a:endParaRPr lang="en-US" sz="2400" dirty="0"/>
-          </a:p>
-        </p:txBody>
-      </p:sp>
-      <p:sp>
-        <p:nvSpPr>
-          <p:cNvPr id="3" name="chip"/>
+            <a:endParaRPr lang="ja-JP" sz="2600" dirty="0"/>
+          </a:p>
+        </p:txBody>
+      </p:sp>
+      <p:sp>
+        <p:nvSpPr>
+          <p:cNvPr id="4" name="card"/>
           <p:cNvSpPr/>
           <p:nvPr/>
         </p:nvSpPr>
         <p:spPr>
           <a:xfrm>
-            <a:off x="548640" y="292608"/>
-            <a:ext cx="795528" cy="292608"/>
+            <a:off x="502920" y="1417320"/>
+            <a:ext cx="3931920" cy="3108960"/>
           </a:xfrm>
           <a:prstGeom prst="roundRect">
             <a:avLst>
-              <a:gd name="adj" fmla="val 50000"/>
+              <a:gd name="adj" fmla="val 2941"/>
             </a:avLst>
           </a:prstGeom>
           <a:solidFill>
-            <a:schemeClr val="tx1"/>
-          </a:solidFill>
-          <a:ln w="12700">
+            <a:srgbClr val="FFFFFF"/>
+          </a:solidFill>
+          <a:ln w="25400">
             <a:solidFill>
-              <a:schemeClr val="tx1"/>
+              <a:srgbClr val="1A1A1A"/>
             </a:solidFill>
             <a:prstDash val="solid"/>
           </a:ln>
-        </p:spPr>
-      </p:sp>
-      <p:sp>
-        <p:nvSpPr>
-          <p:cNvPr id="4" name="chip-text"/>
-          <p:cNvSpPr txBox="1"/>
-          <p:nvPr/>
-        </p:nvSpPr>
-        <p:spPr>
-          <a:xfrm>
-            <a:off x="548640" y="292608"/>
-            <a:ext cx="795528" cy="292608"/>
-          </a:xfrm>
-          <a:prstGeom prst="rect">
-            <a:avLst/>
-          </a:prstGeom>
-          <a:noFill/>
-          <a:ln/>
-        </p:spPr>
-        <p:txBody>
-          <a:bodyPr wrap="square" lIns="0" tIns="0" rIns="0" bIns="0" rtlCol="0" anchor="ctr"/>
-          <a:lstStyle/>
-          <a:p>
-            <a:pPr algn="ctr" indent="0" marL="0">
-              <a:buNone/>
-            </a:pPr>
-            <a:r>
-              <a:rPr lang="en-US" sz="1100" b="1" dirty="0">
-                <a:solidFill>
-                  <a:schemeClr val="accent1"/>
-                </a:solidFill>
-              </a:rPr>
-              <a:t>まとめ</a:t>
-            </a:r>
-            <a:endParaRPr lang="en-US" sz="1100" dirty="0"/>
-          </a:p>
-        </p:txBody>
-      </p:sp>
-      <p:sp>
-        <p:nvSpPr>
-          <p:cNvPr id="5" name="card"/>
+          <a:effectLst>
+            <a:outerShdw sx="100000" sy="100000" kx="0" ky="0" algn="bl" rotWithShape="0" blurRad="101600" dist="50800" dir="2700000">
+              <a:srgbClr val="1A1A1A">
+                <a:alpha val="100000"/>
+              </a:srgbClr>
+            </a:outerShdw>
+          </a:effectLst>
+        </p:spPr>
+      </p:sp>
+      <p:sp>
+        <p:nvSpPr>
+          <p:cNvPr id="5" name="icon-circle"/>
           <p:cNvSpPr/>
           <p:nvPr/>
         </p:nvSpPr>
         <p:spPr>
           <a:xfrm>
-            <a:off x="548640" y="1463040"/>
-            <a:ext cx="3886200" cy="3017520"/>
-          </a:xfrm>
-          <a:prstGeom prst="roundRect">
-            <a:avLst>
-              <a:gd name="adj" fmla="val 3636"/>
-            </a:avLst>
-          </a:prstGeom>
-          <a:solidFill>
-            <a:schemeClr val="bg2"/>
+            <a:off x="704088" y="1600200"/>
+            <a:ext cx="457200" cy="457200"/>
+          </a:xfrm>
+          <a:prstGeom prst="ellipse">
+            <a:avLst/>
+          </a:prstGeom>
+          <a:solidFill>
+            <a:srgbClr val="DD6420"/>
           </a:solidFill>
           <a:ln w="19050">
             <a:solidFill>
@@ -6312,43 +6482,11 @@
             </a:solidFill>
             <a:prstDash val="solid"/>
           </a:ln>
-          <a:effectLst>
-            <a:outerShdw sx="100000" sy="100000" kx="0" ky="0" algn="bl" rotWithShape="0" blurRad="101600" dist="38100" dir="2700000">
-              <a:srgbClr val="000000">
-                <a:alpha val="18000"/>
-              </a:srgbClr>
-            </a:outerShdw>
-          </a:effectLst>
-        </p:spPr>
-      </p:sp>
-      <p:sp>
-        <p:nvSpPr>
-          <p:cNvPr id="6" name="icon-circle"/>
-          <p:cNvSpPr/>
-          <p:nvPr/>
-        </p:nvSpPr>
-        <p:spPr>
-          <a:xfrm>
-            <a:off x="777240" y="1645920"/>
-            <a:ext cx="457200" cy="457200"/>
-          </a:xfrm>
-          <a:prstGeom prst="ellipse">
-            <a:avLst/>
-          </a:prstGeom>
-          <a:solidFill>
-            <a:schemeClr val="accent1"/>
-          </a:solidFill>
-          <a:ln w="15875">
-            <a:solidFill>
-              <a:srgbClr val="1A1A1A"/>
-            </a:solidFill>
-            <a:prstDash val="solid"/>
-          </a:ln>
         </p:spPr>
       </p:sp>
       <p:pic>
         <p:nvPicPr>
-          <p:cNvPr id="7" name="icon" descr="preencoded.png">    </p:cNvPr>
+          <p:cNvPr id="6" name="icon" descr="preencoded.png">    </p:cNvPr>
           <p:cNvPicPr>
             <a:picLocks noChangeAspect="1"/>
           </p:cNvPicPr>
@@ -6362,14 +6500,53 @@
         </p:blipFill>
         <p:spPr>
           <a:xfrm>
-            <a:off x="896112" y="1764792"/>
-            <a:ext cx="219456" cy="219456"/>
+            <a:off x="818388" y="1714500"/>
+            <a:ext cx="228600" cy="228600"/>
           </a:xfrm>
           <a:prstGeom prst="rect">
             <a:avLst/>
           </a:prstGeom>
         </p:spPr>
       </p:pic>
+      <p:sp>
+        <p:nvSpPr>
+          <p:cNvPr id="7" name="Text 4"/>
+          <p:cNvSpPr txBox="1"/>
+          <p:nvPr/>
+        </p:nvSpPr>
+        <p:spPr>
+          <a:xfrm>
+            <a:off x="1280160" y="1600200"/>
+            <a:ext cx="2743200" cy="457200"/>
+          </a:xfrm>
+          <a:prstGeom prst="rect">
+            <a:avLst/>
+          </a:prstGeom>
+          <a:noFill/>
+          <a:ln/>
+        </p:spPr>
+        <p:txBody>
+          <a:bodyPr wrap="square" lIns="0" tIns="0" rIns="0" bIns="0" rtlCol="0" anchor="ctr"/>
+          <a:lstStyle/>
+          <a:p>
+            <a:pPr indent="0" marL="0">
+              <a:buNone/>
+            </a:pPr>
+            <a:r>
+              <a:rPr lang="ja-JP" altLang="en-US" sz="1800" dirty="0">
+                <a:solidFill>
+                  <a:srgbClr val="1A1A1A"/>
+                </a:solidFill>
+                <a:latin typeface="Dela Gothic One" pitchFamily="34" charset="0"/>
+                <a:ea typeface="けいふぉんと" pitchFamily="34" charset="-122"/>
+                <a:cs typeface="Dela Gothic One" pitchFamily="34" charset="-120"/>
+              </a:rPr>
+              <a:t>宿題</a:t>
+            </a:r>
+            <a:endParaRPr lang="ja-JP" sz="1800" dirty="0"/>
+          </a:p>
+        </p:txBody>
+      </p:sp>
       <p:sp>
         <p:nvSpPr>
           <p:cNvPr id="8" name="Text 5"/>
@@ -6378,8 +6555,8 @@
         </p:nvSpPr>
         <p:spPr>
           <a:xfrm>
-            <a:off x="1371600" y="1645920"/>
-            <a:ext cx="2743200" cy="457200"/>
+            <a:off x="731520" y="2240280"/>
+            <a:ext cx="3474720" cy="2148840"/>
           </a:xfrm>
           <a:prstGeom prst="rect">
             <a:avLst/>
@@ -6388,43 +6565,9 @@
           <a:ln/>
         </p:spPr>
         <p:txBody>
-          <a:bodyPr wrap="square" lIns="0" tIns="0" rIns="0" bIns="0" rtlCol="0" anchor="ctr"/>
-          <a:lstStyle/>
-          <a:p>
-            <a:pPr indent="0" marL="0">
-              <a:buNone/>
-            </a:pPr>
-            <a:r>
-              <a:rPr lang="en-US" sz="1700" b="1" dirty="0">
-                <a:solidFill>
-                  <a:schemeClr val="tx1"/>
-                </a:solidFill>
-              </a:rPr>
-              <a:t>宿題</a:t>
-            </a:r>
-            <a:endParaRPr lang="en-US" sz="1700" dirty="0"/>
-          </a:p>
-        </p:txBody>
-      </p:sp>
-      <p:sp>
-        <p:nvSpPr>
-          <p:cNvPr id="9" name="Text 6"/>
-          <p:cNvSpPr txBox="1"/>
-          <p:nvPr/>
-        </p:nvSpPr>
-        <p:spPr>
-          <a:xfrm>
-            <a:off x="777240" y="2286000"/>
-            <a:ext cx="3474720" cy="2057400"/>
-          </a:xfrm>
-          <a:prstGeom prst="rect">
-            <a:avLst/>
-          </a:prstGeom>
-          <a:noFill/>
-          <a:ln/>
-        </p:spPr>
-        <p:txBody>
-          <a:bodyPr wrap="square" lIns="0" tIns="0" rIns="0" bIns="0" rtlCol="0" anchor="t"/>
+          <a:bodyPr wrap="square" lIns="0" tIns="0" rIns="0" bIns="0" rtlCol="0" anchor="t">
+            <a:normAutofit/>
+          </a:bodyPr>
           <a:lstStyle/>
           <a:p>
             <a:pPr marL="342900" indent="-342900">
@@ -6432,38 +6575,73 @@
                 <a:spcPts val="800"/>
               </a:spcAft>
               <a:buSzPct val="100000"/>
-              <a:buChar char="•"/>
-            </a:pPr>
-            <a:r>
-              <a:rPr lang="en-US" sz="1350" dirty="0">
-                <a:solidFill>
-                  <a:schemeClr val="tx1"/>
-                </a:solidFill>
+              <a:buChar char="●"/>
+            </a:pPr>
+            <a:r>
+              <a:rPr lang="ja-JP" altLang="en-US" sz="1350" b="1" dirty="0">
+                <a:solidFill>
+                  <a:srgbClr val="1A1A1A"/>
+                </a:solidFill>
+                <a:latin typeface="Noto Sans JP" pitchFamily="34" charset="0"/>
+                <a:ea typeface="Noto Sans JP" pitchFamily="34" charset="-122"/>
+                <a:cs typeface="Noto Sans JP" pitchFamily="34" charset="-120"/>
               </a:rPr>
               <a:t>社内の誰か1人にフォームを使ってもらい、わかりにくかった点を聞いて直す</a:t>
             </a:r>
-            <a:endParaRPr lang="en-US" sz="1350" dirty="0"/>
-          </a:p>
-        </p:txBody>
-      </p:sp>
-      <p:sp>
-        <p:nvSpPr>
-          <p:cNvPr id="10" name="card"/>
+            <a:endParaRPr lang="ja-JP" sz="1350" dirty="0"/>
+          </a:p>
+        </p:txBody>
+      </p:sp>
+      <p:sp>
+        <p:nvSpPr>
+          <p:cNvPr id="9" name="card"/>
           <p:cNvSpPr/>
           <p:nvPr/>
         </p:nvSpPr>
         <p:spPr>
           <a:xfrm>
-            <a:off x="4709160" y="1463040"/>
-            <a:ext cx="3886200" cy="3017520"/>
+            <a:off x="4709160" y="1417320"/>
+            <a:ext cx="3931920" cy="3108960"/>
           </a:xfrm>
           <a:prstGeom prst="roundRect">
             <a:avLst>
-              <a:gd name="adj" fmla="val 3636"/>
+              <a:gd name="adj" fmla="val 2941"/>
             </a:avLst>
           </a:prstGeom>
           <a:solidFill>
-            <a:schemeClr val="bg1"/>
+            <a:srgbClr val="FFFFFF"/>
+          </a:solidFill>
+          <a:ln w="25400">
+            <a:solidFill>
+              <a:srgbClr val="1A1A1A"/>
+            </a:solidFill>
+            <a:prstDash val="solid"/>
+          </a:ln>
+          <a:effectLst>
+            <a:outerShdw sx="100000" sy="100000" kx="0" ky="0" algn="bl" rotWithShape="0" blurRad="101600" dist="50800" dir="2700000">
+              <a:srgbClr val="1A1A1A">
+                <a:alpha val="100000"/>
+              </a:srgbClr>
+            </a:outerShdw>
+          </a:effectLst>
+        </p:spPr>
+      </p:sp>
+      <p:sp>
+        <p:nvSpPr>
+          <p:cNvPr id="10" name="icon-circle"/>
+          <p:cNvSpPr/>
+          <p:nvPr/>
+        </p:nvSpPr>
+        <p:spPr>
+          <a:xfrm>
+            <a:off x="4910328" y="1600200"/>
+            <a:ext cx="457200" cy="457200"/>
+          </a:xfrm>
+          <a:prstGeom prst="ellipse">
+            <a:avLst/>
+          </a:prstGeom>
+          <a:solidFill>
+            <a:srgbClr val="DD6420"/>
           </a:solidFill>
           <a:ln w="19050">
             <a:solidFill>
@@ -6471,43 +6649,11 @@
             </a:solidFill>
             <a:prstDash val="solid"/>
           </a:ln>
-          <a:effectLst>
-            <a:outerShdw sx="100000" sy="100000" kx="0" ky="0" algn="bl" rotWithShape="0" blurRad="101600" dist="38100" dir="2700000">
-              <a:srgbClr val="000000">
-                <a:alpha val="18000"/>
-              </a:srgbClr>
-            </a:outerShdw>
-          </a:effectLst>
-        </p:spPr>
-      </p:sp>
-      <p:sp>
-        <p:nvSpPr>
-          <p:cNvPr id="11" name="icon-circle"/>
-          <p:cNvSpPr/>
-          <p:nvPr/>
-        </p:nvSpPr>
-        <p:spPr>
-          <a:xfrm>
-            <a:off x="4937760" y="1645920"/>
-            <a:ext cx="457200" cy="457200"/>
-          </a:xfrm>
-          <a:prstGeom prst="ellipse">
-            <a:avLst/>
-          </a:prstGeom>
-          <a:solidFill>
-            <a:schemeClr val="accent1"/>
-          </a:solidFill>
-          <a:ln w="15875">
-            <a:solidFill>
-              <a:srgbClr val="1A1A1A"/>
-            </a:solidFill>
-            <a:prstDash val="solid"/>
-          </a:ln>
         </p:spPr>
       </p:sp>
       <p:pic>
         <p:nvPicPr>
-          <p:cNvPr id="12" name="icon" descr="preencoded.png">    </p:cNvPr>
+          <p:cNvPr id="11" name="icon" descr="preencoded.png">    </p:cNvPr>
           <p:cNvPicPr>
             <a:picLocks noChangeAspect="1"/>
           </p:cNvPicPr>
@@ -6521,14 +6667,53 @@
         </p:blipFill>
         <p:spPr>
           <a:xfrm>
-            <a:off x="5056632" y="1764792"/>
-            <a:ext cx="219456" cy="219456"/>
+            <a:off x="5024628" y="1714500"/>
+            <a:ext cx="228600" cy="228600"/>
           </a:xfrm>
           <a:prstGeom prst="rect">
             <a:avLst/>
           </a:prstGeom>
         </p:spPr>
       </p:pic>
+      <p:sp>
+        <p:nvSpPr>
+          <p:cNvPr id="12" name="Text 8"/>
+          <p:cNvSpPr txBox="1"/>
+          <p:nvPr/>
+        </p:nvSpPr>
+        <p:spPr>
+          <a:xfrm>
+            <a:off x="5486400" y="1600200"/>
+            <a:ext cx="2743200" cy="457200"/>
+          </a:xfrm>
+          <a:prstGeom prst="rect">
+            <a:avLst/>
+          </a:prstGeom>
+          <a:noFill/>
+          <a:ln/>
+        </p:spPr>
+        <p:txBody>
+          <a:bodyPr wrap="square" lIns="0" tIns="0" rIns="0" bIns="0" rtlCol="0" anchor="ctr"/>
+          <a:lstStyle/>
+          <a:p>
+            <a:pPr indent="0" marL="0">
+              <a:buNone/>
+            </a:pPr>
+            <a:r>
+              <a:rPr lang="ja-JP" altLang="en-US" sz="1800" dirty="0">
+                <a:solidFill>
+                  <a:srgbClr val="1A1A1A"/>
+                </a:solidFill>
+                <a:latin typeface="Dela Gothic One" pitchFamily="34" charset="0"/>
+                <a:ea typeface="けいふぉんと" pitchFamily="34" charset="-122"/>
+                <a:cs typeface="Dela Gothic One" pitchFamily="34" charset="-120"/>
+              </a:rPr>
+              <a:t>できたらチェック</a:t>
+            </a:r>
+            <a:endParaRPr lang="ja-JP" sz="1800" dirty="0"/>
+          </a:p>
+        </p:txBody>
+      </p:sp>
       <p:sp>
         <p:nvSpPr>
           <p:cNvPr id="13" name="Text 9"/>
@@ -6537,8 +6722,8 @@
         </p:nvSpPr>
         <p:spPr>
           <a:xfrm>
-            <a:off x="5532120" y="1645920"/>
-            <a:ext cx="2743200" cy="457200"/>
+            <a:off x="4937760" y="2240280"/>
+            <a:ext cx="3474720" cy="2148840"/>
           </a:xfrm>
           <a:prstGeom prst="rect">
             <a:avLst/>
@@ -6547,43 +6732,9 @@
           <a:ln/>
         </p:spPr>
         <p:txBody>
-          <a:bodyPr wrap="square" lIns="0" tIns="0" rIns="0" bIns="0" rtlCol="0" anchor="ctr"/>
-          <a:lstStyle/>
-          <a:p>
-            <a:pPr indent="0" marL="0">
-              <a:buNone/>
-            </a:pPr>
-            <a:r>
-              <a:rPr lang="en-US" sz="1700" b="1" dirty="0">
-                <a:solidFill>
-                  <a:schemeClr val="tx1"/>
-                </a:solidFill>
-              </a:rPr>
-              <a:t>できたらチェック</a:t>
-            </a:r>
-            <a:endParaRPr lang="en-US" sz="1700" dirty="0"/>
-          </a:p>
-        </p:txBody>
-      </p:sp>
-      <p:sp>
-        <p:nvSpPr>
-          <p:cNvPr id="14" name="Text 10"/>
-          <p:cNvSpPr txBox="1"/>
-          <p:nvPr/>
-        </p:nvSpPr>
-        <p:spPr>
-          <a:xfrm>
-            <a:off x="4937760" y="2286000"/>
-            <a:ext cx="3474720" cy="2057400"/>
-          </a:xfrm>
-          <a:prstGeom prst="rect">
-            <a:avLst/>
-          </a:prstGeom>
-          <a:noFill/>
-          <a:ln/>
-        </p:spPr>
-        <p:txBody>
-          <a:bodyPr wrap="square" lIns="0" tIns="0" rIns="0" bIns="0" rtlCol="0" anchor="t"/>
+          <a:bodyPr wrap="square" lIns="0" tIns="0" rIns="0" bIns="0" rtlCol="0" anchor="t">
+            <a:normAutofit/>
+          </a:bodyPr>
           <a:lstStyle/>
           <a:p>
             <a:pPr indent="0" marL="0">
@@ -6593,14 +6744,17 @@
               <a:buNone/>
             </a:pPr>
             <a:r>
-              <a:rPr lang="en-US" sz="1350" dirty="0">
-                <a:solidFill>
-                  <a:schemeClr val="tx1"/>
-                </a:solidFill>
+              <a:rPr lang="ja-JP" altLang="en-US" sz="1350" b="1" dirty="0">
+                <a:solidFill>
+                  <a:srgbClr val="1A1A1A"/>
+                </a:solidFill>
+                <a:latin typeface="Noto Sans JP" pitchFamily="34" charset="0"/>
+                <a:ea typeface="Noto Sans JP" pitchFamily="34" charset="-122"/>
+                <a:cs typeface="Noto Sans JP" pitchFamily="34" charset="-120"/>
               </a:rPr>
               <a:t>☐ フォームから入力したデータがテーブルに入った</a:t>
             </a:r>
-            <a:endParaRPr lang="en-US" sz="1350" dirty="0"/>
+            <a:endParaRPr lang="ja-JP" sz="1350" dirty="0"/>
           </a:p>
           <a:p>
             <a:pPr indent="0" marL="0">
@@ -6610,14 +6764,17 @@
               <a:buNone/>
             </a:pPr>
             <a:r>
-              <a:rPr lang="en-US" sz="1350" dirty="0">
-                <a:solidFill>
-                  <a:schemeClr val="tx1"/>
-                </a:solidFill>
+              <a:rPr lang="ja-JP" altLang="en-US" sz="1350" b="1" dirty="0">
+                <a:solidFill>
+                  <a:srgbClr val="1A1A1A"/>
+                </a:solidFill>
+                <a:latin typeface="Noto Sans JP" pitchFamily="34" charset="0"/>
+                <a:ea typeface="Noto Sans JP" pitchFamily="34" charset="-122"/>
+                <a:cs typeface="Noto Sans JP" pitchFamily="34" charset="-120"/>
               </a:rPr>
               <a:t>☐ 目的別のビューが2つ以上ある</a:t>
             </a:r>
-            <a:endParaRPr lang="en-US" sz="1350" dirty="0"/>
+            <a:endParaRPr lang="ja-JP" sz="1350" dirty="0"/>
           </a:p>
           <a:p>
             <a:pPr indent="0" marL="0">
@@ -6627,14 +6784,17 @@
               <a:buNone/>
             </a:pPr>
             <a:r>
-              <a:rPr lang="en-US" sz="1350" dirty="0">
-                <a:solidFill>
-                  <a:schemeClr val="tx1"/>
-                </a:solidFill>
+              <a:rPr lang="ja-JP" altLang="en-US" sz="1350" b="1" dirty="0">
+                <a:solidFill>
+                  <a:srgbClr val="1A1A1A"/>
+                </a:solidFill>
+                <a:latin typeface="Noto Sans JP" pitchFamily="34" charset="0"/>
+                <a:ea typeface="Noto Sans JP" pitchFamily="34" charset="-122"/>
+                <a:cs typeface="Noto Sans JP" pitchFamily="34" charset="-120"/>
               </a:rPr>
               <a:t>☐ ダッシュボードで今月の件数が見られる</a:t>
             </a:r>
-            <a:endParaRPr lang="en-US" sz="1350" dirty="0"/>
+            <a:endParaRPr lang="ja-JP" sz="1350" dirty="0"/>
           </a:p>
         </p:txBody>
       </p:sp>
@@ -6650,8 +6810,8 @@
         </p:nvSpPr>
         <p:spPr>
           <a:xfrm>
-            <a:off x="8229600" y="4773168"/>
-            <a:ext cx="365760" cy="228600"/>
+            <a:off x="8366760" y="4754880"/>
+            <a:ext cx="365760" cy="274320"/>
           </a:xfrm>
           <a:prstGeom prst="rect">
             <a:avLst/>
@@ -6663,20 +6823,23 @@
           </a:extLst>
         </p:spPr>
         <p:txBody>
-          <a:bodyPr/>
+          <a:bodyPr anchor="ctr"/>
           <a:lstStyle>
             <a:lvl1pPr>
-              <a:defRPr sz="900">
-                <a:solidFill>
-                  <a:srgbClr val="5A6872"/>
-                </a:solidFill>
+              <a:defRPr sz="850">
+                <a:solidFill>
+                  <a:srgbClr val="FFFFFF"/>
+                </a:solidFill>
+                <a:latin typeface="Noto Sans JP"/>
+                <a:ea typeface="Noto Sans JP"/>
+                <a:cs typeface="Noto Sans JP"/>
               </a:defRPr>
             </a:lvl1pPr>
           </a:lstStyle>
           <a:p>
             <a:pPr algn="r"/>
             <a:fld id="{F7021451-1387-4CA6-816F-3879F97B5CBC}" type="slidenum">
-              <a:rPr b="0" lang="en-US"/>
+              <a:rPr b="1" lang="en-US"/>
               <a:t>7</a:t>
             </a:fld>
             <a:endParaRPr lang="en-US"/>
@@ -6708,18 +6871,92 @@
           <a:chExt cx="0" cy="0"/>
         </a:xfrm>
       </p:grpSpPr>
-      <p:sp>
-        <p:nvSpPr>
-          <p:cNvPr id="2" name="Text 0"/>
-          <p:cNvSpPr/>
-          <p:nvPr>
-            <p:ph idx="100" type="title" hasCustomPrompt="1"/>
-          </p:nvPr>
-        </p:nvSpPr>
-        <p:spPr>
-          <a:xfrm>
-            <a:off x="548640" y="1463040"/>
-            <a:ext cx="8046720" cy="1005840"/>
+      <p:pic>
+        <p:nvPicPr>
+          <p:cNvPr id="2" name="portrait" descr="講師 笹原彰朗">    </p:cNvPr>
+          <p:cNvPicPr>
+            <a:picLocks noChangeAspect="1"/>
+          </p:cNvPicPr>
+          <p:nvPr/>
+        </p:nvPicPr>
+        <p:blipFill>
+          <a:blip r:embed="rId1"/>
+          <a:stretch>
+            <a:fillRect/>
+          </a:stretch>
+        </p:blipFill>
+        <p:spPr>
+          <a:xfrm>
+            <a:off x="6003588" y="1211580"/>
+            <a:ext cx="2866092" cy="3931920"/>
+          </a:xfrm>
+          <a:prstGeom prst="rect">
+            <a:avLst/>
+          </a:prstGeom>
+        </p:spPr>
+      </p:pic>
+      <p:sp>
+        <p:nvSpPr>
+          <p:cNvPr id="3" name="Text 0"/>
+          <p:cNvSpPr txBox="1"/>
+          <p:nvPr/>
+        </p:nvSpPr>
+        <p:spPr>
+          <a:xfrm rot="-240000">
+            <a:off x="457200" y="548640"/>
+            <a:ext cx="1280160" cy="548640"/>
+          </a:xfrm>
+          <a:prstGeom prst="rect">
+            <a:avLst/>
+          </a:prstGeom>
+          <a:solidFill>
+            <a:srgbClr val="1A1A1A"/>
+          </a:solidFill>
+          <a:ln>
+            <a:solidFill>
+              <a:srgbClr val="1A1A1A"/>
+            </a:solidFill>
+          </a:ln>
+          <a:effectLst>
+            <a:outerShdw sx="100000" sy="100000" kx="0" ky="0" algn="bl" rotWithShape="0" blurRad="101600" dist="38100" dir="2700000">
+              <a:srgbClr val="1A1A1A">
+                <a:alpha val="100000"/>
+              </a:srgbClr>
+            </a:outerShdw>
+          </a:effectLst>
+        </p:spPr>
+        <p:txBody>
+          <a:bodyPr wrap="square" lIns="0" tIns="0" rIns="0" bIns="0" rtlCol="0" anchor="ctr"/>
+          <a:lstStyle/>
+          <a:p>
+            <a:pPr algn="ctr" indent="0" marL="0">
+              <a:buNone/>
+            </a:pPr>
+            <a:r>
+              <a:rPr lang="ja-JP" altLang="en-US" sz="2000" dirty="0">
+                <a:solidFill>
+                  <a:srgbClr val="FFD600"/>
+                </a:solidFill>
+                <a:latin typeface="Dela Gothic One" pitchFamily="34" charset="0"/>
+                <a:ea typeface="けいふぉんと" pitchFamily="34" charset="-122"/>
+                <a:cs typeface="Dela Gothic One" pitchFamily="34" charset="-120"/>
+              </a:rPr>
+              <a:t>次回</a:t>
+            </a:r>
+            <a:endParaRPr lang="ja-JP" sz="2000" dirty="0"/>
+          </a:p>
+        </p:txBody>
+      </p:sp>
+      <p:sp>
+        <p:nvSpPr>
+          <p:cNvPr id="4" name="Text 1"/>
+          <p:cNvSpPr txBox="1"/>
+          <p:nvPr/>
+        </p:nvSpPr>
+        <p:spPr>
+          <a:xfrm>
+            <a:off x="457200" y="1280160"/>
+            <a:ext cx="5852160" cy="1554480"/>
           </a:xfrm>
           <a:prstGeom prst="rect">
             <a:avLst/>
@@ -6728,36 +6965,90 @@
           <a:ln/>
         </p:spPr>
         <p:txBody>
-          <a:bodyPr wrap="square" lIns="0" tIns="0" rIns="0" bIns="0" rtlCol="0" anchor="t"/>
-          <a:lstStyle/>
-          <a:p>
-            <a:pPr algn="l" indent="0" marL="0">
-              <a:buNone/>
-            </a:pPr>
-            <a:r>
-              <a:rPr lang="en-US" sz="3000" b="1" dirty="0">
-                <a:solidFill>
-                  <a:schemeClr val="accent1"/>
-                </a:solidFill>
-              </a:rPr>
-              <a:t>次回：第6回 自動化・通知・承認</a:t>
-            </a:r>
-            <a:endParaRPr lang="en-US" sz="3000" dirty="0"/>
-          </a:p>
-        </p:txBody>
-      </p:sp>
-      <p:sp>
-        <p:nvSpPr>
-          <p:cNvPr id="3" name="Text 0"/>
+          <a:bodyPr wrap="square" lIns="0" tIns="0" rIns="0" bIns="0" rtlCol="0" anchor="ctr">
+            <a:normAutofit/>
+          </a:bodyPr>
+          <a:lstStyle/>
+          <a:p>
+            <a:pPr indent="0" marL="0">
+              <a:buNone/>
+            </a:pPr>
+            <a:r>
+              <a:rPr lang="ja-JP" altLang="en-US" sz="3200" dirty="0">
+                <a:solidFill>
+                  <a:srgbClr val="1A1A1A"/>
+                </a:solidFill>
+                <a:latin typeface="Dela Gothic One" pitchFamily="34" charset="0"/>
+                <a:ea typeface="けいふぉんと" pitchFamily="34" charset="-122"/>
+                <a:cs typeface="Dela Gothic One" pitchFamily="34" charset="-120"/>
+              </a:rPr>
+              <a:t>第6回</a:t>
+            </a:r>
+            <a:endParaRPr lang="ja-JP" sz="3200" dirty="0"/>
+          </a:p>
+          <a:p>
+            <a:pPr indent="0" marL="0">
+              <a:buNone/>
+            </a:pPr>
+            <a:r>
+              <a:rPr lang="ja-JP" altLang="en-US" sz="3200" dirty="0">
+                <a:solidFill>
+                  <a:srgbClr val="1A1A1A"/>
+                </a:solidFill>
+                <a:latin typeface="Dela Gothic One" pitchFamily="34" charset="0"/>
+                <a:ea typeface="けいふぉんと" pitchFamily="34" charset="-122"/>
+                <a:cs typeface="Dela Gothic One" pitchFamily="34" charset="-120"/>
+              </a:rPr>
+              <a:t>自動化・通知・承認</a:t>
+            </a:r>
+            <a:endParaRPr lang="ja-JP" sz="3200" dirty="0"/>
+          </a:p>
+        </p:txBody>
+      </p:sp>
+      <p:sp>
+        <p:nvSpPr>
+          <p:cNvPr id="5" name="card"/>
           <p:cNvSpPr/>
-          <p:nvPr>
-            <p:ph idx="101" type="body" hasCustomPrompt="1"/>
-          </p:nvPr>
-        </p:nvSpPr>
-        <p:spPr>
-          <a:xfrm>
-            <a:off x="548640" y="2606040"/>
-            <a:ext cx="8046720" cy="1097280"/>
+          <p:nvPr/>
+        </p:nvSpPr>
+        <p:spPr>
+          <a:xfrm>
+            <a:off x="457200" y="3108960"/>
+            <a:ext cx="5394960" cy="1325880"/>
+          </a:xfrm>
+          <a:prstGeom prst="roundRect">
+            <a:avLst>
+              <a:gd name="adj" fmla="val 6897"/>
+            </a:avLst>
+          </a:prstGeom>
+          <a:solidFill>
+            <a:srgbClr val="FFFFFF"/>
+          </a:solidFill>
+          <a:ln w="25400">
+            <a:solidFill>
+              <a:srgbClr val="1A1A1A"/>
+            </a:solidFill>
+            <a:prstDash val="solid"/>
+          </a:ln>
+          <a:effectLst>
+            <a:outerShdw sx="100000" sy="100000" kx="0" ky="0" algn="bl" rotWithShape="0" blurRad="101600" dist="50800" dir="2700000">
+              <a:srgbClr val="1A1A1A">
+                <a:alpha val="100000"/>
+              </a:srgbClr>
+            </a:outerShdw>
+          </a:effectLst>
+        </p:spPr>
+      </p:sp>
+      <p:sp>
+        <p:nvSpPr>
+          <p:cNvPr id="6" name="Text 3"/>
+          <p:cNvSpPr txBox="1"/>
+          <p:nvPr/>
+        </p:nvSpPr>
+        <p:spPr>
+          <a:xfrm>
+            <a:off x="685800" y="3200400"/>
+            <a:ext cx="4937760" cy="1143000"/>
           </a:xfrm>
           <a:prstGeom prst="rect">
             <a:avLst/>
@@ -6766,35 +7057,49 @@
           <a:ln/>
         </p:spPr>
         <p:txBody>
-          <a:bodyPr wrap="square" lIns="0" tIns="0" rIns="0" bIns="0" rtlCol="0" anchor="t"/>
+          <a:bodyPr wrap="square" lIns="0" tIns="0" rIns="0" bIns="0" rtlCol="0" anchor="ctr">
+            <a:normAutofit/>
+          </a:bodyPr>
           <a:lstStyle/>
           <a:p>
             <a:pPr indent="0" marL="0">
-              <a:buNone/>
-            </a:pPr>
-            <a:r>
-              <a:rPr lang="en-US" sz="1500" dirty="0">
-                <a:solidFill>
-                  <a:schemeClr val="bg1"/>
-                </a:solidFill>
+              <a:spcAft>
+                <a:spcPts val="400"/>
+              </a:spcAft>
+              <a:buNone/>
+            </a:pPr>
+            <a:r>
+              <a:rPr lang="ja-JP" altLang="en-US" sz="1400" b="1" dirty="0">
+                <a:solidFill>
+                  <a:srgbClr val="1A1A1A"/>
+                </a:solidFill>
+                <a:latin typeface="Noto Sans JP" pitchFamily="34" charset="0"/>
+                <a:ea typeface="Noto Sans JP" pitchFamily="34" charset="-122"/>
+                <a:cs typeface="Noto Sans JP" pitchFamily="34" charset="-120"/>
               </a:rPr>
               <a:t>わからないところは、講座グループでいつでも質問してください。</a:t>
             </a:r>
-            <a:endParaRPr lang="en-US" sz="1500" dirty="0"/>
+            <a:endParaRPr lang="ja-JP" sz="1400" dirty="0"/>
           </a:p>
           <a:p>
             <a:pPr indent="0" marL="0">
-              <a:buNone/>
-            </a:pPr>
-            <a:r>
-              <a:rPr lang="en-US" sz="1500" dirty="0">
-                <a:solidFill>
-                  <a:schemeClr val="bg1"/>
-                </a:solidFill>
+              <a:spcAft>
+                <a:spcPts val="400"/>
+              </a:spcAft>
+              <a:buNone/>
+            </a:pPr>
+            <a:r>
+              <a:rPr lang="ja-JP" altLang="en-US" sz="1400" b="1" dirty="0">
+                <a:solidFill>
+                  <a:srgbClr val="1A1A1A"/>
+                </a:solidFill>
+                <a:latin typeface="Noto Sans JP" pitchFamily="34" charset="0"/>
+                <a:ea typeface="Noto Sans JP" pitchFamily="34" charset="-122"/>
+                <a:cs typeface="Noto Sans JP" pitchFamily="34" charset="-120"/>
               </a:rPr>
               <a:t>APIキーやパスワードは送らないでください。</a:t>
             </a:r>
-            <a:endParaRPr lang="en-US" sz="1500" dirty="0"/>
+            <a:endParaRPr lang="ja-JP" sz="1400" dirty="0"/>
           </a:p>
         </p:txBody>
       </p:sp>
@@ -6807,9 +7112,9 @@
 </file>
 
 <file path=ppt/theme/theme1.xml><?xml version="1.0" encoding="utf-8"?>
-<a:theme xmlns:a="http://schemas.openxmlformats.org/drawingml/2006/main" name="Manaberu">
+<a:theme xmlns:a="http://schemas.openxmlformats.org/drawingml/2006/main" name="SasaYell">
   <a:themeElements>
-    <a:clrScheme name="Manaberu">
+    <a:clrScheme name="SasaYell">
       <a:dk1>
         <a:srgbClr val="1A1A1A"/>
       </a:dk1>
@@ -6817,10 +7122,10 @@
         <a:srgbClr val="FFFFFF"/>
       </a:lt1>
       <a:dk2>
-        <a:srgbClr val="5A6872"/>
+        <a:srgbClr val="1A1A1A"/>
       </a:dk2>
       <a:lt2>
-        <a:srgbClr val="FFF6CC"/>
+        <a:srgbClr val="FFD600"/>
       </a:lt2>
       <a:accent1>
         <a:srgbClr val="FFD600"/>
@@ -6829,128 +7134,34 @@
         <a:srgbClr val="DD6420"/>
       </a:accent2>
       <a:accent3>
-        <a:srgbClr val="3370FF"/>
+        <a:srgbClr val="F5A623"/>
       </a:accent3>
       <a:accent4>
-        <a:srgbClr val="06C755"/>
+        <a:srgbClr val="1A1A1A"/>
       </a:accent4>
       <a:accent5>
-        <a:srgbClr val="E53935"/>
+        <a:srgbClr val="FFFFFF"/>
       </a:accent5>
       <a:accent6>
-        <a:srgbClr val="F5A623"/>
+        <a:srgbClr val="DD6420"/>
       </a:accent6>
       <a:hlink>
-        <a:srgbClr val="3370FF"/>
+        <a:srgbClr val="DD6420"/>
       </a:hlink>
       <a:folHlink>
-        <a:srgbClr val="6B4FBB"/>
+        <a:srgbClr val="F5A623"/>
       </a:folHlink>
     </a:clrScheme>
-    <a:fontScheme name="Manaberu">
+    <a:fontScheme name="SasaYell">
       <a:majorFont>
-        <a:latin typeface="Yu Gothic"/>
-        <a:ea typeface=""/>
+        <a:latin typeface="Dela Gothic One"/>
+        <a:ea typeface="けいふぉんと"/>
         <a:cs typeface=""/>
-        <a:font script="Jpan" typeface="游ゴシック Light"/>
-        <a:font script="Hang" typeface="맑은 고딕"/>
-        <a:font script="Hans" typeface="等线 Light"/>
-        <a:font script="Hant" typeface="新細明體"/>
-        <a:font script="Arab" typeface="Times New Roman"/>
-        <a:font script="Hebr" typeface="Times New Roman"/>
-        <a:font script="Thai" typeface="Angsana New"/>
-        <a:font script="Ethi" typeface="Nyala"/>
-        <a:font script="Beng" typeface="Vrinda"/>
-        <a:font script="Gujr" typeface="Shruti"/>
-        <a:font script="Khmr" typeface="MoolBoran"/>
-        <a:font script="Knda" typeface="Tunga"/>
-        <a:font script="Guru" typeface="Raavi"/>
-        <a:font script="Cans" typeface="Euphemia"/>
-        <a:font script="Cher" typeface="Plantagenet Cherokee"/>
-        <a:font script="Yiii" typeface="Microsoft Yi Baiti"/>
-        <a:font script="Tibt" typeface="Microsoft Himalaya"/>
-        <a:font script="Thaa" typeface="MV Boli"/>
-        <a:font script="Deva" typeface="Mangal"/>
-        <a:font script="Telu" typeface="Gautami"/>
-        <a:font script="Taml" typeface="Latha"/>
-        <a:font script="Syrc" typeface="Estrangelo Edessa"/>
-        <a:font script="Orya" typeface="Kalinga"/>
-        <a:font script="Mlym" typeface="Kartika"/>
-        <a:font script="Laoo" typeface="DokChampa"/>
-        <a:font script="Sinh" typeface="Iskoola Pota"/>
-        <a:font script="Mong" typeface="Mongolian Baiti"/>
-        <a:font script="Viet" typeface="Times New Roman"/>
-        <a:font script="Uigh" typeface="Microsoft Uighur"/>
-        <a:font script="Geor" typeface="Sylfaen"/>
-        <a:font script="Armn" typeface="Arial"/>
-        <a:font script="Bugi" typeface="Leelawadee UI"/>
-        <a:font script="Bopo" typeface="Microsoft JhengHei"/>
-        <a:font script="Java" typeface="Javanese Text"/>
-        <a:font script="Lisu" typeface="Segoe UI"/>
-        <a:font script="Mymr" typeface="Myanmar Text"/>
-        <a:font script="Nkoo" typeface="Ebrima"/>
-        <a:font script="Olck" typeface="Nirmala UI"/>
-        <a:font script="Osma" typeface="Ebrima"/>
-        <a:font script="Phag" typeface="Phagspa"/>
-        <a:font script="Syrn" typeface="Estrangelo Edessa"/>
-        <a:font script="Syrj" typeface="Estrangelo Edessa"/>
-        <a:font script="Syre" typeface="Estrangelo Edessa"/>
-        <a:font script="Sora" typeface="Nirmala UI"/>
-        <a:font script="Tale" typeface="Microsoft Tai Le"/>
-        <a:font script="Talu" typeface="Microsoft New Tai Lue"/>
-        <a:font script="Tfng" typeface="Ebrima"/>
       </a:majorFont>
       <a:minorFont>
-        <a:latin typeface="Yu Gothic"/>
-        <a:ea typeface=""/>
+        <a:latin typeface="Noto Sans JP"/>
+        <a:ea typeface="Noto Sans JP"/>
         <a:cs typeface=""/>
-        <a:font script="Jpan" typeface="游ゴシック"/>
-        <a:font script="Hang" typeface="맑은 고딕"/>
-        <a:font script="Hans" typeface="等线"/>
-        <a:font script="Hant" typeface="新細明體"/>
-        <a:font script="Arab" typeface="Arial"/>
-        <a:font script="Hebr" typeface="Arial"/>
-        <a:font script="Thai" typeface="Cordia New"/>
-        <a:font script="Ethi" typeface="Nyala"/>
-        <a:font script="Beng" typeface="Vrinda"/>
-        <a:font script="Gujr" typeface="Shruti"/>
-        <a:font script="Khmr" typeface="DaunPenh"/>
-        <a:font script="Knda" typeface="Tunga"/>
-        <a:font script="Guru" typeface="Raavi"/>
-        <a:font script="Cans" typeface="Euphemia"/>
-        <a:font script="Cher" typeface="Plantagenet Cherokee"/>
-        <a:font script="Yiii" typeface="Microsoft Yi Baiti"/>
-        <a:font script="Tibt" typeface="Microsoft Himalaya"/>
-        <a:font script="Thaa" typeface="MV Boli"/>
-        <a:font script="Deva" typeface="Mangal"/>
-        <a:font script="Telu" typeface="Gautami"/>
-        <a:font script="Taml" typeface="Latha"/>
-        <a:font script="Syrc" typeface="Estrangelo Edessa"/>
-        <a:font script="Orya" typeface="Kalinga"/>
-        <a:font script="Mlym" typeface="Kartika"/>
-        <a:font script="Laoo" typeface="DokChampa"/>
-        <a:font script="Sinh" typeface="Iskoola Pota"/>
-        <a:font script="Mong" typeface="Mongolian Baiti"/>
-        <a:font script="Viet" typeface="Arial"/>
-        <a:font script="Uigh" typeface="Microsoft Uighur"/>
-        <a:font script="Geor" typeface="Sylfaen"/>
-        <a:font script="Armn" typeface="Arial"/>
-        <a:font script="Bugi" typeface="Leelawadee UI"/>
-        <a:font script="Bopo" typeface="Microsoft JhengHei"/>
-        <a:font script="Java" typeface="Javanese Text"/>
-        <a:font script="Lisu" typeface="Segoe UI"/>
-        <a:font script="Mymr" typeface="Myanmar Text"/>
-        <a:font script="Nkoo" typeface="Ebrima"/>
-        <a:font script="Olck" typeface="Nirmala UI"/>
-        <a:font script="Osma" typeface="Ebrima"/>
-        <a:font script="Phag" typeface="Phagspa"/>
-        <a:font script="Syrn" typeface="Estrangelo Edessa"/>
-        <a:font script="Syrj" typeface="Estrangelo Edessa"/>
-        <a:font script="Syre" typeface="Estrangelo Edessa"/>
-        <a:font script="Sora" typeface="Nirmala UI"/>
-        <a:font script="Tale" typeface="Microsoft Tai Le"/>
-        <a:font script="Talu" typeface="Microsoft New Tai Lue"/>
-        <a:font script="Tfng" typeface="Ebrima"/>
       </a:minorFont>
     </a:fontScheme>
     <a:fmtScheme name="Office">
